--- a/Sistema de Cadastro de Amigos da Gabi.pptx
+++ b/Sistema de Cadastro de Amigos da Gabi.pptx
@@ -1,6 +1,6 @@
 
 <file path=ppt/presentation.xml><?xml version="1.0" encoding="utf-8"?>
-<p:presentation xmlns:a="http://schemas.openxmlformats.org/drawingml/2006/main" xmlns:r="http://schemas.openxmlformats.org/officeDocument/2006/relationships" xmlns:mc="http://schemas.openxmlformats.org/markup-compatibility/2006" xmlns:mv="urn:schemas-microsoft-com:mac:vml" xmlns:p="http://schemas.openxmlformats.org/presentationml/2006/main" xmlns:c="http://schemas.openxmlformats.org/drawingml/2006/chart" xmlns:dgm="http://schemas.openxmlformats.org/drawingml/2006/diagram" xmlns:o="urn:schemas-microsoft-com:office:office" xmlns:v="urn:schemas-microsoft-com:vml" xmlns:pvml="urn:schemas-microsoft-com:office:powerpoint" xmlns:com="http://schemas.openxmlformats.org/drawingml/2006/compatibility" xmlns:p14="http://schemas.microsoft.com/office/powerpoint/2010/main" xmlns:p15="http://schemas.microsoft.com/office/powerpoint/2012/main" xmlns:ahyp="http://schemas.microsoft.com/office/drawing/2018/hyperlinkcolor" autoCompressPictures="0" strictFirstAndLastChars="0" saveSubsetFonts="1">
+<p:presentation xmlns:a="http://schemas.openxmlformats.org/drawingml/2006/main" xmlns:r="http://schemas.openxmlformats.org/officeDocument/2006/relationships" xmlns:mc="http://schemas.openxmlformats.org/markup-compatibility/2006" xmlns:mv="urn:schemas-microsoft-com:mac:vml" xmlns:p="http://schemas.openxmlformats.org/presentationml/2006/main" xmlns:c="http://schemas.openxmlformats.org/drawingml/2006/chart" xmlns:dgm="http://schemas.openxmlformats.org/drawingml/2006/diagram" xmlns:o="urn:schemas-microsoft-com:office:office" xmlns:v="urn:schemas-microsoft-com:vml" xmlns:pvml="urn:schemas-microsoft-com:office:powerpoint" xmlns:com="http://schemas.openxmlformats.org/drawingml/2006/compatibility" xmlns:p14="http://schemas.microsoft.com/office/powerpoint/2010/main" xmlns:p15="http://schemas.microsoft.com/office/powerpoint/2012/main" xmlns:ahyp="http://schemas.microsoft.com/office/drawing/2018/hyperlinkcolor" autoCompressPictures="0" embedTrueTypeFonts="1" strictFirstAndLastChars="0" saveSubsetFonts="1">
   <p:sldMasterIdLst>
     <p:sldMasterId id="2147483659" r:id="rId4"/>
   </p:sldMasterIdLst>
@@ -16,9 +16,39 @@
     <p:sldId id="261" r:id="rId11"/>
     <p:sldId id="262" r:id="rId12"/>
     <p:sldId id="263" r:id="rId13"/>
+    <p:sldId id="264" r:id="rId14"/>
+    <p:sldId id="265" r:id="rId15"/>
+    <p:sldId id="266" r:id="rId16"/>
+    <p:sldId id="267" r:id="rId17"/>
+    <p:sldId id="268" r:id="rId18"/>
   </p:sldIdLst>
   <p:sldSz cy="5143500" cx="9144000"/>
   <p:notesSz cx="6858000" cy="9144000"/>
+  <p:embeddedFontLst>
+    <p:embeddedFont>
+      <p:font typeface="Playfair Display"/>
+      <p:regular r:id="rId19"/>
+      <p:bold r:id="rId20"/>
+      <p:italic r:id="rId21"/>
+      <p:boldItalic r:id="rId22"/>
+    </p:embeddedFont>
+    <p:embeddedFont>
+      <p:font typeface="Montserrat"/>
+      <p:regular r:id="rId23"/>
+      <p:bold r:id="rId24"/>
+      <p:italic r:id="rId25"/>
+      <p:boldItalic r:id="rId26"/>
+    </p:embeddedFont>
+    <p:embeddedFont>
+      <p:font typeface="Average"/>
+      <p:regular r:id="rId27"/>
+    </p:embeddedFont>
+    <p:embeddedFont>
+      <p:font typeface="Oswald"/>
+      <p:regular r:id="rId28"/>
+      <p:bold r:id="rId29"/>
+    </p:embeddedFont>
+  </p:embeddedFontLst>
   <p:defaultTextStyle>
     <a:defPPr lvl="0" marR="0" rtl="0" algn="l">
       <a:lnSpc>
@@ -698,7 +728,7 @@
   <p:cSld>
     <p:spTree>
       <p:nvGrpSpPr>
-        <p:cNvPr id="50" name="Shape 50"/>
+        <p:cNvPr id="54" name="Shape 54"/>
         <p:cNvGrpSpPr/>
         <p:nvPr/>
       </p:nvGrpSpPr>
@@ -712,7 +742,7 @@
       </p:grpSpPr>
       <p:sp>
         <p:nvSpPr>
-          <p:cNvPr id="51" name="Google Shape;51;p:notes"/>
+          <p:cNvPr id="55" name="Google Shape;55;p:notes"/>
           <p:cNvSpPr/>
           <p:nvPr>
             <p:ph idx="2" type="sldImg"/>
@@ -747,7 +777,403 @@
       </p:sp>
       <p:sp>
         <p:nvSpPr>
-          <p:cNvPr id="52" name="Google Shape;52;p:notes"/>
+          <p:cNvPr id="56" name="Google Shape;56;p:notes"/>
+          <p:cNvSpPr txBox="1"/>
+          <p:nvPr>
+            <p:ph idx="1" type="body"/>
+          </p:nvPr>
+        </p:nvSpPr>
+        <p:spPr>
+          <a:xfrm>
+            <a:off x="685800" y="4343400"/>
+            <a:ext cx="5486400" cy="4114800"/>
+          </a:xfrm>
+          <a:prstGeom prst="rect">
+            <a:avLst/>
+          </a:prstGeom>
+        </p:spPr>
+        <p:txBody>
+          <a:bodyPr anchorCtr="0" anchor="t" bIns="91425" lIns="91425" spcFirstLastPara="1" rIns="91425" wrap="square" tIns="91425">
+            <a:noAutofit/>
+          </a:bodyPr>
+          <a:lstStyle/>
+          <a:p>
+            <a:pPr indent="0" lvl="0" marL="0" rtl="0" algn="l">
+              <a:spcBef>
+                <a:spcPts val="0"/>
+              </a:spcBef>
+              <a:spcAft>
+                <a:spcPts val="0"/>
+              </a:spcAft>
+              <a:buNone/>
+            </a:pPr>
+            <a:r>
+              <a:t/>
+            </a:r>
+            <a:endParaRPr/>
+          </a:p>
+        </p:txBody>
+      </p:sp>
+    </p:spTree>
+  </p:cSld>
+  <p:clrMapOvr>
+    <a:masterClrMapping/>
+  </p:clrMapOvr>
+</p:notes>
+</file>
+
+<file path=ppt/notesSlides/notesSlide10.xml><?xml version="1.0" encoding="utf-8"?>
+<p:notes xmlns:a="http://schemas.openxmlformats.org/drawingml/2006/main" xmlns:r="http://schemas.openxmlformats.org/officeDocument/2006/relationships" xmlns:mc="http://schemas.openxmlformats.org/markup-compatibility/2006" xmlns:mv="urn:schemas-microsoft-com:mac:vml" xmlns:p="http://schemas.openxmlformats.org/presentationml/2006/main" xmlns:c="http://schemas.openxmlformats.org/drawingml/2006/chart" xmlns:dgm="http://schemas.openxmlformats.org/drawingml/2006/diagram" xmlns:o="urn:schemas-microsoft-com:office:office" xmlns:v="urn:schemas-microsoft-com:vml" xmlns:pvml="urn:schemas-microsoft-com:office:powerpoint" xmlns:com="http://schemas.openxmlformats.org/drawingml/2006/compatibility" xmlns:p14="http://schemas.microsoft.com/office/powerpoint/2010/main" xmlns:p15="http://schemas.microsoft.com/office/powerpoint/2012/main" xmlns:ahyp="http://schemas.microsoft.com/office/drawing/2018/hyperlinkcolor" showMasterPhAnim="0" showMasterSp="0">
+  <p:cSld>
+    <p:spTree>
+      <p:nvGrpSpPr>
+        <p:cNvPr id="133" name="Shape 133"/>
+        <p:cNvGrpSpPr/>
+        <p:nvPr/>
+      </p:nvGrpSpPr>
+      <p:grpSpPr>
+        <a:xfrm>
+          <a:off x="0" y="0"/>
+          <a:ext cx="0" cy="0"/>
+          <a:chOff x="0" y="0"/>
+          <a:chExt cx="0" cy="0"/>
+        </a:xfrm>
+      </p:grpSpPr>
+      <p:sp>
+        <p:nvSpPr>
+          <p:cNvPr id="134" name="Google Shape;134;h28107619a010cd5b_0_315:notes"/>
+          <p:cNvSpPr/>
+          <p:nvPr>
+            <p:ph idx="2" type="sldImg"/>
+          </p:nvPr>
+        </p:nvSpPr>
+        <p:spPr>
+          <a:xfrm>
+            <a:off x="381300" y="685800"/>
+            <a:ext cx="6096000" cy="3429000"/>
+          </a:xfrm>
+          <a:custGeom>
+            <a:rect b="b" l="l" r="r" t="t"/>
+            <a:pathLst>
+              <a:path extrusionOk="0" h="120000" w="120000">
+                <a:moveTo>
+                  <a:pt x="0" y="0"/>
+                </a:moveTo>
+                <a:lnTo>
+                  <a:pt x="120000" y="0"/>
+                </a:lnTo>
+                <a:lnTo>
+                  <a:pt x="120000" y="120000"/>
+                </a:lnTo>
+                <a:lnTo>
+                  <a:pt x="0" y="120000"/>
+                </a:lnTo>
+                <a:close/>
+              </a:path>
+            </a:pathLst>
+          </a:custGeom>
+        </p:spPr>
+      </p:sp>
+      <p:sp>
+        <p:nvSpPr>
+          <p:cNvPr id="135" name="Google Shape;135;h28107619a010cd5b_0_315:notes"/>
+          <p:cNvSpPr txBox="1"/>
+          <p:nvPr>
+            <p:ph idx="1" type="body"/>
+          </p:nvPr>
+        </p:nvSpPr>
+        <p:spPr>
+          <a:xfrm>
+            <a:off x="685800" y="4343400"/>
+            <a:ext cx="5486400" cy="4114800"/>
+          </a:xfrm>
+          <a:prstGeom prst="rect">
+            <a:avLst/>
+          </a:prstGeom>
+        </p:spPr>
+        <p:txBody>
+          <a:bodyPr anchorCtr="0" anchor="t" bIns="91425" lIns="91425" spcFirstLastPara="1" rIns="91425" wrap="square" tIns="91425">
+            <a:noAutofit/>
+          </a:bodyPr>
+          <a:lstStyle/>
+          <a:p>
+            <a:pPr indent="0" lvl="0" marL="0" rtl="0" algn="l">
+              <a:spcBef>
+                <a:spcPts val="0"/>
+              </a:spcBef>
+              <a:spcAft>
+                <a:spcPts val="0"/>
+              </a:spcAft>
+              <a:buNone/>
+            </a:pPr>
+            <a:r>
+              <a:t/>
+            </a:r>
+            <a:endParaRPr/>
+          </a:p>
+        </p:txBody>
+      </p:sp>
+    </p:spTree>
+  </p:cSld>
+  <p:clrMapOvr>
+    <a:masterClrMapping/>
+  </p:clrMapOvr>
+</p:notes>
+</file>
+
+<file path=ppt/notesSlides/notesSlide11.xml><?xml version="1.0" encoding="utf-8"?>
+<p:notes xmlns:a="http://schemas.openxmlformats.org/drawingml/2006/main" xmlns:r="http://schemas.openxmlformats.org/officeDocument/2006/relationships" xmlns:mc="http://schemas.openxmlformats.org/markup-compatibility/2006" xmlns:mv="urn:schemas-microsoft-com:mac:vml" xmlns:p="http://schemas.openxmlformats.org/presentationml/2006/main" xmlns:c="http://schemas.openxmlformats.org/drawingml/2006/chart" xmlns:dgm="http://schemas.openxmlformats.org/drawingml/2006/diagram" xmlns:o="urn:schemas-microsoft-com:office:office" xmlns:v="urn:schemas-microsoft-com:vml" xmlns:pvml="urn:schemas-microsoft-com:office:powerpoint" xmlns:com="http://schemas.openxmlformats.org/drawingml/2006/compatibility" xmlns:p14="http://schemas.microsoft.com/office/powerpoint/2010/main" xmlns:p15="http://schemas.microsoft.com/office/powerpoint/2012/main" xmlns:ahyp="http://schemas.microsoft.com/office/drawing/2018/hyperlinkcolor" showMasterPhAnim="0" showMasterSp="0">
+  <p:cSld>
+    <p:spTree>
+      <p:nvGrpSpPr>
+        <p:cNvPr id="140" name="Shape 140"/>
+        <p:cNvGrpSpPr/>
+        <p:nvPr/>
+      </p:nvGrpSpPr>
+      <p:grpSpPr>
+        <a:xfrm>
+          <a:off x="0" y="0"/>
+          <a:ext cx="0" cy="0"/>
+          <a:chOff x="0" y="0"/>
+          <a:chExt cx="0" cy="0"/>
+        </a:xfrm>
+      </p:grpSpPr>
+      <p:sp>
+        <p:nvSpPr>
+          <p:cNvPr id="141" name="Google Shape;141;h28107619a010cd5b_0_322:notes"/>
+          <p:cNvSpPr/>
+          <p:nvPr>
+            <p:ph idx="2" type="sldImg"/>
+          </p:nvPr>
+        </p:nvSpPr>
+        <p:spPr>
+          <a:xfrm>
+            <a:off x="381300" y="685800"/>
+            <a:ext cx="6096000" cy="3429000"/>
+          </a:xfrm>
+          <a:custGeom>
+            <a:rect b="b" l="l" r="r" t="t"/>
+            <a:pathLst>
+              <a:path extrusionOk="0" h="120000" w="120000">
+                <a:moveTo>
+                  <a:pt x="0" y="0"/>
+                </a:moveTo>
+                <a:lnTo>
+                  <a:pt x="120000" y="0"/>
+                </a:lnTo>
+                <a:lnTo>
+                  <a:pt x="120000" y="120000"/>
+                </a:lnTo>
+                <a:lnTo>
+                  <a:pt x="0" y="120000"/>
+                </a:lnTo>
+                <a:close/>
+              </a:path>
+            </a:pathLst>
+          </a:custGeom>
+        </p:spPr>
+      </p:sp>
+      <p:sp>
+        <p:nvSpPr>
+          <p:cNvPr id="142" name="Google Shape;142;h28107619a010cd5b_0_322:notes"/>
+          <p:cNvSpPr txBox="1"/>
+          <p:nvPr>
+            <p:ph idx="1" type="body"/>
+          </p:nvPr>
+        </p:nvSpPr>
+        <p:spPr>
+          <a:xfrm>
+            <a:off x="685800" y="4343400"/>
+            <a:ext cx="5486400" cy="4114800"/>
+          </a:xfrm>
+          <a:prstGeom prst="rect">
+            <a:avLst/>
+          </a:prstGeom>
+        </p:spPr>
+        <p:txBody>
+          <a:bodyPr anchorCtr="0" anchor="t" bIns="91425" lIns="91425" spcFirstLastPara="1" rIns="91425" wrap="square" tIns="91425">
+            <a:noAutofit/>
+          </a:bodyPr>
+          <a:lstStyle/>
+          <a:p>
+            <a:pPr indent="0" lvl="0" marL="0" rtl="0" algn="l">
+              <a:spcBef>
+                <a:spcPts val="0"/>
+              </a:spcBef>
+              <a:spcAft>
+                <a:spcPts val="0"/>
+              </a:spcAft>
+              <a:buNone/>
+            </a:pPr>
+            <a:r>
+              <a:t/>
+            </a:r>
+            <a:endParaRPr/>
+          </a:p>
+        </p:txBody>
+      </p:sp>
+    </p:spTree>
+  </p:cSld>
+  <p:clrMapOvr>
+    <a:masterClrMapping/>
+  </p:clrMapOvr>
+</p:notes>
+</file>
+
+<file path=ppt/notesSlides/notesSlide12.xml><?xml version="1.0" encoding="utf-8"?>
+<p:notes xmlns:a="http://schemas.openxmlformats.org/drawingml/2006/main" xmlns:r="http://schemas.openxmlformats.org/officeDocument/2006/relationships" xmlns:mc="http://schemas.openxmlformats.org/markup-compatibility/2006" xmlns:mv="urn:schemas-microsoft-com:mac:vml" xmlns:p="http://schemas.openxmlformats.org/presentationml/2006/main" xmlns:c="http://schemas.openxmlformats.org/drawingml/2006/chart" xmlns:dgm="http://schemas.openxmlformats.org/drawingml/2006/diagram" xmlns:o="urn:schemas-microsoft-com:office:office" xmlns:v="urn:schemas-microsoft-com:vml" xmlns:pvml="urn:schemas-microsoft-com:office:powerpoint" xmlns:com="http://schemas.openxmlformats.org/drawingml/2006/compatibility" xmlns:p14="http://schemas.microsoft.com/office/powerpoint/2010/main" xmlns:p15="http://schemas.microsoft.com/office/powerpoint/2012/main" xmlns:ahyp="http://schemas.microsoft.com/office/drawing/2018/hyperlinkcolor" showMasterPhAnim="0" showMasterSp="0">
+  <p:cSld>
+    <p:spTree>
+      <p:nvGrpSpPr>
+        <p:cNvPr id="149" name="Shape 149"/>
+        <p:cNvGrpSpPr/>
+        <p:nvPr/>
+      </p:nvGrpSpPr>
+      <p:grpSpPr>
+        <a:xfrm>
+          <a:off x="0" y="0"/>
+          <a:ext cx="0" cy="0"/>
+          <a:chOff x="0" y="0"/>
+          <a:chExt cx="0" cy="0"/>
+        </a:xfrm>
+      </p:grpSpPr>
+      <p:sp>
+        <p:nvSpPr>
+          <p:cNvPr id="150" name="Google Shape;150;h28107619a010cd5b_0_328:notes"/>
+          <p:cNvSpPr/>
+          <p:nvPr>
+            <p:ph idx="2" type="sldImg"/>
+          </p:nvPr>
+        </p:nvSpPr>
+        <p:spPr>
+          <a:xfrm>
+            <a:off x="381300" y="685800"/>
+            <a:ext cx="6096000" cy="3429000"/>
+          </a:xfrm>
+          <a:custGeom>
+            <a:rect b="b" l="l" r="r" t="t"/>
+            <a:pathLst>
+              <a:path extrusionOk="0" h="120000" w="120000">
+                <a:moveTo>
+                  <a:pt x="0" y="0"/>
+                </a:moveTo>
+                <a:lnTo>
+                  <a:pt x="120000" y="0"/>
+                </a:lnTo>
+                <a:lnTo>
+                  <a:pt x="120000" y="120000"/>
+                </a:lnTo>
+                <a:lnTo>
+                  <a:pt x="0" y="120000"/>
+                </a:lnTo>
+                <a:close/>
+              </a:path>
+            </a:pathLst>
+          </a:custGeom>
+        </p:spPr>
+      </p:sp>
+      <p:sp>
+        <p:nvSpPr>
+          <p:cNvPr id="151" name="Google Shape;151;h28107619a010cd5b_0_328:notes"/>
+          <p:cNvSpPr txBox="1"/>
+          <p:nvPr>
+            <p:ph idx="1" type="body"/>
+          </p:nvPr>
+        </p:nvSpPr>
+        <p:spPr>
+          <a:xfrm>
+            <a:off x="685800" y="4343400"/>
+            <a:ext cx="5486400" cy="4114800"/>
+          </a:xfrm>
+          <a:prstGeom prst="rect">
+            <a:avLst/>
+          </a:prstGeom>
+        </p:spPr>
+        <p:txBody>
+          <a:bodyPr anchorCtr="0" anchor="t" bIns="91425" lIns="91425" spcFirstLastPara="1" rIns="91425" wrap="square" tIns="91425">
+            <a:noAutofit/>
+          </a:bodyPr>
+          <a:lstStyle/>
+          <a:p>
+            <a:pPr indent="0" lvl="0" marL="0" rtl="0" algn="l">
+              <a:spcBef>
+                <a:spcPts val="0"/>
+              </a:spcBef>
+              <a:spcAft>
+                <a:spcPts val="0"/>
+              </a:spcAft>
+              <a:buNone/>
+            </a:pPr>
+            <a:r>
+              <a:t/>
+            </a:r>
+            <a:endParaRPr/>
+          </a:p>
+        </p:txBody>
+      </p:sp>
+    </p:spTree>
+  </p:cSld>
+  <p:clrMapOvr>
+    <a:masterClrMapping/>
+  </p:clrMapOvr>
+</p:notes>
+</file>
+
+<file path=ppt/notesSlides/notesSlide13.xml><?xml version="1.0" encoding="utf-8"?>
+<p:notes xmlns:a="http://schemas.openxmlformats.org/drawingml/2006/main" xmlns:r="http://schemas.openxmlformats.org/officeDocument/2006/relationships" xmlns:mc="http://schemas.openxmlformats.org/markup-compatibility/2006" xmlns:mv="urn:schemas-microsoft-com:mac:vml" xmlns:p="http://schemas.openxmlformats.org/presentationml/2006/main" xmlns:c="http://schemas.openxmlformats.org/drawingml/2006/chart" xmlns:dgm="http://schemas.openxmlformats.org/drawingml/2006/diagram" xmlns:o="urn:schemas-microsoft-com:office:office" xmlns:v="urn:schemas-microsoft-com:vml" xmlns:pvml="urn:schemas-microsoft-com:office:powerpoint" xmlns:com="http://schemas.openxmlformats.org/drawingml/2006/compatibility" xmlns:p14="http://schemas.microsoft.com/office/powerpoint/2010/main" xmlns:p15="http://schemas.microsoft.com/office/powerpoint/2012/main" xmlns:ahyp="http://schemas.microsoft.com/office/drawing/2018/hyperlinkcolor" showMasterPhAnim="0" showMasterSp="0">
+  <p:cSld>
+    <p:spTree>
+      <p:nvGrpSpPr>
+        <p:cNvPr id="158" name="Shape 158"/>
+        <p:cNvGrpSpPr/>
+        <p:nvPr/>
+      </p:nvGrpSpPr>
+      <p:grpSpPr>
+        <a:xfrm>
+          <a:off x="0" y="0"/>
+          <a:ext cx="0" cy="0"/>
+          <a:chOff x="0" y="0"/>
+          <a:chExt cx="0" cy="0"/>
+        </a:xfrm>
+      </p:grpSpPr>
+      <p:sp>
+        <p:nvSpPr>
+          <p:cNvPr id="159" name="Google Shape;159;h28107619a010cd5b_0_30:notes"/>
+          <p:cNvSpPr/>
+          <p:nvPr>
+            <p:ph idx="2" type="sldImg"/>
+          </p:nvPr>
+        </p:nvSpPr>
+        <p:spPr>
+          <a:xfrm>
+            <a:off x="381300" y="685800"/>
+            <a:ext cx="6096000" cy="3429000"/>
+          </a:xfrm>
+          <a:custGeom>
+            <a:rect b="b" l="l" r="r" t="t"/>
+            <a:pathLst>
+              <a:path extrusionOk="0" h="120000" w="120000">
+                <a:moveTo>
+                  <a:pt x="0" y="0"/>
+                </a:moveTo>
+                <a:lnTo>
+                  <a:pt x="120000" y="0"/>
+                </a:lnTo>
+                <a:lnTo>
+                  <a:pt x="120000" y="120000"/>
+                </a:lnTo>
+                <a:lnTo>
+                  <a:pt x="0" y="120000"/>
+                </a:lnTo>
+                <a:close/>
+              </a:path>
+            </a:pathLst>
+          </a:custGeom>
+        </p:spPr>
+      </p:sp>
+      <p:sp>
+        <p:nvSpPr>
+          <p:cNvPr id="160" name="Google Shape;160;h28107619a010cd5b_0_30:notes"/>
           <p:cNvSpPr txBox="1"/>
           <p:nvPr>
             <p:ph idx="1" type="body"/>
@@ -797,7 +1223,7 @@
   <p:cSld>
     <p:spTree>
       <p:nvGrpSpPr>
-        <p:cNvPr id="56" name="Shape 56"/>
+        <p:cNvPr id="60" name="Shape 60"/>
         <p:cNvGrpSpPr/>
         <p:nvPr/>
       </p:nvGrpSpPr>
@@ -811,7 +1237,7 @@
       </p:grpSpPr>
       <p:sp>
         <p:nvSpPr>
-          <p:cNvPr id="57" name="Google Shape;57;h28107619a010cd5b_0_10:notes"/>
+          <p:cNvPr id="61" name="Google Shape;61;h28107619a010cd5b_0_296:notes"/>
           <p:cNvSpPr/>
           <p:nvPr>
             <p:ph idx="2" type="sldImg"/>
@@ -846,7 +1272,7 @@
       </p:sp>
       <p:sp>
         <p:nvSpPr>
-          <p:cNvPr id="58" name="Google Shape;58;h28107619a010cd5b_0_10:notes"/>
+          <p:cNvPr id="62" name="Google Shape;62;h28107619a010cd5b_0_296:notes"/>
           <p:cNvSpPr txBox="1"/>
           <p:nvPr>
             <p:ph idx="1" type="body"/>
@@ -896,7 +1322,7 @@
   <p:cSld>
     <p:spTree>
       <p:nvGrpSpPr>
-        <p:cNvPr id="62" name="Shape 62"/>
+        <p:cNvPr id="65" name="Shape 65"/>
         <p:cNvGrpSpPr/>
         <p:nvPr/>
       </p:nvGrpSpPr>
@@ -910,7 +1336,7 @@
       </p:grpSpPr>
       <p:sp>
         <p:nvSpPr>
-          <p:cNvPr id="63" name="Google Shape;63;h28107619a010cd5b_0_5:notes"/>
+          <p:cNvPr id="66" name="Google Shape;66;h28107619a010cd5b_0_10:notes"/>
           <p:cNvSpPr/>
           <p:nvPr>
             <p:ph idx="2" type="sldImg"/>
@@ -945,7 +1371,7 @@
       </p:sp>
       <p:sp>
         <p:nvSpPr>
-          <p:cNvPr id="64" name="Google Shape;64;h28107619a010cd5b_0_5:notes"/>
+          <p:cNvPr id="67" name="Google Shape;67;h28107619a010cd5b_0_10:notes"/>
           <p:cNvSpPr txBox="1"/>
           <p:nvPr>
             <p:ph idx="1" type="body"/>
@@ -995,7 +1421,7 @@
   <p:cSld>
     <p:spTree>
       <p:nvGrpSpPr>
-        <p:cNvPr id="68" name="Shape 68"/>
+        <p:cNvPr id="76" name="Shape 76"/>
         <p:cNvGrpSpPr/>
         <p:nvPr/>
       </p:nvGrpSpPr>
@@ -1009,7 +1435,7 @@
       </p:grpSpPr>
       <p:sp>
         <p:nvSpPr>
-          <p:cNvPr id="69" name="Google Shape;69;h28107619a010cd5b_0_0:notes"/>
+          <p:cNvPr id="77" name="Google Shape;77;h28107619a010cd5b_0_5:notes"/>
           <p:cNvSpPr/>
           <p:nvPr>
             <p:ph idx="2" type="sldImg"/>
@@ -1044,7 +1470,7 @@
       </p:sp>
       <p:sp>
         <p:nvSpPr>
-          <p:cNvPr id="70" name="Google Shape;70;h28107619a010cd5b_0_0:notes"/>
+          <p:cNvPr id="78" name="Google Shape;78;h28107619a010cd5b_0_5:notes"/>
           <p:cNvSpPr txBox="1"/>
           <p:nvPr>
             <p:ph idx="1" type="body"/>
@@ -1094,7 +1520,7 @@
   <p:cSld>
     <p:spTree>
       <p:nvGrpSpPr>
-        <p:cNvPr id="74" name="Shape 74"/>
+        <p:cNvPr id="87" name="Shape 87"/>
         <p:cNvGrpSpPr/>
         <p:nvPr/>
       </p:nvGrpSpPr>
@@ -1108,7 +1534,7 @@
       </p:grpSpPr>
       <p:sp>
         <p:nvSpPr>
-          <p:cNvPr id="75" name="Google Shape;75;h28107619a010cd5b_0_15:notes"/>
+          <p:cNvPr id="88" name="Google Shape;88;h28107619a010cd5b_0_0:notes"/>
           <p:cNvSpPr/>
           <p:nvPr>
             <p:ph idx="2" type="sldImg"/>
@@ -1143,7 +1569,7 @@
       </p:sp>
       <p:sp>
         <p:nvSpPr>
-          <p:cNvPr id="76" name="Google Shape;76;h28107619a010cd5b_0_15:notes"/>
+          <p:cNvPr id="89" name="Google Shape;89;h28107619a010cd5b_0_0:notes"/>
           <p:cNvSpPr txBox="1"/>
           <p:nvPr>
             <p:ph idx="1" type="body"/>
@@ -1193,7 +1619,7 @@
   <p:cSld>
     <p:spTree>
       <p:nvGrpSpPr>
-        <p:cNvPr id="80" name="Shape 80"/>
+        <p:cNvPr id="98" name="Shape 98"/>
         <p:cNvGrpSpPr/>
         <p:nvPr/>
       </p:nvGrpSpPr>
@@ -1207,7 +1633,7 @@
       </p:grpSpPr>
       <p:sp>
         <p:nvSpPr>
-          <p:cNvPr id="81" name="Google Shape;81;h28107619a010cd5b_0_20:notes"/>
+          <p:cNvPr id="99" name="Google Shape;99;h28107619a010cd5b_0_15:notes"/>
           <p:cNvSpPr/>
           <p:nvPr>
             <p:ph idx="2" type="sldImg"/>
@@ -1242,7 +1668,7 @@
       </p:sp>
       <p:sp>
         <p:nvSpPr>
-          <p:cNvPr id="82" name="Google Shape;82;h28107619a010cd5b_0_20:notes"/>
+          <p:cNvPr id="100" name="Google Shape;100;h28107619a010cd5b_0_15:notes"/>
           <p:cNvSpPr txBox="1"/>
           <p:nvPr>
             <p:ph idx="1" type="body"/>
@@ -1292,7 +1718,7 @@
   <p:cSld>
     <p:spTree>
       <p:nvGrpSpPr>
-        <p:cNvPr id="86" name="Shape 86"/>
+        <p:cNvPr id="111" name="Shape 111"/>
         <p:cNvGrpSpPr/>
         <p:nvPr/>
       </p:nvGrpSpPr>
@@ -1306,7 +1732,7 @@
       </p:grpSpPr>
       <p:sp>
         <p:nvSpPr>
-          <p:cNvPr id="87" name="Google Shape;87;h28107619a010cd5b_0_25:notes"/>
+          <p:cNvPr id="112" name="Google Shape;112;h28107619a010cd5b_0_301:notes"/>
           <p:cNvSpPr/>
           <p:nvPr>
             <p:ph idx="2" type="sldImg"/>
@@ -1341,7 +1767,7 @@
       </p:sp>
       <p:sp>
         <p:nvSpPr>
-          <p:cNvPr id="88" name="Google Shape;88;h28107619a010cd5b_0_25:notes"/>
+          <p:cNvPr id="113" name="Google Shape;113;h28107619a010cd5b_0_301:notes"/>
           <p:cNvSpPr txBox="1"/>
           <p:nvPr>
             <p:ph idx="1" type="body"/>
@@ -1391,7 +1817,7 @@
   <p:cSld>
     <p:spTree>
       <p:nvGrpSpPr>
-        <p:cNvPr id="92" name="Shape 92"/>
+        <p:cNvPr id="116" name="Shape 116"/>
         <p:cNvGrpSpPr/>
         <p:nvPr/>
       </p:nvGrpSpPr>
@@ -1405,7 +1831,7 @@
       </p:grpSpPr>
       <p:sp>
         <p:nvSpPr>
-          <p:cNvPr id="93" name="Google Shape;93;h28107619a010cd5b_0_30:notes"/>
+          <p:cNvPr id="117" name="Google Shape;117;h28107619a010cd5b_0_20:notes"/>
           <p:cNvSpPr/>
           <p:nvPr>
             <p:ph idx="2" type="sldImg"/>
@@ -1440,7 +1866,106 @@
       </p:sp>
       <p:sp>
         <p:nvSpPr>
-          <p:cNvPr id="94" name="Google Shape;94;h28107619a010cd5b_0_30:notes"/>
+          <p:cNvPr id="118" name="Google Shape;118;h28107619a010cd5b_0_20:notes"/>
+          <p:cNvSpPr txBox="1"/>
+          <p:nvPr>
+            <p:ph idx="1" type="body"/>
+          </p:nvPr>
+        </p:nvSpPr>
+        <p:spPr>
+          <a:xfrm>
+            <a:off x="685800" y="4343400"/>
+            <a:ext cx="5486400" cy="4114800"/>
+          </a:xfrm>
+          <a:prstGeom prst="rect">
+            <a:avLst/>
+          </a:prstGeom>
+        </p:spPr>
+        <p:txBody>
+          <a:bodyPr anchorCtr="0" anchor="t" bIns="91425" lIns="91425" spcFirstLastPara="1" rIns="91425" wrap="square" tIns="91425">
+            <a:noAutofit/>
+          </a:bodyPr>
+          <a:lstStyle/>
+          <a:p>
+            <a:pPr indent="0" lvl="0" marL="0" rtl="0" algn="l">
+              <a:spcBef>
+                <a:spcPts val="0"/>
+              </a:spcBef>
+              <a:spcAft>
+                <a:spcPts val="0"/>
+              </a:spcAft>
+              <a:buNone/>
+            </a:pPr>
+            <a:r>
+              <a:t/>
+            </a:r>
+            <a:endParaRPr/>
+          </a:p>
+        </p:txBody>
+      </p:sp>
+    </p:spTree>
+  </p:cSld>
+  <p:clrMapOvr>
+    <a:masterClrMapping/>
+  </p:clrMapOvr>
+</p:notes>
+</file>
+
+<file path=ppt/notesSlides/notesSlide9.xml><?xml version="1.0" encoding="utf-8"?>
+<p:notes xmlns:a="http://schemas.openxmlformats.org/drawingml/2006/main" xmlns:r="http://schemas.openxmlformats.org/officeDocument/2006/relationships" xmlns:mc="http://schemas.openxmlformats.org/markup-compatibility/2006" xmlns:mv="urn:schemas-microsoft-com:mac:vml" xmlns:p="http://schemas.openxmlformats.org/presentationml/2006/main" xmlns:c="http://schemas.openxmlformats.org/drawingml/2006/chart" xmlns:dgm="http://schemas.openxmlformats.org/drawingml/2006/diagram" xmlns:o="urn:schemas-microsoft-com:office:office" xmlns:v="urn:schemas-microsoft-com:vml" xmlns:pvml="urn:schemas-microsoft-com:office:powerpoint" xmlns:com="http://schemas.openxmlformats.org/drawingml/2006/compatibility" xmlns:p14="http://schemas.microsoft.com/office/powerpoint/2010/main" xmlns:p15="http://schemas.microsoft.com/office/powerpoint/2012/main" xmlns:ahyp="http://schemas.microsoft.com/office/drawing/2018/hyperlinkcolor" showMasterPhAnim="0" showMasterSp="0">
+  <p:cSld>
+    <p:spTree>
+      <p:nvGrpSpPr>
+        <p:cNvPr id="124" name="Shape 124"/>
+        <p:cNvGrpSpPr/>
+        <p:nvPr/>
+      </p:nvGrpSpPr>
+      <p:grpSpPr>
+        <a:xfrm>
+          <a:off x="0" y="0"/>
+          <a:ext cx="0" cy="0"/>
+          <a:chOff x="0" y="0"/>
+          <a:chExt cx="0" cy="0"/>
+        </a:xfrm>
+      </p:grpSpPr>
+      <p:sp>
+        <p:nvSpPr>
+          <p:cNvPr id="125" name="Google Shape;125;h28107619a010cd5b_0_25:notes"/>
+          <p:cNvSpPr/>
+          <p:nvPr>
+            <p:ph idx="2" type="sldImg"/>
+          </p:nvPr>
+        </p:nvSpPr>
+        <p:spPr>
+          <a:xfrm>
+            <a:off x="381300" y="685800"/>
+            <a:ext cx="6096000" cy="3429000"/>
+          </a:xfrm>
+          <a:custGeom>
+            <a:rect b="b" l="l" r="r" t="t"/>
+            <a:pathLst>
+              <a:path extrusionOk="0" h="120000" w="120000">
+                <a:moveTo>
+                  <a:pt x="0" y="0"/>
+                </a:moveTo>
+                <a:lnTo>
+                  <a:pt x="120000" y="0"/>
+                </a:lnTo>
+                <a:lnTo>
+                  <a:pt x="120000" y="120000"/>
+                </a:lnTo>
+                <a:lnTo>
+                  <a:pt x="0" y="120000"/>
+                </a:lnTo>
+                <a:close/>
+              </a:path>
+            </a:pathLst>
+          </a:custGeom>
+        </p:spPr>
+      </p:sp>
+      <p:sp>
+        <p:nvSpPr>
+          <p:cNvPr id="126" name="Google Shape;126;h28107619a010cd5b_0_25:notes"/>
           <p:cNvSpPr txBox="1"/>
           <p:nvPr>
             <p:ph idx="1" type="body"/>
@@ -1488,6 +2013,13 @@
 <file path=ppt/slideLayouts/slideLayout1.xml><?xml version="1.0" encoding="utf-8"?>
 <p:sldLayout xmlns:a="http://schemas.openxmlformats.org/drawingml/2006/main" xmlns:r="http://schemas.openxmlformats.org/officeDocument/2006/relationships" xmlns:mc="http://schemas.openxmlformats.org/markup-compatibility/2006" xmlns:mv="urn:schemas-microsoft-com:mac:vml" xmlns:p="http://schemas.openxmlformats.org/presentationml/2006/main" xmlns:c="http://schemas.openxmlformats.org/drawingml/2006/chart" xmlns:dgm="http://schemas.openxmlformats.org/drawingml/2006/diagram" xmlns:o="urn:schemas-microsoft-com:office:office" xmlns:v="urn:schemas-microsoft-com:vml" xmlns:pvml="urn:schemas-microsoft-com:office:powerpoint" xmlns:com="http://schemas.openxmlformats.org/drawingml/2006/compatibility" xmlns:p14="http://schemas.microsoft.com/office/powerpoint/2010/main" xmlns:p15="http://schemas.microsoft.com/office/powerpoint/2012/main" xmlns:ahyp="http://schemas.microsoft.com/office/drawing/2018/hyperlinkcolor" matchingName="Title slide" type="title">
   <p:cSld name="TITLE">
+    <p:bg>
+      <p:bgPr>
+        <a:solidFill>
+          <a:schemeClr val="dk1"/>
+        </a:solidFill>
+      </p:bgPr>
+    </p:bg>
     <p:spTree>
       <p:nvGrpSpPr>
         <p:cNvPr id="9" name="Shape 9"/>
@@ -1505,6 +2037,92 @@
       <p:sp>
         <p:nvSpPr>
           <p:cNvPr id="10" name="Google Shape;10;p2"/>
+          <p:cNvSpPr/>
+          <p:nvPr/>
+        </p:nvSpPr>
+        <p:spPr>
+          <a:xfrm>
+            <a:off x="4286250" y="0"/>
+            <a:ext cx="72300" cy="5143500"/>
+          </a:xfrm>
+          <a:prstGeom prst="rect">
+            <a:avLst/>
+          </a:prstGeom>
+          <a:solidFill>
+            <a:schemeClr val="dk2"/>
+          </a:solidFill>
+          <a:ln>
+            <a:noFill/>
+          </a:ln>
+        </p:spPr>
+        <p:txBody>
+          <a:bodyPr anchorCtr="0" anchor="ctr" bIns="91425" lIns="91425" spcFirstLastPara="1" rIns="91425" wrap="square" tIns="91425">
+            <a:noAutofit/>
+          </a:bodyPr>
+          <a:lstStyle/>
+          <a:p>
+            <a:pPr indent="0" lvl="0" marL="0" rtl="0" algn="l">
+              <a:spcBef>
+                <a:spcPts val="0"/>
+              </a:spcBef>
+              <a:spcAft>
+                <a:spcPts val="0"/>
+              </a:spcAft>
+              <a:buNone/>
+            </a:pPr>
+            <a:r>
+              <a:t/>
+            </a:r>
+            <a:endParaRPr/>
+          </a:p>
+        </p:txBody>
+      </p:sp>
+      <p:sp>
+        <p:nvSpPr>
+          <p:cNvPr id="11" name="Google Shape;11;p2"/>
+          <p:cNvSpPr/>
+          <p:nvPr/>
+        </p:nvSpPr>
+        <p:spPr>
+          <a:xfrm>
+            <a:off x="4358475" y="0"/>
+            <a:ext cx="3853200" cy="5143500"/>
+          </a:xfrm>
+          <a:prstGeom prst="rect">
+            <a:avLst/>
+          </a:prstGeom>
+          <a:solidFill>
+            <a:schemeClr val="accent4"/>
+          </a:solidFill>
+          <a:ln>
+            <a:noFill/>
+          </a:ln>
+        </p:spPr>
+        <p:txBody>
+          <a:bodyPr anchorCtr="0" anchor="ctr" bIns="91425" lIns="91425" spcFirstLastPara="1" rIns="91425" wrap="square" tIns="91425">
+            <a:noAutofit/>
+          </a:bodyPr>
+          <a:lstStyle/>
+          <a:p>
+            <a:pPr indent="0" lvl="0" marL="0" rtl="0" algn="l">
+              <a:spcBef>
+                <a:spcPts val="0"/>
+              </a:spcBef>
+              <a:spcAft>
+                <a:spcPts val="0"/>
+              </a:spcAft>
+              <a:buNone/>
+            </a:pPr>
+            <a:r>
+              <a:t/>
+            </a:r>
+            <a:endParaRPr/>
+          </a:p>
+        </p:txBody>
+      </p:sp>
+      <p:sp>
+        <p:nvSpPr>
+          <p:cNvPr id="12" name="Google Shape;12;p2"/>
           <p:cNvSpPr txBox="1"/>
           <p:nvPr>
             <p:ph type="ctrTitle"/>
@@ -1512,15 +2130,18 @@
         </p:nvSpPr>
         <p:spPr>
           <a:xfrm>
-            <a:off x="311708" y="744575"/>
-            <a:ext cx="8520600" cy="2052600"/>
+            <a:off x="344250" y="1403850"/>
+            <a:ext cx="8455500" cy="2146800"/>
           </a:xfrm>
           <a:prstGeom prst="rect">
             <a:avLst/>
           </a:prstGeom>
+          <a:solidFill>
+            <a:srgbClr val="FFFFFF"/>
+          </a:solidFill>
         </p:spPr>
         <p:txBody>
-          <a:bodyPr anchorCtr="0" anchor="b" bIns="91425" lIns="91425" spcFirstLastPara="1" rIns="91425" wrap="square" tIns="91425">
+          <a:bodyPr anchorCtr="0" anchor="ctr" bIns="91425" lIns="91425" spcFirstLastPara="1" rIns="91425" wrap="square" tIns="91425">
             <a:normAutofit/>
           </a:bodyPr>
           <a:lstStyle>
@@ -1531,9 +2152,15 @@
               <a:spcAft>
                 <a:spcPts val="0"/>
               </a:spcAft>
-              <a:buSzPts val="5200"/>
-              <a:buNone/>
-              <a:defRPr sz="5200"/>
+              <a:buSzPts val="6800"/>
+              <a:buFont typeface="Playfair Display"/>
+              <a:buNone/>
+              <a:defRPr b="1" sz="6800">
+                <a:latin typeface="Playfair Display"/>
+                <a:ea typeface="Playfair Display"/>
+                <a:cs typeface="Playfair Display"/>
+                <a:sym typeface="Playfair Display"/>
+              </a:defRPr>
             </a:lvl1pPr>
             <a:lvl2pPr lvl="1" algn="ctr">
               <a:spcBef>
@@ -1542,9 +2169,15 @@
               <a:spcAft>
                 <a:spcPts val="0"/>
               </a:spcAft>
-              <a:buSzPts val="5200"/>
-              <a:buNone/>
-              <a:defRPr sz="5200"/>
+              <a:buSzPts val="6800"/>
+              <a:buFont typeface="Playfair Display"/>
+              <a:buNone/>
+              <a:defRPr b="1" sz="6800">
+                <a:latin typeface="Playfair Display"/>
+                <a:ea typeface="Playfair Display"/>
+                <a:cs typeface="Playfair Display"/>
+                <a:sym typeface="Playfair Display"/>
+              </a:defRPr>
             </a:lvl2pPr>
             <a:lvl3pPr lvl="2" algn="ctr">
               <a:spcBef>
@@ -1553,9 +2186,15 @@
               <a:spcAft>
                 <a:spcPts val="0"/>
               </a:spcAft>
-              <a:buSzPts val="5200"/>
-              <a:buNone/>
-              <a:defRPr sz="5200"/>
+              <a:buSzPts val="6800"/>
+              <a:buFont typeface="Playfair Display"/>
+              <a:buNone/>
+              <a:defRPr b="1" sz="6800">
+                <a:latin typeface="Playfair Display"/>
+                <a:ea typeface="Playfair Display"/>
+                <a:cs typeface="Playfair Display"/>
+                <a:sym typeface="Playfair Display"/>
+              </a:defRPr>
             </a:lvl3pPr>
             <a:lvl4pPr lvl="3" algn="ctr">
               <a:spcBef>
@@ -1564,9 +2203,15 @@
               <a:spcAft>
                 <a:spcPts val="0"/>
               </a:spcAft>
-              <a:buSzPts val="5200"/>
-              <a:buNone/>
-              <a:defRPr sz="5200"/>
+              <a:buSzPts val="6800"/>
+              <a:buFont typeface="Playfair Display"/>
+              <a:buNone/>
+              <a:defRPr b="1" sz="6800">
+                <a:latin typeface="Playfair Display"/>
+                <a:ea typeface="Playfair Display"/>
+                <a:cs typeface="Playfair Display"/>
+                <a:sym typeface="Playfair Display"/>
+              </a:defRPr>
             </a:lvl4pPr>
             <a:lvl5pPr lvl="4" algn="ctr">
               <a:spcBef>
@@ -1575,9 +2220,15 @@
               <a:spcAft>
                 <a:spcPts val="0"/>
               </a:spcAft>
-              <a:buSzPts val="5200"/>
-              <a:buNone/>
-              <a:defRPr sz="5200"/>
+              <a:buSzPts val="6800"/>
+              <a:buFont typeface="Playfair Display"/>
+              <a:buNone/>
+              <a:defRPr b="1" sz="6800">
+                <a:latin typeface="Playfair Display"/>
+                <a:ea typeface="Playfair Display"/>
+                <a:cs typeface="Playfair Display"/>
+                <a:sym typeface="Playfair Display"/>
+              </a:defRPr>
             </a:lvl5pPr>
             <a:lvl6pPr lvl="5" algn="ctr">
               <a:spcBef>
@@ -1586,9 +2237,15 @@
               <a:spcAft>
                 <a:spcPts val="0"/>
               </a:spcAft>
-              <a:buSzPts val="5200"/>
-              <a:buNone/>
-              <a:defRPr sz="5200"/>
+              <a:buSzPts val="6800"/>
+              <a:buFont typeface="Playfair Display"/>
+              <a:buNone/>
+              <a:defRPr b="1" sz="6800">
+                <a:latin typeface="Playfair Display"/>
+                <a:ea typeface="Playfair Display"/>
+                <a:cs typeface="Playfair Display"/>
+                <a:sym typeface="Playfair Display"/>
+              </a:defRPr>
             </a:lvl6pPr>
             <a:lvl7pPr lvl="6" algn="ctr">
               <a:spcBef>
@@ -1597,9 +2254,15 @@
               <a:spcAft>
                 <a:spcPts val="0"/>
               </a:spcAft>
-              <a:buSzPts val="5200"/>
-              <a:buNone/>
-              <a:defRPr sz="5200"/>
+              <a:buSzPts val="6800"/>
+              <a:buFont typeface="Playfair Display"/>
+              <a:buNone/>
+              <a:defRPr b="1" sz="6800">
+                <a:latin typeface="Playfair Display"/>
+                <a:ea typeface="Playfair Display"/>
+                <a:cs typeface="Playfair Display"/>
+                <a:sym typeface="Playfair Display"/>
+              </a:defRPr>
             </a:lvl7pPr>
             <a:lvl8pPr lvl="7" algn="ctr">
               <a:spcBef>
@@ -1608,9 +2271,15 @@
               <a:spcAft>
                 <a:spcPts val="0"/>
               </a:spcAft>
-              <a:buSzPts val="5200"/>
-              <a:buNone/>
-              <a:defRPr sz="5200"/>
+              <a:buSzPts val="6800"/>
+              <a:buFont typeface="Playfair Display"/>
+              <a:buNone/>
+              <a:defRPr b="1" sz="6800">
+                <a:latin typeface="Playfair Display"/>
+                <a:ea typeface="Playfair Display"/>
+                <a:cs typeface="Playfair Display"/>
+                <a:sym typeface="Playfair Display"/>
+              </a:defRPr>
             </a:lvl8pPr>
             <a:lvl9pPr lvl="8" algn="ctr">
               <a:spcBef>
@@ -1619,9 +2288,15 @@
               <a:spcAft>
                 <a:spcPts val="0"/>
               </a:spcAft>
-              <a:buSzPts val="5200"/>
-              <a:buNone/>
-              <a:defRPr sz="5200"/>
+              <a:buSzPts val="6800"/>
+              <a:buFont typeface="Playfair Display"/>
+              <a:buNone/>
+              <a:defRPr b="1" sz="6800">
+                <a:latin typeface="Playfair Display"/>
+                <a:ea typeface="Playfair Display"/>
+                <a:cs typeface="Playfair Display"/>
+                <a:sym typeface="Playfair Display"/>
+              </a:defRPr>
             </a:lvl9pPr>
           </a:lstStyle>
           <a:p/>
@@ -1629,7 +2304,7 @@
       </p:sp>
       <p:sp>
         <p:nvSpPr>
-          <p:cNvPr id="11" name="Google Shape;11;p2"/>
+          <p:cNvPr id="13" name="Google Shape;13;p2"/>
           <p:cNvSpPr txBox="1"/>
           <p:nvPr>
             <p:ph idx="1" type="subTitle"/>
@@ -1637,19 +2312,22 @@
         </p:nvSpPr>
         <p:spPr>
           <a:xfrm>
-            <a:off x="311700" y="2834125"/>
-            <a:ext cx="8520600" cy="792600"/>
+            <a:off x="344250" y="3550650"/>
+            <a:ext cx="4910100" cy="577800"/>
           </a:xfrm>
           <a:prstGeom prst="rect">
             <a:avLst/>
           </a:prstGeom>
+          <a:solidFill>
+            <a:schemeClr val="dk2"/>
+          </a:solidFill>
         </p:spPr>
         <p:txBody>
-          <a:bodyPr anchorCtr="0" anchor="t" bIns="91425" lIns="91425" spcFirstLastPara="1" rIns="91425" wrap="square" tIns="91425">
+          <a:bodyPr anchorCtr="0" anchor="ctr" bIns="91425" lIns="91425" spcFirstLastPara="1" rIns="91425" wrap="square" tIns="91425">
             <a:normAutofit/>
           </a:bodyPr>
           <a:lstStyle>
-            <a:lvl1pPr lvl="0" algn="ctr">
+            <a:lvl1pPr lvl="0">
               <a:lnSpc>
                 <a:spcPct val="100000"/>
               </a:lnSpc>
@@ -1659,11 +2337,23 @@
               <a:spcAft>
                 <a:spcPts val="0"/>
               </a:spcAft>
-              <a:buSzPts val="2800"/>
-              <a:buNone/>
-              <a:defRPr sz="2800"/>
+              <a:buClr>
+                <a:schemeClr val="lt1"/>
+              </a:buClr>
+              <a:buSzPts val="2400"/>
+              <a:buFont typeface="Montserrat"/>
+              <a:buNone/>
+              <a:defRPr b="1" sz="2400">
+                <a:solidFill>
+                  <a:schemeClr val="lt1"/>
+                </a:solidFill>
+                <a:latin typeface="Montserrat"/>
+                <a:ea typeface="Montserrat"/>
+                <a:cs typeface="Montserrat"/>
+                <a:sym typeface="Montserrat"/>
+              </a:defRPr>
             </a:lvl1pPr>
-            <a:lvl2pPr lvl="1" algn="ctr">
+            <a:lvl2pPr lvl="1">
               <a:lnSpc>
                 <a:spcPct val="100000"/>
               </a:lnSpc>
@@ -1673,11 +2363,23 @@
               <a:spcAft>
                 <a:spcPts val="0"/>
               </a:spcAft>
-              <a:buSzPts val="2800"/>
-              <a:buNone/>
-              <a:defRPr sz="2800"/>
+              <a:buClr>
+                <a:schemeClr val="lt1"/>
+              </a:buClr>
+              <a:buSzPts val="2400"/>
+              <a:buFont typeface="Montserrat"/>
+              <a:buNone/>
+              <a:defRPr b="1" sz="2400">
+                <a:solidFill>
+                  <a:schemeClr val="lt1"/>
+                </a:solidFill>
+                <a:latin typeface="Montserrat"/>
+                <a:ea typeface="Montserrat"/>
+                <a:cs typeface="Montserrat"/>
+                <a:sym typeface="Montserrat"/>
+              </a:defRPr>
             </a:lvl2pPr>
-            <a:lvl3pPr lvl="2" algn="ctr">
+            <a:lvl3pPr lvl="2">
               <a:lnSpc>
                 <a:spcPct val="100000"/>
               </a:lnSpc>
@@ -1687,11 +2389,23 @@
               <a:spcAft>
                 <a:spcPts val="0"/>
               </a:spcAft>
-              <a:buSzPts val="2800"/>
-              <a:buNone/>
-              <a:defRPr sz="2800"/>
+              <a:buClr>
+                <a:schemeClr val="lt1"/>
+              </a:buClr>
+              <a:buSzPts val="2400"/>
+              <a:buFont typeface="Montserrat"/>
+              <a:buNone/>
+              <a:defRPr b="1" sz="2400">
+                <a:solidFill>
+                  <a:schemeClr val="lt1"/>
+                </a:solidFill>
+                <a:latin typeface="Montserrat"/>
+                <a:ea typeface="Montserrat"/>
+                <a:cs typeface="Montserrat"/>
+                <a:sym typeface="Montserrat"/>
+              </a:defRPr>
             </a:lvl3pPr>
-            <a:lvl4pPr lvl="3" algn="ctr">
+            <a:lvl4pPr lvl="3">
               <a:lnSpc>
                 <a:spcPct val="100000"/>
               </a:lnSpc>
@@ -1701,11 +2415,23 @@
               <a:spcAft>
                 <a:spcPts val="0"/>
               </a:spcAft>
-              <a:buSzPts val="2800"/>
-              <a:buNone/>
-              <a:defRPr sz="2800"/>
+              <a:buClr>
+                <a:schemeClr val="lt1"/>
+              </a:buClr>
+              <a:buSzPts val="2400"/>
+              <a:buFont typeface="Montserrat"/>
+              <a:buNone/>
+              <a:defRPr b="1" sz="2400">
+                <a:solidFill>
+                  <a:schemeClr val="lt1"/>
+                </a:solidFill>
+                <a:latin typeface="Montserrat"/>
+                <a:ea typeface="Montserrat"/>
+                <a:cs typeface="Montserrat"/>
+                <a:sym typeface="Montserrat"/>
+              </a:defRPr>
             </a:lvl4pPr>
-            <a:lvl5pPr lvl="4" algn="ctr">
+            <a:lvl5pPr lvl="4">
               <a:lnSpc>
                 <a:spcPct val="100000"/>
               </a:lnSpc>
@@ -1715,11 +2441,23 @@
               <a:spcAft>
                 <a:spcPts val="0"/>
               </a:spcAft>
-              <a:buSzPts val="2800"/>
-              <a:buNone/>
-              <a:defRPr sz="2800"/>
+              <a:buClr>
+                <a:schemeClr val="lt1"/>
+              </a:buClr>
+              <a:buSzPts val="2400"/>
+              <a:buFont typeface="Montserrat"/>
+              <a:buNone/>
+              <a:defRPr b="1" sz="2400">
+                <a:solidFill>
+                  <a:schemeClr val="lt1"/>
+                </a:solidFill>
+                <a:latin typeface="Montserrat"/>
+                <a:ea typeface="Montserrat"/>
+                <a:cs typeface="Montserrat"/>
+                <a:sym typeface="Montserrat"/>
+              </a:defRPr>
             </a:lvl5pPr>
-            <a:lvl6pPr lvl="5" algn="ctr">
+            <a:lvl6pPr lvl="5">
               <a:lnSpc>
                 <a:spcPct val="100000"/>
               </a:lnSpc>
@@ -1729,11 +2467,23 @@
               <a:spcAft>
                 <a:spcPts val="0"/>
               </a:spcAft>
-              <a:buSzPts val="2800"/>
-              <a:buNone/>
-              <a:defRPr sz="2800"/>
+              <a:buClr>
+                <a:schemeClr val="lt1"/>
+              </a:buClr>
+              <a:buSzPts val="2400"/>
+              <a:buFont typeface="Montserrat"/>
+              <a:buNone/>
+              <a:defRPr b="1" sz="2400">
+                <a:solidFill>
+                  <a:schemeClr val="lt1"/>
+                </a:solidFill>
+                <a:latin typeface="Montserrat"/>
+                <a:ea typeface="Montserrat"/>
+                <a:cs typeface="Montserrat"/>
+                <a:sym typeface="Montserrat"/>
+              </a:defRPr>
             </a:lvl6pPr>
-            <a:lvl7pPr lvl="6" algn="ctr">
+            <a:lvl7pPr lvl="6">
               <a:lnSpc>
                 <a:spcPct val="100000"/>
               </a:lnSpc>
@@ -1743,11 +2493,23 @@
               <a:spcAft>
                 <a:spcPts val="0"/>
               </a:spcAft>
-              <a:buSzPts val="2800"/>
-              <a:buNone/>
-              <a:defRPr sz="2800"/>
+              <a:buClr>
+                <a:schemeClr val="lt1"/>
+              </a:buClr>
+              <a:buSzPts val="2400"/>
+              <a:buFont typeface="Montserrat"/>
+              <a:buNone/>
+              <a:defRPr b="1" sz="2400">
+                <a:solidFill>
+                  <a:schemeClr val="lt1"/>
+                </a:solidFill>
+                <a:latin typeface="Montserrat"/>
+                <a:ea typeface="Montserrat"/>
+                <a:cs typeface="Montserrat"/>
+                <a:sym typeface="Montserrat"/>
+              </a:defRPr>
             </a:lvl7pPr>
-            <a:lvl8pPr lvl="7" algn="ctr">
+            <a:lvl8pPr lvl="7">
               <a:lnSpc>
                 <a:spcPct val="100000"/>
               </a:lnSpc>
@@ -1757,11 +2519,23 @@
               <a:spcAft>
                 <a:spcPts val="0"/>
               </a:spcAft>
-              <a:buSzPts val="2800"/>
-              <a:buNone/>
-              <a:defRPr sz="2800"/>
+              <a:buClr>
+                <a:schemeClr val="lt1"/>
+              </a:buClr>
+              <a:buSzPts val="2400"/>
+              <a:buFont typeface="Montserrat"/>
+              <a:buNone/>
+              <a:defRPr b="1" sz="2400">
+                <a:solidFill>
+                  <a:schemeClr val="lt1"/>
+                </a:solidFill>
+                <a:latin typeface="Montserrat"/>
+                <a:ea typeface="Montserrat"/>
+                <a:cs typeface="Montserrat"/>
+                <a:sym typeface="Montserrat"/>
+              </a:defRPr>
             </a:lvl8pPr>
-            <a:lvl9pPr lvl="8" algn="ctr">
+            <a:lvl9pPr lvl="8">
               <a:lnSpc>
                 <a:spcPct val="100000"/>
               </a:lnSpc>
@@ -1771,9 +2545,21 @@
               <a:spcAft>
                 <a:spcPts val="0"/>
               </a:spcAft>
-              <a:buSzPts val="2800"/>
-              <a:buNone/>
-              <a:defRPr sz="2800"/>
+              <a:buClr>
+                <a:schemeClr val="lt1"/>
+              </a:buClr>
+              <a:buSzPts val="2400"/>
+              <a:buFont typeface="Montserrat"/>
+              <a:buNone/>
+              <a:defRPr b="1" sz="2400">
+                <a:solidFill>
+                  <a:schemeClr val="lt1"/>
+                </a:solidFill>
+                <a:latin typeface="Montserrat"/>
+                <a:ea typeface="Montserrat"/>
+                <a:cs typeface="Montserrat"/>
+                <a:sym typeface="Montserrat"/>
+              </a:defRPr>
             </a:lvl9pPr>
           </a:lstStyle>
           <a:p/>
@@ -1781,7 +2567,7 @@
       </p:sp>
       <p:sp>
         <p:nvSpPr>
-          <p:cNvPr id="12" name="Google Shape;12;p2"/>
+          <p:cNvPr id="14" name="Google Shape;14;p2"/>
           <p:cNvSpPr txBox="1"/>
           <p:nvPr>
             <p:ph idx="12" type="sldNum"/>
@@ -1789,7 +2575,7 @@
         </p:nvSpPr>
         <p:spPr>
           <a:xfrm>
-            <a:off x="8472458" y="4663217"/>
+            <a:off x="8497999" y="4688759"/>
             <a:ext cx="548700" cy="393600"/>
           </a:xfrm>
           <a:prstGeom prst="rect">
@@ -1869,7 +2655,7 @@
   <p:cSld name="BIG_NUMBER">
     <p:spTree>
       <p:nvGrpSpPr>
-        <p:cNvPr id="44" name="Shape 44"/>
+        <p:cNvPr id="48" name="Shape 48"/>
         <p:cNvGrpSpPr/>
         <p:nvPr/>
       </p:nvGrpSpPr>
@@ -1883,7 +2669,7 @@
       </p:grpSpPr>
       <p:sp>
         <p:nvSpPr>
-          <p:cNvPr id="45" name="Google Shape;45;p11"/>
+          <p:cNvPr id="49" name="Google Shape;49;p11"/>
           <p:cNvSpPr txBox="1"/>
           <p:nvPr>
             <p:ph hasCustomPrompt="1" type="title"/>
@@ -1891,8 +2677,8 @@
         </p:nvSpPr>
         <p:spPr>
           <a:xfrm>
-            <a:off x="311700" y="1106125"/>
-            <a:ext cx="8520600" cy="1963500"/>
+            <a:off x="311700" y="999925"/>
+            <a:ext cx="8520600" cy="2146200"/>
           </a:xfrm>
           <a:prstGeom prst="rect">
             <a:avLst/>
@@ -1910,9 +2696,15 @@
               <a:spcAft>
                 <a:spcPts val="0"/>
               </a:spcAft>
-              <a:buSzPts val="12000"/>
-              <a:buNone/>
-              <a:defRPr sz="12000"/>
+              <a:buSzPts val="14000"/>
+              <a:buFont typeface="Montserrat"/>
+              <a:buNone/>
+              <a:defRPr sz="14000">
+                <a:latin typeface="Montserrat"/>
+                <a:ea typeface="Montserrat"/>
+                <a:cs typeface="Montserrat"/>
+                <a:sym typeface="Montserrat"/>
+              </a:defRPr>
             </a:lvl1pPr>
             <a:lvl2pPr lvl="1" algn="ctr">
               <a:spcBef>
@@ -1921,9 +2713,15 @@
               <a:spcAft>
                 <a:spcPts val="0"/>
               </a:spcAft>
-              <a:buSzPts val="12000"/>
-              <a:buNone/>
-              <a:defRPr sz="12000"/>
+              <a:buSzPts val="14000"/>
+              <a:buFont typeface="Montserrat"/>
+              <a:buNone/>
+              <a:defRPr sz="14000">
+                <a:latin typeface="Montserrat"/>
+                <a:ea typeface="Montserrat"/>
+                <a:cs typeface="Montserrat"/>
+                <a:sym typeface="Montserrat"/>
+              </a:defRPr>
             </a:lvl2pPr>
             <a:lvl3pPr lvl="2" algn="ctr">
               <a:spcBef>
@@ -1932,9 +2730,15 @@
               <a:spcAft>
                 <a:spcPts val="0"/>
               </a:spcAft>
-              <a:buSzPts val="12000"/>
-              <a:buNone/>
-              <a:defRPr sz="12000"/>
+              <a:buSzPts val="14000"/>
+              <a:buFont typeface="Montserrat"/>
+              <a:buNone/>
+              <a:defRPr sz="14000">
+                <a:latin typeface="Montserrat"/>
+                <a:ea typeface="Montserrat"/>
+                <a:cs typeface="Montserrat"/>
+                <a:sym typeface="Montserrat"/>
+              </a:defRPr>
             </a:lvl3pPr>
             <a:lvl4pPr lvl="3" algn="ctr">
               <a:spcBef>
@@ -1943,9 +2747,15 @@
               <a:spcAft>
                 <a:spcPts val="0"/>
               </a:spcAft>
-              <a:buSzPts val="12000"/>
-              <a:buNone/>
-              <a:defRPr sz="12000"/>
+              <a:buSzPts val="14000"/>
+              <a:buFont typeface="Montserrat"/>
+              <a:buNone/>
+              <a:defRPr sz="14000">
+                <a:latin typeface="Montserrat"/>
+                <a:ea typeface="Montserrat"/>
+                <a:cs typeface="Montserrat"/>
+                <a:sym typeface="Montserrat"/>
+              </a:defRPr>
             </a:lvl4pPr>
             <a:lvl5pPr lvl="4" algn="ctr">
               <a:spcBef>
@@ -1954,9 +2764,15 @@
               <a:spcAft>
                 <a:spcPts val="0"/>
               </a:spcAft>
-              <a:buSzPts val="12000"/>
-              <a:buNone/>
-              <a:defRPr sz="12000"/>
+              <a:buSzPts val="14000"/>
+              <a:buFont typeface="Montserrat"/>
+              <a:buNone/>
+              <a:defRPr sz="14000">
+                <a:latin typeface="Montserrat"/>
+                <a:ea typeface="Montserrat"/>
+                <a:cs typeface="Montserrat"/>
+                <a:sym typeface="Montserrat"/>
+              </a:defRPr>
             </a:lvl5pPr>
             <a:lvl6pPr lvl="5" algn="ctr">
               <a:spcBef>
@@ -1965,9 +2781,15 @@
               <a:spcAft>
                 <a:spcPts val="0"/>
               </a:spcAft>
-              <a:buSzPts val="12000"/>
-              <a:buNone/>
-              <a:defRPr sz="12000"/>
+              <a:buSzPts val="14000"/>
+              <a:buFont typeface="Montserrat"/>
+              <a:buNone/>
+              <a:defRPr sz="14000">
+                <a:latin typeface="Montserrat"/>
+                <a:ea typeface="Montserrat"/>
+                <a:cs typeface="Montserrat"/>
+                <a:sym typeface="Montserrat"/>
+              </a:defRPr>
             </a:lvl6pPr>
             <a:lvl7pPr lvl="6" algn="ctr">
               <a:spcBef>
@@ -1976,9 +2798,15 @@
               <a:spcAft>
                 <a:spcPts val="0"/>
               </a:spcAft>
-              <a:buSzPts val="12000"/>
-              <a:buNone/>
-              <a:defRPr sz="12000"/>
+              <a:buSzPts val="14000"/>
+              <a:buFont typeface="Montserrat"/>
+              <a:buNone/>
+              <a:defRPr sz="14000">
+                <a:latin typeface="Montserrat"/>
+                <a:ea typeface="Montserrat"/>
+                <a:cs typeface="Montserrat"/>
+                <a:sym typeface="Montserrat"/>
+              </a:defRPr>
             </a:lvl7pPr>
             <a:lvl8pPr lvl="7" algn="ctr">
               <a:spcBef>
@@ -1987,9 +2815,15 @@
               <a:spcAft>
                 <a:spcPts val="0"/>
               </a:spcAft>
-              <a:buSzPts val="12000"/>
-              <a:buNone/>
-              <a:defRPr sz="12000"/>
+              <a:buSzPts val="14000"/>
+              <a:buFont typeface="Montserrat"/>
+              <a:buNone/>
+              <a:defRPr sz="14000">
+                <a:latin typeface="Montserrat"/>
+                <a:ea typeface="Montserrat"/>
+                <a:cs typeface="Montserrat"/>
+                <a:sym typeface="Montserrat"/>
+              </a:defRPr>
             </a:lvl8pPr>
             <a:lvl9pPr lvl="8" algn="ctr">
               <a:spcBef>
@@ -1998,9 +2832,15 @@
               <a:spcAft>
                 <a:spcPts val="0"/>
               </a:spcAft>
-              <a:buSzPts val="12000"/>
-              <a:buNone/>
-              <a:defRPr sz="12000"/>
+              <a:buSzPts val="14000"/>
+              <a:buFont typeface="Montserrat"/>
+              <a:buNone/>
+              <a:defRPr sz="14000">
+                <a:latin typeface="Montserrat"/>
+                <a:ea typeface="Montserrat"/>
+                <a:cs typeface="Montserrat"/>
+                <a:sym typeface="Montserrat"/>
+              </a:defRPr>
             </a:lvl9pPr>
           </a:lstStyle>
           <a:p>
@@ -2012,7 +2852,7 @@
       </p:sp>
       <p:sp>
         <p:nvSpPr>
-          <p:cNvPr id="46" name="Google Shape;46;p11"/>
+          <p:cNvPr id="50" name="Google Shape;50;p11"/>
           <p:cNvSpPr txBox="1"/>
           <p:nvPr>
             <p:ph idx="1" type="body"/>
@@ -2020,7 +2860,7 @@
         </p:nvSpPr>
         <p:spPr>
           <a:xfrm>
-            <a:off x="311700" y="3152225"/>
+            <a:off x="311700" y="3228425"/>
             <a:ext cx="8520600" cy="1300800"/>
           </a:xfrm>
           <a:prstGeom prst="rect">
@@ -2041,7 +2881,11 @@
               </a:spcAft>
               <a:buSzPts val="1800"/>
               <a:buChar char="●"/>
-              <a:defRPr/>
+              <a:defRPr>
+                <a:highlight>
+                  <a:schemeClr val="dk1"/>
+                </a:highlight>
+              </a:defRPr>
             </a:lvl1pPr>
             <a:lvl2pPr indent="-317500" lvl="1" marL="914400" algn="ctr">
               <a:spcBef>
@@ -2052,7 +2896,11 @@
               </a:spcAft>
               <a:buSzPts val="1400"/>
               <a:buChar char="○"/>
-              <a:defRPr/>
+              <a:defRPr>
+                <a:highlight>
+                  <a:schemeClr val="dk1"/>
+                </a:highlight>
+              </a:defRPr>
             </a:lvl2pPr>
             <a:lvl3pPr indent="-317500" lvl="2" marL="1371600" algn="ctr">
               <a:spcBef>
@@ -2063,7 +2911,11 @@
               </a:spcAft>
               <a:buSzPts val="1400"/>
               <a:buChar char="■"/>
-              <a:defRPr/>
+              <a:defRPr>
+                <a:highlight>
+                  <a:schemeClr val="dk1"/>
+                </a:highlight>
+              </a:defRPr>
             </a:lvl3pPr>
             <a:lvl4pPr indent="-317500" lvl="3" marL="1828800" algn="ctr">
               <a:spcBef>
@@ -2074,7 +2926,11 @@
               </a:spcAft>
               <a:buSzPts val="1400"/>
               <a:buChar char="●"/>
-              <a:defRPr/>
+              <a:defRPr>
+                <a:highlight>
+                  <a:schemeClr val="dk1"/>
+                </a:highlight>
+              </a:defRPr>
             </a:lvl4pPr>
             <a:lvl5pPr indent="-317500" lvl="4" marL="2286000" algn="ctr">
               <a:spcBef>
@@ -2085,7 +2941,11 @@
               </a:spcAft>
               <a:buSzPts val="1400"/>
               <a:buChar char="○"/>
-              <a:defRPr/>
+              <a:defRPr>
+                <a:highlight>
+                  <a:schemeClr val="dk1"/>
+                </a:highlight>
+              </a:defRPr>
             </a:lvl5pPr>
             <a:lvl6pPr indent="-317500" lvl="5" marL="2743200" algn="ctr">
               <a:spcBef>
@@ -2096,7 +2956,11 @@
               </a:spcAft>
               <a:buSzPts val="1400"/>
               <a:buChar char="■"/>
-              <a:defRPr/>
+              <a:defRPr>
+                <a:highlight>
+                  <a:schemeClr val="dk1"/>
+                </a:highlight>
+              </a:defRPr>
             </a:lvl6pPr>
             <a:lvl7pPr indent="-317500" lvl="6" marL="3200400" algn="ctr">
               <a:spcBef>
@@ -2107,7 +2971,11 @@
               </a:spcAft>
               <a:buSzPts val="1400"/>
               <a:buChar char="●"/>
-              <a:defRPr/>
+              <a:defRPr>
+                <a:highlight>
+                  <a:schemeClr val="dk1"/>
+                </a:highlight>
+              </a:defRPr>
             </a:lvl7pPr>
             <a:lvl8pPr indent="-317500" lvl="7" marL="3657600" algn="ctr">
               <a:spcBef>
@@ -2118,7 +2986,11 @@
               </a:spcAft>
               <a:buSzPts val="1400"/>
               <a:buChar char="○"/>
-              <a:defRPr/>
+              <a:defRPr>
+                <a:highlight>
+                  <a:schemeClr val="dk1"/>
+                </a:highlight>
+              </a:defRPr>
             </a:lvl8pPr>
             <a:lvl9pPr indent="-317500" lvl="8" marL="4114800" algn="ctr">
               <a:spcBef>
@@ -2129,7 +3001,11 @@
               </a:spcAft>
               <a:buSzPts val="1400"/>
               <a:buChar char="■"/>
-              <a:defRPr/>
+              <a:defRPr>
+                <a:highlight>
+                  <a:schemeClr val="dk1"/>
+                </a:highlight>
+              </a:defRPr>
             </a:lvl9pPr>
           </a:lstStyle>
           <a:p/>
@@ -2137,7 +3013,7 @@
       </p:sp>
       <p:sp>
         <p:nvSpPr>
-          <p:cNvPr id="47" name="Google Shape;47;p11"/>
+          <p:cNvPr id="51" name="Google Shape;51;p11"/>
           <p:cNvSpPr txBox="1"/>
           <p:nvPr>
             <p:ph idx="12" type="sldNum"/>
@@ -2145,7 +3021,7 @@
         </p:nvSpPr>
         <p:spPr>
           <a:xfrm>
-            <a:off x="8472458" y="4663217"/>
+            <a:off x="8497999" y="4688759"/>
             <a:ext cx="548700" cy="393600"/>
           </a:xfrm>
           <a:prstGeom prst="rect">
@@ -2225,7 +3101,7 @@
   <p:cSld name="BLANK">
     <p:spTree>
       <p:nvGrpSpPr>
-        <p:cNvPr id="48" name="Shape 48"/>
+        <p:cNvPr id="52" name="Shape 52"/>
         <p:cNvGrpSpPr/>
         <p:nvPr/>
       </p:nvGrpSpPr>
@@ -2239,7 +3115,7 @@
       </p:grpSpPr>
       <p:sp>
         <p:nvSpPr>
-          <p:cNvPr id="49" name="Google Shape;49;p12"/>
+          <p:cNvPr id="53" name="Google Shape;53;p12"/>
           <p:cNvSpPr txBox="1"/>
           <p:nvPr>
             <p:ph idx="12" type="sldNum"/>
@@ -2247,7 +3123,7 @@
         </p:nvSpPr>
         <p:spPr>
           <a:xfrm>
-            <a:off x="8472458" y="4663217"/>
+            <a:off x="8497999" y="4688759"/>
             <a:ext cx="548700" cy="393600"/>
           </a:xfrm>
           <a:prstGeom prst="rect">
@@ -2325,9 +3201,16 @@
 <file path=ppt/slideLayouts/slideLayout2.xml><?xml version="1.0" encoding="utf-8"?>
 <p:sldLayout xmlns:a="http://schemas.openxmlformats.org/drawingml/2006/main" xmlns:r="http://schemas.openxmlformats.org/officeDocument/2006/relationships" xmlns:mc="http://schemas.openxmlformats.org/markup-compatibility/2006" xmlns:mv="urn:schemas-microsoft-com:mac:vml" xmlns:p="http://schemas.openxmlformats.org/presentationml/2006/main" xmlns:c="http://schemas.openxmlformats.org/drawingml/2006/chart" xmlns:dgm="http://schemas.openxmlformats.org/drawingml/2006/diagram" xmlns:o="urn:schemas-microsoft-com:office:office" xmlns:v="urn:schemas-microsoft-com:vml" xmlns:pvml="urn:schemas-microsoft-com:office:powerpoint" xmlns:com="http://schemas.openxmlformats.org/drawingml/2006/compatibility" xmlns:p14="http://schemas.microsoft.com/office/powerpoint/2010/main" xmlns:p15="http://schemas.microsoft.com/office/powerpoint/2012/main" xmlns:ahyp="http://schemas.microsoft.com/office/drawing/2018/hyperlinkcolor" matchingName="Section header" type="secHead">
   <p:cSld name="SECTION_HEADER">
+    <p:bg>
+      <p:bgPr>
+        <a:solidFill>
+          <a:schemeClr val="accent4"/>
+        </a:solidFill>
+      </p:bgPr>
+    </p:bg>
     <p:spTree>
       <p:nvGrpSpPr>
-        <p:cNvPr id="13" name="Shape 13"/>
+        <p:cNvPr id="15" name="Shape 15"/>
         <p:cNvGrpSpPr/>
         <p:nvPr/>
       </p:nvGrpSpPr>
@@ -2341,7 +3224,50 @@
       </p:grpSpPr>
       <p:sp>
         <p:nvSpPr>
-          <p:cNvPr id="14" name="Google Shape;14;p3"/>
+          <p:cNvPr id="16" name="Google Shape;16;p3"/>
+          <p:cNvSpPr/>
+          <p:nvPr/>
+        </p:nvSpPr>
+        <p:spPr>
+          <a:xfrm rot="5400000">
+            <a:off x="4550700" y="-498600"/>
+            <a:ext cx="42600" cy="8455800"/>
+          </a:xfrm>
+          <a:prstGeom prst="rect">
+            <a:avLst/>
+          </a:prstGeom>
+          <a:solidFill>
+            <a:schemeClr val="dk2"/>
+          </a:solidFill>
+          <a:ln>
+            <a:noFill/>
+          </a:ln>
+        </p:spPr>
+        <p:txBody>
+          <a:bodyPr anchorCtr="0" anchor="ctr" bIns="91425" lIns="91425" spcFirstLastPara="1" rIns="91425" wrap="square" tIns="91425">
+            <a:noAutofit/>
+          </a:bodyPr>
+          <a:lstStyle/>
+          <a:p>
+            <a:pPr indent="0" lvl="0" marL="0" rtl="0" algn="l">
+              <a:spcBef>
+                <a:spcPts val="0"/>
+              </a:spcBef>
+              <a:spcAft>
+                <a:spcPts val="0"/>
+              </a:spcAft>
+              <a:buNone/>
+            </a:pPr>
+            <a:r>
+              <a:t/>
+            </a:r>
+            <a:endParaRPr/>
+          </a:p>
+        </p:txBody>
+      </p:sp>
+      <p:sp>
+        <p:nvSpPr>
+          <p:cNvPr id="17" name="Google Shape;17;p3"/>
           <p:cNvSpPr txBox="1"/>
           <p:nvPr>
             <p:ph type="title"/>
@@ -2349,12 +3275,15 @@
         </p:nvSpPr>
         <p:spPr>
           <a:xfrm>
-            <a:off x="311700" y="2150850"/>
-            <a:ext cx="8520600" cy="841800"/>
+            <a:off x="344250" y="1403850"/>
+            <a:ext cx="8455500" cy="2146800"/>
           </a:xfrm>
           <a:prstGeom prst="rect">
             <a:avLst/>
           </a:prstGeom>
+          <a:solidFill>
+            <a:srgbClr val="FFFFFF"/>
+          </a:solidFill>
         </p:spPr>
         <p:txBody>
           <a:bodyPr anchorCtr="0" anchor="ctr" bIns="91425" lIns="91425" spcFirstLastPara="1" rIns="91425" wrap="square" tIns="91425">
@@ -2368,9 +3297,15 @@
               <a:spcAft>
                 <a:spcPts val="0"/>
               </a:spcAft>
-              <a:buSzPts val="3600"/>
-              <a:buNone/>
-              <a:defRPr sz="3600"/>
+              <a:buSzPts val="4800"/>
+              <a:buFont typeface="Playfair Display"/>
+              <a:buNone/>
+              <a:defRPr b="1" sz="4800">
+                <a:latin typeface="Playfair Display"/>
+                <a:ea typeface="Playfair Display"/>
+                <a:cs typeface="Playfair Display"/>
+                <a:sym typeface="Playfair Display"/>
+              </a:defRPr>
             </a:lvl1pPr>
             <a:lvl2pPr lvl="1" algn="ctr">
               <a:spcBef>
@@ -2379,9 +3314,15 @@
               <a:spcAft>
                 <a:spcPts val="0"/>
               </a:spcAft>
-              <a:buSzPts val="3600"/>
-              <a:buNone/>
-              <a:defRPr sz="3600"/>
+              <a:buSzPts val="4800"/>
+              <a:buFont typeface="Playfair Display"/>
+              <a:buNone/>
+              <a:defRPr b="1" sz="4800">
+                <a:latin typeface="Playfair Display"/>
+                <a:ea typeface="Playfair Display"/>
+                <a:cs typeface="Playfair Display"/>
+                <a:sym typeface="Playfair Display"/>
+              </a:defRPr>
             </a:lvl2pPr>
             <a:lvl3pPr lvl="2" algn="ctr">
               <a:spcBef>
@@ -2390,9 +3331,15 @@
               <a:spcAft>
                 <a:spcPts val="0"/>
               </a:spcAft>
-              <a:buSzPts val="3600"/>
-              <a:buNone/>
-              <a:defRPr sz="3600"/>
+              <a:buSzPts val="4800"/>
+              <a:buFont typeface="Playfair Display"/>
+              <a:buNone/>
+              <a:defRPr b="1" sz="4800">
+                <a:latin typeface="Playfair Display"/>
+                <a:ea typeface="Playfair Display"/>
+                <a:cs typeface="Playfair Display"/>
+                <a:sym typeface="Playfair Display"/>
+              </a:defRPr>
             </a:lvl3pPr>
             <a:lvl4pPr lvl="3" algn="ctr">
               <a:spcBef>
@@ -2401,9 +3348,15 @@
               <a:spcAft>
                 <a:spcPts val="0"/>
               </a:spcAft>
-              <a:buSzPts val="3600"/>
-              <a:buNone/>
-              <a:defRPr sz="3600"/>
+              <a:buSzPts val="4800"/>
+              <a:buFont typeface="Playfair Display"/>
+              <a:buNone/>
+              <a:defRPr b="1" sz="4800">
+                <a:latin typeface="Playfair Display"/>
+                <a:ea typeface="Playfair Display"/>
+                <a:cs typeface="Playfair Display"/>
+                <a:sym typeface="Playfair Display"/>
+              </a:defRPr>
             </a:lvl4pPr>
             <a:lvl5pPr lvl="4" algn="ctr">
               <a:spcBef>
@@ -2412,9 +3365,15 @@
               <a:spcAft>
                 <a:spcPts val="0"/>
               </a:spcAft>
-              <a:buSzPts val="3600"/>
-              <a:buNone/>
-              <a:defRPr sz="3600"/>
+              <a:buSzPts val="4800"/>
+              <a:buFont typeface="Playfair Display"/>
+              <a:buNone/>
+              <a:defRPr b="1" sz="4800">
+                <a:latin typeface="Playfair Display"/>
+                <a:ea typeface="Playfair Display"/>
+                <a:cs typeface="Playfair Display"/>
+                <a:sym typeface="Playfair Display"/>
+              </a:defRPr>
             </a:lvl5pPr>
             <a:lvl6pPr lvl="5" algn="ctr">
               <a:spcBef>
@@ -2423,9 +3382,15 @@
               <a:spcAft>
                 <a:spcPts val="0"/>
               </a:spcAft>
-              <a:buSzPts val="3600"/>
-              <a:buNone/>
-              <a:defRPr sz="3600"/>
+              <a:buSzPts val="4800"/>
+              <a:buFont typeface="Playfair Display"/>
+              <a:buNone/>
+              <a:defRPr b="1" sz="4800">
+                <a:latin typeface="Playfair Display"/>
+                <a:ea typeface="Playfair Display"/>
+                <a:cs typeface="Playfair Display"/>
+                <a:sym typeface="Playfair Display"/>
+              </a:defRPr>
             </a:lvl6pPr>
             <a:lvl7pPr lvl="6" algn="ctr">
               <a:spcBef>
@@ -2434,9 +3399,15 @@
               <a:spcAft>
                 <a:spcPts val="0"/>
               </a:spcAft>
-              <a:buSzPts val="3600"/>
-              <a:buNone/>
-              <a:defRPr sz="3600"/>
+              <a:buSzPts val="4800"/>
+              <a:buFont typeface="Playfair Display"/>
+              <a:buNone/>
+              <a:defRPr b="1" sz="4800">
+                <a:latin typeface="Playfair Display"/>
+                <a:ea typeface="Playfair Display"/>
+                <a:cs typeface="Playfair Display"/>
+                <a:sym typeface="Playfair Display"/>
+              </a:defRPr>
             </a:lvl7pPr>
             <a:lvl8pPr lvl="7" algn="ctr">
               <a:spcBef>
@@ -2445,9 +3416,15 @@
               <a:spcAft>
                 <a:spcPts val="0"/>
               </a:spcAft>
-              <a:buSzPts val="3600"/>
-              <a:buNone/>
-              <a:defRPr sz="3600"/>
+              <a:buSzPts val="4800"/>
+              <a:buFont typeface="Playfair Display"/>
+              <a:buNone/>
+              <a:defRPr b="1" sz="4800">
+                <a:latin typeface="Playfair Display"/>
+                <a:ea typeface="Playfair Display"/>
+                <a:cs typeface="Playfair Display"/>
+                <a:sym typeface="Playfair Display"/>
+              </a:defRPr>
             </a:lvl8pPr>
             <a:lvl9pPr lvl="8" algn="ctr">
               <a:spcBef>
@@ -2456,9 +3433,15 @@
               <a:spcAft>
                 <a:spcPts val="0"/>
               </a:spcAft>
-              <a:buSzPts val="3600"/>
-              <a:buNone/>
-              <a:defRPr sz="3600"/>
+              <a:buSzPts val="4800"/>
+              <a:buFont typeface="Playfair Display"/>
+              <a:buNone/>
+              <a:defRPr b="1" sz="4800">
+                <a:latin typeface="Playfair Display"/>
+                <a:ea typeface="Playfair Display"/>
+                <a:cs typeface="Playfair Display"/>
+                <a:sym typeface="Playfair Display"/>
+              </a:defRPr>
             </a:lvl9pPr>
           </a:lstStyle>
           <a:p/>
@@ -2466,7 +3449,7 @@
       </p:sp>
       <p:sp>
         <p:nvSpPr>
-          <p:cNvPr id="15" name="Google Shape;15;p3"/>
+          <p:cNvPr id="18" name="Google Shape;18;p3"/>
           <p:cNvSpPr txBox="1"/>
           <p:nvPr>
             <p:ph idx="12" type="sldNum"/>
@@ -2474,7 +3457,7 @@
         </p:nvSpPr>
         <p:spPr>
           <a:xfrm>
-            <a:off x="8472458" y="4663217"/>
+            <a:off x="8497999" y="4688759"/>
             <a:ext cx="548700" cy="393600"/>
           </a:xfrm>
           <a:prstGeom prst="rect">
@@ -2488,39 +3471,75 @@
           <a:lstStyle>
             <a:lvl1pPr lvl="0">
               <a:buNone/>
-              <a:defRPr/>
+              <a:defRPr>
+                <a:solidFill>
+                  <a:schemeClr val="lt1"/>
+                </a:solidFill>
+              </a:defRPr>
             </a:lvl1pPr>
             <a:lvl2pPr lvl="1">
               <a:buNone/>
-              <a:defRPr/>
+              <a:defRPr>
+                <a:solidFill>
+                  <a:schemeClr val="lt1"/>
+                </a:solidFill>
+              </a:defRPr>
             </a:lvl2pPr>
             <a:lvl3pPr lvl="2">
               <a:buNone/>
-              <a:defRPr/>
+              <a:defRPr>
+                <a:solidFill>
+                  <a:schemeClr val="lt1"/>
+                </a:solidFill>
+              </a:defRPr>
             </a:lvl3pPr>
             <a:lvl4pPr lvl="3">
               <a:buNone/>
-              <a:defRPr/>
+              <a:defRPr>
+                <a:solidFill>
+                  <a:schemeClr val="lt1"/>
+                </a:solidFill>
+              </a:defRPr>
             </a:lvl4pPr>
             <a:lvl5pPr lvl="4">
               <a:buNone/>
-              <a:defRPr/>
+              <a:defRPr>
+                <a:solidFill>
+                  <a:schemeClr val="lt1"/>
+                </a:solidFill>
+              </a:defRPr>
             </a:lvl5pPr>
             <a:lvl6pPr lvl="5">
               <a:buNone/>
-              <a:defRPr/>
+              <a:defRPr>
+                <a:solidFill>
+                  <a:schemeClr val="lt1"/>
+                </a:solidFill>
+              </a:defRPr>
             </a:lvl6pPr>
             <a:lvl7pPr lvl="6">
               <a:buNone/>
-              <a:defRPr/>
+              <a:defRPr>
+                <a:solidFill>
+                  <a:schemeClr val="lt1"/>
+                </a:solidFill>
+              </a:defRPr>
             </a:lvl7pPr>
             <a:lvl8pPr lvl="7">
               <a:buNone/>
-              <a:defRPr/>
+              <a:defRPr>
+                <a:solidFill>
+                  <a:schemeClr val="lt1"/>
+                </a:solidFill>
+              </a:defRPr>
             </a:lvl8pPr>
             <a:lvl9pPr lvl="8">
               <a:buNone/>
-              <a:defRPr/>
+              <a:defRPr>
+                <a:solidFill>
+                  <a:schemeClr val="lt1"/>
+                </a:solidFill>
+              </a:defRPr>
             </a:lvl9pPr>
           </a:lstStyle>
           <a:p>
@@ -2554,7 +3573,7 @@
   <p:cSld name="TITLE_AND_BODY">
     <p:spTree>
       <p:nvGrpSpPr>
-        <p:cNvPr id="16" name="Shape 16"/>
+        <p:cNvPr id="19" name="Shape 19"/>
         <p:cNvGrpSpPr/>
         <p:nvPr/>
       </p:nvGrpSpPr>
@@ -2568,7 +3587,7 @@
       </p:grpSpPr>
       <p:sp>
         <p:nvSpPr>
-          <p:cNvPr id="17" name="Google Shape;17;p4"/>
+          <p:cNvPr id="20" name="Google Shape;20;p4"/>
           <p:cNvSpPr txBox="1"/>
           <p:nvPr>
             <p:ph type="title"/>
@@ -2595,7 +3614,7 @@
               <a:spcAft>
                 <a:spcPts val="0"/>
               </a:spcAft>
-              <a:buSzPts val="2800"/>
+              <a:buSzPts val="3000"/>
               <a:buNone/>
               <a:defRPr/>
             </a:lvl1pPr>
@@ -2606,7 +3625,7 @@
               <a:spcAft>
                 <a:spcPts val="0"/>
               </a:spcAft>
-              <a:buSzPts val="2800"/>
+              <a:buSzPts val="3000"/>
               <a:buNone/>
               <a:defRPr/>
             </a:lvl2pPr>
@@ -2617,7 +3636,7 @@
               <a:spcAft>
                 <a:spcPts val="0"/>
               </a:spcAft>
-              <a:buSzPts val="2800"/>
+              <a:buSzPts val="3000"/>
               <a:buNone/>
               <a:defRPr/>
             </a:lvl3pPr>
@@ -2628,7 +3647,7 @@
               <a:spcAft>
                 <a:spcPts val="0"/>
               </a:spcAft>
-              <a:buSzPts val="2800"/>
+              <a:buSzPts val="3000"/>
               <a:buNone/>
               <a:defRPr/>
             </a:lvl4pPr>
@@ -2639,7 +3658,7 @@
               <a:spcAft>
                 <a:spcPts val="0"/>
               </a:spcAft>
-              <a:buSzPts val="2800"/>
+              <a:buSzPts val="3000"/>
               <a:buNone/>
               <a:defRPr/>
             </a:lvl5pPr>
@@ -2650,7 +3669,7 @@
               <a:spcAft>
                 <a:spcPts val="0"/>
               </a:spcAft>
-              <a:buSzPts val="2800"/>
+              <a:buSzPts val="3000"/>
               <a:buNone/>
               <a:defRPr/>
             </a:lvl6pPr>
@@ -2661,7 +3680,7 @@
               <a:spcAft>
                 <a:spcPts val="0"/>
               </a:spcAft>
-              <a:buSzPts val="2800"/>
+              <a:buSzPts val="3000"/>
               <a:buNone/>
               <a:defRPr/>
             </a:lvl7pPr>
@@ -2672,7 +3691,7 @@
               <a:spcAft>
                 <a:spcPts val="0"/>
               </a:spcAft>
-              <a:buSzPts val="2800"/>
+              <a:buSzPts val="3000"/>
               <a:buNone/>
               <a:defRPr/>
             </a:lvl8pPr>
@@ -2683,7 +3702,7 @@
               <a:spcAft>
                 <a:spcPts val="0"/>
               </a:spcAft>
-              <a:buSzPts val="2800"/>
+              <a:buSzPts val="3000"/>
               <a:buNone/>
               <a:defRPr/>
             </a:lvl9pPr>
@@ -2693,7 +3712,7 @@
       </p:sp>
       <p:sp>
         <p:nvSpPr>
-          <p:cNvPr id="18" name="Google Shape;18;p4"/>
+          <p:cNvPr id="21" name="Google Shape;21;p4"/>
           <p:cNvSpPr txBox="1"/>
           <p:nvPr>
             <p:ph idx="1" type="body"/>
@@ -2701,8 +3720,8 @@
         </p:nvSpPr>
         <p:spPr>
           <a:xfrm>
-            <a:off x="311700" y="1152475"/>
-            <a:ext cx="8520600" cy="3416400"/>
+            <a:off x="311700" y="1234075"/>
+            <a:ext cx="8520600" cy="3334800"/>
           </a:xfrm>
           <a:prstGeom prst="rect">
             <a:avLst/>
@@ -2818,7 +3837,7 @@
       </p:sp>
       <p:sp>
         <p:nvSpPr>
-          <p:cNvPr id="19" name="Google Shape;19;p4"/>
+          <p:cNvPr id="22" name="Google Shape;22;p4"/>
           <p:cNvSpPr txBox="1"/>
           <p:nvPr>
             <p:ph idx="12" type="sldNum"/>
@@ -2826,7 +3845,7 @@
         </p:nvSpPr>
         <p:spPr>
           <a:xfrm>
-            <a:off x="8472458" y="4663217"/>
+            <a:off x="8497999" y="4688759"/>
             <a:ext cx="548700" cy="393600"/>
           </a:xfrm>
           <a:prstGeom prst="rect">
@@ -2906,7 +3925,7 @@
   <p:cSld name="TITLE_AND_TWO_COLUMNS">
     <p:spTree>
       <p:nvGrpSpPr>
-        <p:cNvPr id="20" name="Shape 20"/>
+        <p:cNvPr id="23" name="Shape 23"/>
         <p:cNvGrpSpPr/>
         <p:nvPr/>
       </p:nvGrpSpPr>
@@ -2920,7 +3939,7 @@
       </p:grpSpPr>
       <p:sp>
         <p:nvSpPr>
-          <p:cNvPr id="21" name="Google Shape;21;p5"/>
+          <p:cNvPr id="24" name="Google Shape;24;p5"/>
           <p:cNvSpPr txBox="1"/>
           <p:nvPr>
             <p:ph type="title"/>
@@ -2947,7 +3966,7 @@
               <a:spcAft>
                 <a:spcPts val="0"/>
               </a:spcAft>
-              <a:buSzPts val="2800"/>
+              <a:buSzPts val="3000"/>
               <a:buNone/>
               <a:defRPr/>
             </a:lvl1pPr>
@@ -2958,7 +3977,7 @@
               <a:spcAft>
                 <a:spcPts val="0"/>
               </a:spcAft>
-              <a:buSzPts val="2800"/>
+              <a:buSzPts val="3000"/>
               <a:buNone/>
               <a:defRPr/>
             </a:lvl2pPr>
@@ -2969,7 +3988,7 @@
               <a:spcAft>
                 <a:spcPts val="0"/>
               </a:spcAft>
-              <a:buSzPts val="2800"/>
+              <a:buSzPts val="3000"/>
               <a:buNone/>
               <a:defRPr/>
             </a:lvl3pPr>
@@ -2980,7 +3999,7 @@
               <a:spcAft>
                 <a:spcPts val="0"/>
               </a:spcAft>
-              <a:buSzPts val="2800"/>
+              <a:buSzPts val="3000"/>
               <a:buNone/>
               <a:defRPr/>
             </a:lvl4pPr>
@@ -2991,7 +4010,7 @@
               <a:spcAft>
                 <a:spcPts val="0"/>
               </a:spcAft>
-              <a:buSzPts val="2800"/>
+              <a:buSzPts val="3000"/>
               <a:buNone/>
               <a:defRPr/>
             </a:lvl5pPr>
@@ -3002,7 +4021,7 @@
               <a:spcAft>
                 <a:spcPts val="0"/>
               </a:spcAft>
-              <a:buSzPts val="2800"/>
+              <a:buSzPts val="3000"/>
               <a:buNone/>
               <a:defRPr/>
             </a:lvl6pPr>
@@ -3013,7 +4032,7 @@
               <a:spcAft>
                 <a:spcPts val="0"/>
               </a:spcAft>
-              <a:buSzPts val="2800"/>
+              <a:buSzPts val="3000"/>
               <a:buNone/>
               <a:defRPr/>
             </a:lvl7pPr>
@@ -3024,7 +4043,7 @@
               <a:spcAft>
                 <a:spcPts val="0"/>
               </a:spcAft>
-              <a:buSzPts val="2800"/>
+              <a:buSzPts val="3000"/>
               <a:buNone/>
               <a:defRPr/>
             </a:lvl8pPr>
@@ -3035,7 +4054,7 @@
               <a:spcAft>
                 <a:spcPts val="0"/>
               </a:spcAft>
-              <a:buSzPts val="2800"/>
+              <a:buSzPts val="3000"/>
               <a:buNone/>
               <a:defRPr/>
             </a:lvl9pPr>
@@ -3045,7 +4064,7 @@
       </p:sp>
       <p:sp>
         <p:nvSpPr>
-          <p:cNvPr id="22" name="Google Shape;22;p5"/>
+          <p:cNvPr id="25" name="Google Shape;25;p5"/>
           <p:cNvSpPr txBox="1"/>
           <p:nvPr>
             <p:ph idx="1" type="body"/>
@@ -3053,8 +4072,8 @@
         </p:nvSpPr>
         <p:spPr>
           <a:xfrm>
-            <a:off x="311700" y="1152475"/>
-            <a:ext cx="3999900" cy="3416400"/>
+            <a:off x="311700" y="1234050"/>
+            <a:ext cx="3999900" cy="3334800"/>
           </a:xfrm>
           <a:prstGeom prst="rect">
             <a:avLst/>
@@ -3170,7 +4189,7 @@
       </p:sp>
       <p:sp>
         <p:nvSpPr>
-          <p:cNvPr id="23" name="Google Shape;23;p5"/>
+          <p:cNvPr id="26" name="Google Shape;26;p5"/>
           <p:cNvSpPr txBox="1"/>
           <p:nvPr>
             <p:ph idx="2" type="body"/>
@@ -3178,8 +4197,8 @@
         </p:nvSpPr>
         <p:spPr>
           <a:xfrm>
-            <a:off x="4832400" y="1152475"/>
-            <a:ext cx="3999900" cy="3416400"/>
+            <a:off x="4832400" y="1234050"/>
+            <a:ext cx="3999900" cy="3334800"/>
           </a:xfrm>
           <a:prstGeom prst="rect">
             <a:avLst/>
@@ -3295,7 +4314,7 @@
       </p:sp>
       <p:sp>
         <p:nvSpPr>
-          <p:cNvPr id="24" name="Google Shape;24;p5"/>
+          <p:cNvPr id="27" name="Google Shape;27;p5"/>
           <p:cNvSpPr txBox="1"/>
           <p:nvPr>
             <p:ph idx="12" type="sldNum"/>
@@ -3303,7 +4322,7 @@
         </p:nvSpPr>
         <p:spPr>
           <a:xfrm>
-            <a:off x="8472458" y="4663217"/>
+            <a:off x="8497999" y="4688759"/>
             <a:ext cx="548700" cy="393600"/>
           </a:xfrm>
           <a:prstGeom prst="rect">
@@ -3383,7 +4402,7 @@
   <p:cSld name="TITLE_ONLY">
     <p:spTree>
       <p:nvGrpSpPr>
-        <p:cNvPr id="25" name="Shape 25"/>
+        <p:cNvPr id="28" name="Shape 28"/>
         <p:cNvGrpSpPr/>
         <p:nvPr/>
       </p:nvGrpSpPr>
@@ -3397,7 +4416,7 @@
       </p:grpSpPr>
       <p:sp>
         <p:nvSpPr>
-          <p:cNvPr id="26" name="Google Shape;26;p6"/>
+          <p:cNvPr id="29" name="Google Shape;29;p6"/>
           <p:cNvSpPr txBox="1"/>
           <p:nvPr>
             <p:ph type="title"/>
@@ -3424,7 +4443,7 @@
               <a:spcAft>
                 <a:spcPts val="0"/>
               </a:spcAft>
-              <a:buSzPts val="2800"/>
+              <a:buSzPts val="3000"/>
               <a:buNone/>
               <a:defRPr/>
             </a:lvl1pPr>
@@ -3435,7 +4454,7 @@
               <a:spcAft>
                 <a:spcPts val="0"/>
               </a:spcAft>
-              <a:buSzPts val="2800"/>
+              <a:buSzPts val="3000"/>
               <a:buNone/>
               <a:defRPr/>
             </a:lvl2pPr>
@@ -3446,7 +4465,7 @@
               <a:spcAft>
                 <a:spcPts val="0"/>
               </a:spcAft>
-              <a:buSzPts val="2800"/>
+              <a:buSzPts val="3000"/>
               <a:buNone/>
               <a:defRPr/>
             </a:lvl3pPr>
@@ -3457,7 +4476,7 @@
               <a:spcAft>
                 <a:spcPts val="0"/>
               </a:spcAft>
-              <a:buSzPts val="2800"/>
+              <a:buSzPts val="3000"/>
               <a:buNone/>
               <a:defRPr/>
             </a:lvl4pPr>
@@ -3468,7 +4487,7 @@
               <a:spcAft>
                 <a:spcPts val="0"/>
               </a:spcAft>
-              <a:buSzPts val="2800"/>
+              <a:buSzPts val="3000"/>
               <a:buNone/>
               <a:defRPr/>
             </a:lvl5pPr>
@@ -3479,7 +4498,7 @@
               <a:spcAft>
                 <a:spcPts val="0"/>
               </a:spcAft>
-              <a:buSzPts val="2800"/>
+              <a:buSzPts val="3000"/>
               <a:buNone/>
               <a:defRPr/>
             </a:lvl6pPr>
@@ -3490,7 +4509,7 @@
               <a:spcAft>
                 <a:spcPts val="0"/>
               </a:spcAft>
-              <a:buSzPts val="2800"/>
+              <a:buSzPts val="3000"/>
               <a:buNone/>
               <a:defRPr/>
             </a:lvl7pPr>
@@ -3501,7 +4520,7 @@
               <a:spcAft>
                 <a:spcPts val="0"/>
               </a:spcAft>
-              <a:buSzPts val="2800"/>
+              <a:buSzPts val="3000"/>
               <a:buNone/>
               <a:defRPr/>
             </a:lvl8pPr>
@@ -3512,7 +4531,7 @@
               <a:spcAft>
                 <a:spcPts val="0"/>
               </a:spcAft>
-              <a:buSzPts val="2800"/>
+              <a:buSzPts val="3000"/>
               <a:buNone/>
               <a:defRPr/>
             </a:lvl9pPr>
@@ -3522,7 +4541,7 @@
       </p:sp>
       <p:sp>
         <p:nvSpPr>
-          <p:cNvPr id="27" name="Google Shape;27;p6"/>
+          <p:cNvPr id="30" name="Google Shape;30;p6"/>
           <p:cNvSpPr txBox="1"/>
           <p:nvPr>
             <p:ph idx="12" type="sldNum"/>
@@ -3530,7 +4549,7 @@
         </p:nvSpPr>
         <p:spPr>
           <a:xfrm>
-            <a:off x="8472458" y="4663217"/>
+            <a:off x="8497999" y="4688759"/>
             <a:ext cx="548700" cy="393600"/>
           </a:xfrm>
           <a:prstGeom prst="rect">
@@ -3610,7 +4629,7 @@
   <p:cSld name="ONE_COLUMN_TEXT">
     <p:spTree>
       <p:nvGrpSpPr>
-        <p:cNvPr id="28" name="Shape 28"/>
+        <p:cNvPr id="31" name="Shape 31"/>
         <p:cNvGrpSpPr/>
         <p:nvPr/>
       </p:nvGrpSpPr>
@@ -3624,7 +4643,7 @@
       </p:grpSpPr>
       <p:sp>
         <p:nvSpPr>
-          <p:cNvPr id="29" name="Google Shape;29;p7"/>
+          <p:cNvPr id="32" name="Google Shape;32;p7"/>
           <p:cNvSpPr txBox="1"/>
           <p:nvPr>
             <p:ph type="title"/>
@@ -3749,7 +4768,7 @@
       </p:sp>
       <p:sp>
         <p:nvSpPr>
-          <p:cNvPr id="30" name="Google Shape;30;p7"/>
+          <p:cNvPr id="33" name="Google Shape;33;p7"/>
           <p:cNvSpPr txBox="1"/>
           <p:nvPr>
             <p:ph idx="1" type="body"/>
@@ -3874,7 +4893,7 @@
       </p:sp>
       <p:sp>
         <p:nvSpPr>
-          <p:cNvPr id="31" name="Google Shape;31;p7"/>
+          <p:cNvPr id="34" name="Google Shape;34;p7"/>
           <p:cNvSpPr txBox="1"/>
           <p:nvPr>
             <p:ph idx="12" type="sldNum"/>
@@ -3882,7 +4901,7 @@
         </p:nvSpPr>
         <p:spPr>
           <a:xfrm>
-            <a:off x="8472458" y="4663217"/>
+            <a:off x="8497999" y="4688759"/>
             <a:ext cx="548700" cy="393600"/>
           </a:xfrm>
           <a:prstGeom prst="rect">
@@ -3960,9 +4979,16 @@
 <file path=ppt/slideLayouts/slideLayout7.xml><?xml version="1.0" encoding="utf-8"?>
 <p:sldLayout xmlns:a="http://schemas.openxmlformats.org/drawingml/2006/main" xmlns:r="http://schemas.openxmlformats.org/officeDocument/2006/relationships" xmlns:mc="http://schemas.openxmlformats.org/markup-compatibility/2006" xmlns:mv="urn:schemas-microsoft-com:mac:vml" xmlns:p="http://schemas.openxmlformats.org/presentationml/2006/main" xmlns:c="http://schemas.openxmlformats.org/drawingml/2006/chart" xmlns:dgm="http://schemas.openxmlformats.org/drawingml/2006/diagram" xmlns:o="urn:schemas-microsoft-com:office:office" xmlns:v="urn:schemas-microsoft-com:vml" xmlns:pvml="urn:schemas-microsoft-com:office:powerpoint" xmlns:com="http://schemas.openxmlformats.org/drawingml/2006/compatibility" xmlns:p14="http://schemas.microsoft.com/office/powerpoint/2010/main" xmlns:p15="http://schemas.microsoft.com/office/powerpoint/2012/main" xmlns:ahyp="http://schemas.microsoft.com/office/drawing/2018/hyperlinkcolor" matchingName="Main point">
   <p:cSld name="MAIN_POINT">
+    <p:bg>
+      <p:bgPr>
+        <a:solidFill>
+          <a:schemeClr val="accent3"/>
+        </a:solidFill>
+      </p:bgPr>
+    </p:bg>
     <p:spTree>
       <p:nvGrpSpPr>
-        <p:cNvPr id="32" name="Shape 32"/>
+        <p:cNvPr id="35" name="Shape 35"/>
         <p:cNvGrpSpPr/>
         <p:nvPr/>
       </p:nvGrpSpPr>
@@ -3976,7 +5002,7 @@
       </p:grpSpPr>
       <p:sp>
         <p:nvSpPr>
-          <p:cNvPr id="33" name="Google Shape;33;p8"/>
+          <p:cNvPr id="36" name="Google Shape;36;p8"/>
           <p:cNvSpPr txBox="1"/>
           <p:nvPr>
             <p:ph type="title"/>
@@ -3984,8 +5010,8 @@
         </p:nvSpPr>
         <p:spPr>
           <a:xfrm>
-            <a:off x="490250" y="450150"/>
-            <a:ext cx="6367800" cy="4090800"/>
+            <a:off x="490250" y="526350"/>
+            <a:ext cx="5618700" cy="4090800"/>
           </a:xfrm>
           <a:prstGeom prst="rect">
             <a:avLst/>
@@ -4003,9 +5029,21 @@
               <a:spcAft>
                 <a:spcPts val="0"/>
               </a:spcAft>
-              <a:buSzPts val="4800"/>
-              <a:buNone/>
-              <a:defRPr sz="4800"/>
+              <a:buClr>
+                <a:schemeClr val="lt1"/>
+              </a:buClr>
+              <a:buSzPts val="5400"/>
+              <a:buFont typeface="Playfair Display"/>
+              <a:buNone/>
+              <a:defRPr sz="5400">
+                <a:solidFill>
+                  <a:schemeClr val="lt1"/>
+                </a:solidFill>
+                <a:latin typeface="Playfair Display"/>
+                <a:ea typeface="Playfair Display"/>
+                <a:cs typeface="Playfair Display"/>
+                <a:sym typeface="Playfair Display"/>
+              </a:defRPr>
             </a:lvl1pPr>
             <a:lvl2pPr lvl="1">
               <a:spcBef>
@@ -4014,9 +5052,21 @@
               <a:spcAft>
                 <a:spcPts val="0"/>
               </a:spcAft>
-              <a:buSzPts val="4800"/>
-              <a:buNone/>
-              <a:defRPr sz="4800"/>
+              <a:buClr>
+                <a:schemeClr val="lt1"/>
+              </a:buClr>
+              <a:buSzPts val="5400"/>
+              <a:buFont typeface="Playfair Display"/>
+              <a:buNone/>
+              <a:defRPr sz="5400">
+                <a:solidFill>
+                  <a:schemeClr val="lt1"/>
+                </a:solidFill>
+                <a:latin typeface="Playfair Display"/>
+                <a:ea typeface="Playfair Display"/>
+                <a:cs typeface="Playfair Display"/>
+                <a:sym typeface="Playfair Display"/>
+              </a:defRPr>
             </a:lvl2pPr>
             <a:lvl3pPr lvl="2">
               <a:spcBef>
@@ -4025,9 +5075,21 @@
               <a:spcAft>
                 <a:spcPts val="0"/>
               </a:spcAft>
-              <a:buSzPts val="4800"/>
-              <a:buNone/>
-              <a:defRPr sz="4800"/>
+              <a:buClr>
+                <a:schemeClr val="lt1"/>
+              </a:buClr>
+              <a:buSzPts val="5400"/>
+              <a:buFont typeface="Playfair Display"/>
+              <a:buNone/>
+              <a:defRPr sz="5400">
+                <a:solidFill>
+                  <a:schemeClr val="lt1"/>
+                </a:solidFill>
+                <a:latin typeface="Playfair Display"/>
+                <a:ea typeface="Playfair Display"/>
+                <a:cs typeface="Playfair Display"/>
+                <a:sym typeface="Playfair Display"/>
+              </a:defRPr>
             </a:lvl3pPr>
             <a:lvl4pPr lvl="3">
               <a:spcBef>
@@ -4036,9 +5098,21 @@
               <a:spcAft>
                 <a:spcPts val="0"/>
               </a:spcAft>
-              <a:buSzPts val="4800"/>
-              <a:buNone/>
-              <a:defRPr sz="4800"/>
+              <a:buClr>
+                <a:schemeClr val="lt1"/>
+              </a:buClr>
+              <a:buSzPts val="5400"/>
+              <a:buFont typeface="Playfair Display"/>
+              <a:buNone/>
+              <a:defRPr sz="5400">
+                <a:solidFill>
+                  <a:schemeClr val="lt1"/>
+                </a:solidFill>
+                <a:latin typeface="Playfair Display"/>
+                <a:ea typeface="Playfair Display"/>
+                <a:cs typeface="Playfair Display"/>
+                <a:sym typeface="Playfair Display"/>
+              </a:defRPr>
             </a:lvl4pPr>
             <a:lvl5pPr lvl="4">
               <a:spcBef>
@@ -4047,9 +5121,21 @@
               <a:spcAft>
                 <a:spcPts val="0"/>
               </a:spcAft>
-              <a:buSzPts val="4800"/>
-              <a:buNone/>
-              <a:defRPr sz="4800"/>
+              <a:buClr>
+                <a:schemeClr val="lt1"/>
+              </a:buClr>
+              <a:buSzPts val="5400"/>
+              <a:buFont typeface="Playfair Display"/>
+              <a:buNone/>
+              <a:defRPr sz="5400">
+                <a:solidFill>
+                  <a:schemeClr val="lt1"/>
+                </a:solidFill>
+                <a:latin typeface="Playfair Display"/>
+                <a:ea typeface="Playfair Display"/>
+                <a:cs typeface="Playfair Display"/>
+                <a:sym typeface="Playfair Display"/>
+              </a:defRPr>
             </a:lvl5pPr>
             <a:lvl6pPr lvl="5">
               <a:spcBef>
@@ -4058,9 +5144,21 @@
               <a:spcAft>
                 <a:spcPts val="0"/>
               </a:spcAft>
-              <a:buSzPts val="4800"/>
-              <a:buNone/>
-              <a:defRPr sz="4800"/>
+              <a:buClr>
+                <a:schemeClr val="lt1"/>
+              </a:buClr>
+              <a:buSzPts val="5400"/>
+              <a:buFont typeface="Playfair Display"/>
+              <a:buNone/>
+              <a:defRPr sz="5400">
+                <a:solidFill>
+                  <a:schemeClr val="lt1"/>
+                </a:solidFill>
+                <a:latin typeface="Playfair Display"/>
+                <a:ea typeface="Playfair Display"/>
+                <a:cs typeface="Playfair Display"/>
+                <a:sym typeface="Playfair Display"/>
+              </a:defRPr>
             </a:lvl6pPr>
             <a:lvl7pPr lvl="6">
               <a:spcBef>
@@ -4069,9 +5167,21 @@
               <a:spcAft>
                 <a:spcPts val="0"/>
               </a:spcAft>
-              <a:buSzPts val="4800"/>
-              <a:buNone/>
-              <a:defRPr sz="4800"/>
+              <a:buClr>
+                <a:schemeClr val="lt1"/>
+              </a:buClr>
+              <a:buSzPts val="5400"/>
+              <a:buFont typeface="Playfair Display"/>
+              <a:buNone/>
+              <a:defRPr sz="5400">
+                <a:solidFill>
+                  <a:schemeClr val="lt1"/>
+                </a:solidFill>
+                <a:latin typeface="Playfair Display"/>
+                <a:ea typeface="Playfair Display"/>
+                <a:cs typeface="Playfair Display"/>
+                <a:sym typeface="Playfair Display"/>
+              </a:defRPr>
             </a:lvl7pPr>
             <a:lvl8pPr lvl="7">
               <a:spcBef>
@@ -4080,9 +5190,21 @@
               <a:spcAft>
                 <a:spcPts val="0"/>
               </a:spcAft>
-              <a:buSzPts val="4800"/>
-              <a:buNone/>
-              <a:defRPr sz="4800"/>
+              <a:buClr>
+                <a:schemeClr val="lt1"/>
+              </a:buClr>
+              <a:buSzPts val="5400"/>
+              <a:buFont typeface="Playfair Display"/>
+              <a:buNone/>
+              <a:defRPr sz="5400">
+                <a:solidFill>
+                  <a:schemeClr val="lt1"/>
+                </a:solidFill>
+                <a:latin typeface="Playfair Display"/>
+                <a:ea typeface="Playfair Display"/>
+                <a:cs typeface="Playfair Display"/>
+                <a:sym typeface="Playfair Display"/>
+              </a:defRPr>
             </a:lvl8pPr>
             <a:lvl9pPr lvl="8">
               <a:spcBef>
@@ -4091,9 +5213,21 @@
               <a:spcAft>
                 <a:spcPts val="0"/>
               </a:spcAft>
-              <a:buSzPts val="4800"/>
-              <a:buNone/>
-              <a:defRPr sz="4800"/>
+              <a:buClr>
+                <a:schemeClr val="lt1"/>
+              </a:buClr>
+              <a:buSzPts val="5400"/>
+              <a:buFont typeface="Playfair Display"/>
+              <a:buNone/>
+              <a:defRPr sz="5400">
+                <a:solidFill>
+                  <a:schemeClr val="lt1"/>
+                </a:solidFill>
+                <a:latin typeface="Playfair Display"/>
+                <a:ea typeface="Playfair Display"/>
+                <a:cs typeface="Playfair Display"/>
+                <a:sym typeface="Playfair Display"/>
+              </a:defRPr>
             </a:lvl9pPr>
           </a:lstStyle>
           <a:p/>
@@ -4101,7 +5235,7 @@
       </p:sp>
       <p:sp>
         <p:nvSpPr>
-          <p:cNvPr id="34" name="Google Shape;34;p8"/>
+          <p:cNvPr id="37" name="Google Shape;37;p8"/>
           <p:cNvSpPr txBox="1"/>
           <p:nvPr>
             <p:ph idx="12" type="sldNum"/>
@@ -4109,7 +5243,7 @@
         </p:nvSpPr>
         <p:spPr>
           <a:xfrm>
-            <a:off x="8472458" y="4663217"/>
+            <a:off x="8497999" y="4688759"/>
             <a:ext cx="548700" cy="393600"/>
           </a:xfrm>
           <a:prstGeom prst="rect">
@@ -4123,39 +5257,75 @@
           <a:lstStyle>
             <a:lvl1pPr lvl="0">
               <a:buNone/>
-              <a:defRPr/>
+              <a:defRPr>
+                <a:solidFill>
+                  <a:schemeClr val="lt1"/>
+                </a:solidFill>
+              </a:defRPr>
             </a:lvl1pPr>
             <a:lvl2pPr lvl="1">
               <a:buNone/>
-              <a:defRPr/>
+              <a:defRPr>
+                <a:solidFill>
+                  <a:schemeClr val="lt1"/>
+                </a:solidFill>
+              </a:defRPr>
             </a:lvl2pPr>
             <a:lvl3pPr lvl="2">
               <a:buNone/>
-              <a:defRPr/>
+              <a:defRPr>
+                <a:solidFill>
+                  <a:schemeClr val="lt1"/>
+                </a:solidFill>
+              </a:defRPr>
             </a:lvl3pPr>
             <a:lvl4pPr lvl="3">
               <a:buNone/>
-              <a:defRPr/>
+              <a:defRPr>
+                <a:solidFill>
+                  <a:schemeClr val="lt1"/>
+                </a:solidFill>
+              </a:defRPr>
             </a:lvl4pPr>
             <a:lvl5pPr lvl="4">
               <a:buNone/>
-              <a:defRPr/>
+              <a:defRPr>
+                <a:solidFill>
+                  <a:schemeClr val="lt1"/>
+                </a:solidFill>
+              </a:defRPr>
             </a:lvl5pPr>
             <a:lvl6pPr lvl="5">
               <a:buNone/>
-              <a:defRPr/>
+              <a:defRPr>
+                <a:solidFill>
+                  <a:schemeClr val="lt1"/>
+                </a:solidFill>
+              </a:defRPr>
             </a:lvl6pPr>
             <a:lvl7pPr lvl="6">
               <a:buNone/>
-              <a:defRPr/>
+              <a:defRPr>
+                <a:solidFill>
+                  <a:schemeClr val="lt1"/>
+                </a:solidFill>
+              </a:defRPr>
             </a:lvl7pPr>
             <a:lvl8pPr lvl="7">
               <a:buNone/>
-              <a:defRPr/>
+              <a:defRPr>
+                <a:solidFill>
+                  <a:schemeClr val="lt1"/>
+                </a:solidFill>
+              </a:defRPr>
             </a:lvl8pPr>
             <a:lvl9pPr lvl="8">
               <a:buNone/>
-              <a:defRPr/>
+              <a:defRPr>
+                <a:solidFill>
+                  <a:schemeClr val="lt1"/>
+                </a:solidFill>
+              </a:defRPr>
             </a:lvl9pPr>
           </a:lstStyle>
           <a:p>
@@ -4189,7 +5359,7 @@
   <p:cSld name="SECTION_TITLE_AND_DESCRIPTION">
     <p:spTree>
       <p:nvGrpSpPr>
-        <p:cNvPr id="35" name="Shape 35"/>
+        <p:cNvPr id="38" name="Shape 38"/>
         <p:cNvGrpSpPr/>
         <p:nvPr/>
       </p:nvGrpSpPr>
@@ -4203,20 +5373,20 @@
       </p:grpSpPr>
       <p:sp>
         <p:nvSpPr>
-          <p:cNvPr id="36" name="Google Shape;36;p9"/>
+          <p:cNvPr id="39" name="Google Shape;39;p9"/>
           <p:cNvSpPr/>
           <p:nvPr/>
         </p:nvSpPr>
         <p:spPr>
           <a:xfrm>
-            <a:off x="4572000" y="-125"/>
+            <a:off x="4572000" y="-75"/>
             <a:ext cx="4572000" cy="5143500"/>
           </a:xfrm>
           <a:prstGeom prst="rect">
             <a:avLst/>
           </a:prstGeom>
           <a:solidFill>
-            <a:schemeClr val="lt2"/>
+            <a:schemeClr val="dk1"/>
           </a:solidFill>
           <a:ln>
             <a:noFill/>
@@ -4244,9 +5414,35 @@
           </a:p>
         </p:txBody>
       </p:sp>
+      <p:cxnSp>
+        <p:nvCxnSpPr>
+          <p:cNvPr id="40" name="Google Shape;40;p9"/>
+          <p:cNvCxnSpPr/>
+          <p:nvPr/>
+        </p:nvCxnSpPr>
+        <p:spPr>
+          <a:xfrm>
+            <a:off x="5029675" y="4495500"/>
+            <a:ext cx="468300" cy="0"/>
+          </a:xfrm>
+          <a:prstGeom prst="straightConnector1">
+            <a:avLst/>
+          </a:prstGeom>
+          <a:noFill/>
+          <a:ln cap="flat" cmpd="sng" w="19050">
+            <a:solidFill>
+              <a:schemeClr val="dk2"/>
+            </a:solidFill>
+            <a:prstDash val="solid"/>
+            <a:round/>
+            <a:headEnd len="sm" w="sm" type="none"/>
+            <a:tailEnd len="sm" w="sm" type="none"/>
+          </a:ln>
+        </p:spPr>
+      </p:cxnSp>
       <p:sp>
         <p:nvSpPr>
-          <p:cNvPr id="37" name="Google Shape;37;p9"/>
+          <p:cNvPr id="41" name="Google Shape;41;p9"/>
           <p:cNvSpPr txBox="1"/>
           <p:nvPr>
             <p:ph type="title"/>
@@ -4254,8 +5450,8 @@
         </p:nvSpPr>
         <p:spPr>
           <a:xfrm>
-            <a:off x="265500" y="1233175"/>
-            <a:ext cx="4045200" cy="1482300"/>
+            <a:off x="265500" y="1081675"/>
+            <a:ext cx="4045200" cy="1786200"/>
           </a:xfrm>
           <a:prstGeom prst="rect">
             <a:avLst/>
@@ -4371,7 +5567,7 @@
       </p:sp>
       <p:sp>
         <p:nvSpPr>
-          <p:cNvPr id="38" name="Google Shape;38;p9"/>
+          <p:cNvPr id="42" name="Google Shape;42;p9"/>
           <p:cNvSpPr txBox="1"/>
           <p:nvPr>
             <p:ph idx="1" type="subTitle"/>
@@ -4379,8 +5575,8 @@
         </p:nvSpPr>
         <p:spPr>
           <a:xfrm>
-            <a:off x="265500" y="2803075"/>
-            <a:ext cx="4045200" cy="1235100"/>
+            <a:off x="265500" y="2921401"/>
+            <a:ext cx="4045200" cy="1345500"/>
           </a:xfrm>
           <a:prstGeom prst="rect">
             <a:avLst/>
@@ -4523,7 +5719,7 @@
       </p:sp>
       <p:sp>
         <p:nvSpPr>
-          <p:cNvPr id="39" name="Google Shape;39;p9"/>
+          <p:cNvPr id="43" name="Google Shape;43;p9"/>
           <p:cNvSpPr txBox="1"/>
           <p:nvPr>
             <p:ph idx="2" type="body"/>
@@ -4531,7 +5727,7 @@
         </p:nvSpPr>
         <p:spPr>
           <a:xfrm>
-            <a:off x="4939500" y="724075"/>
+            <a:off x="4939500" y="724200"/>
             <a:ext cx="3837000" cy="3695100"/>
           </a:xfrm>
           <a:prstGeom prst="rect">
@@ -4552,7 +5748,11 @@
               </a:spcAft>
               <a:buSzPts val="1800"/>
               <a:buChar char="●"/>
-              <a:defRPr/>
+              <a:defRPr>
+                <a:highlight>
+                  <a:schemeClr val="lt1"/>
+                </a:highlight>
+              </a:defRPr>
             </a:lvl1pPr>
             <a:lvl2pPr indent="-317500" lvl="1" marL="914400">
               <a:spcBef>
@@ -4563,7 +5763,11 @@
               </a:spcAft>
               <a:buSzPts val="1400"/>
               <a:buChar char="○"/>
-              <a:defRPr/>
+              <a:defRPr>
+                <a:highlight>
+                  <a:schemeClr val="lt1"/>
+                </a:highlight>
+              </a:defRPr>
             </a:lvl2pPr>
             <a:lvl3pPr indent="-317500" lvl="2" marL="1371600">
               <a:spcBef>
@@ -4574,7 +5778,11 @@
               </a:spcAft>
               <a:buSzPts val="1400"/>
               <a:buChar char="■"/>
-              <a:defRPr/>
+              <a:defRPr>
+                <a:highlight>
+                  <a:schemeClr val="lt1"/>
+                </a:highlight>
+              </a:defRPr>
             </a:lvl3pPr>
             <a:lvl4pPr indent="-317500" lvl="3" marL="1828800">
               <a:spcBef>
@@ -4585,7 +5793,11 @@
               </a:spcAft>
               <a:buSzPts val="1400"/>
               <a:buChar char="●"/>
-              <a:defRPr/>
+              <a:defRPr>
+                <a:highlight>
+                  <a:schemeClr val="lt1"/>
+                </a:highlight>
+              </a:defRPr>
             </a:lvl4pPr>
             <a:lvl5pPr indent="-317500" lvl="4" marL="2286000">
               <a:spcBef>
@@ -4596,7 +5808,11 @@
               </a:spcAft>
               <a:buSzPts val="1400"/>
               <a:buChar char="○"/>
-              <a:defRPr/>
+              <a:defRPr>
+                <a:highlight>
+                  <a:schemeClr val="lt1"/>
+                </a:highlight>
+              </a:defRPr>
             </a:lvl5pPr>
             <a:lvl6pPr indent="-317500" lvl="5" marL="2743200">
               <a:spcBef>
@@ -4607,7 +5823,11 @@
               </a:spcAft>
               <a:buSzPts val="1400"/>
               <a:buChar char="■"/>
-              <a:defRPr/>
+              <a:defRPr>
+                <a:highlight>
+                  <a:schemeClr val="lt1"/>
+                </a:highlight>
+              </a:defRPr>
             </a:lvl6pPr>
             <a:lvl7pPr indent="-317500" lvl="6" marL="3200400">
               <a:spcBef>
@@ -4618,7 +5838,11 @@
               </a:spcAft>
               <a:buSzPts val="1400"/>
               <a:buChar char="●"/>
-              <a:defRPr/>
+              <a:defRPr>
+                <a:highlight>
+                  <a:schemeClr val="lt1"/>
+                </a:highlight>
+              </a:defRPr>
             </a:lvl7pPr>
             <a:lvl8pPr indent="-317500" lvl="7" marL="3657600">
               <a:spcBef>
@@ -4629,7 +5853,11 @@
               </a:spcAft>
               <a:buSzPts val="1400"/>
               <a:buChar char="○"/>
-              <a:defRPr/>
+              <a:defRPr>
+                <a:highlight>
+                  <a:schemeClr val="lt1"/>
+                </a:highlight>
+              </a:defRPr>
             </a:lvl8pPr>
             <a:lvl9pPr indent="-317500" lvl="8" marL="4114800">
               <a:spcBef>
@@ -4640,7 +5868,11 @@
               </a:spcAft>
               <a:buSzPts val="1400"/>
               <a:buChar char="■"/>
-              <a:defRPr/>
+              <a:defRPr>
+                <a:highlight>
+                  <a:schemeClr val="lt1"/>
+                </a:highlight>
+              </a:defRPr>
             </a:lvl9pPr>
           </a:lstStyle>
           <a:p/>
@@ -4648,7 +5880,7 @@
       </p:sp>
       <p:sp>
         <p:nvSpPr>
-          <p:cNvPr id="40" name="Google Shape;40;p9"/>
+          <p:cNvPr id="44" name="Google Shape;44;p9"/>
           <p:cNvSpPr txBox="1"/>
           <p:nvPr>
             <p:ph idx="12" type="sldNum"/>
@@ -4656,7 +5888,7 @@
         </p:nvSpPr>
         <p:spPr>
           <a:xfrm>
-            <a:off x="8472458" y="4663217"/>
+            <a:off x="8497999" y="4688759"/>
             <a:ext cx="548700" cy="393600"/>
           </a:xfrm>
           <a:prstGeom prst="rect">
@@ -4736,7 +5968,7 @@
   <p:cSld name="CAPTION_ONLY">
     <p:spTree>
       <p:nvGrpSpPr>
-        <p:cNvPr id="41" name="Shape 41"/>
+        <p:cNvPr id="45" name="Shape 45"/>
         <p:cNvGrpSpPr/>
         <p:nvPr/>
       </p:nvGrpSpPr>
@@ -4750,7 +5982,7 @@
       </p:grpSpPr>
       <p:sp>
         <p:nvSpPr>
-          <p:cNvPr id="42" name="Google Shape;42;p10"/>
+          <p:cNvPr id="46" name="Google Shape;46;p10"/>
           <p:cNvSpPr txBox="1"/>
           <p:nvPr>
             <p:ph idx="1" type="body"/>
@@ -4782,7 +6014,11 @@
               </a:spcAft>
               <a:buSzPts val="1800"/>
               <a:buNone/>
-              <a:defRPr/>
+              <a:defRPr>
+                <a:highlight>
+                  <a:schemeClr val="dk1"/>
+                </a:highlight>
+              </a:defRPr>
             </a:lvl1pPr>
           </a:lstStyle>
           <a:p/>
@@ -4790,7 +6026,7 @@
       </p:sp>
       <p:sp>
         <p:nvSpPr>
-          <p:cNvPr id="43" name="Google Shape;43;p10"/>
+          <p:cNvPr id="47" name="Google Shape;47;p10"/>
           <p:cNvSpPr txBox="1"/>
           <p:nvPr>
             <p:ph idx="12" type="sldNum"/>
@@ -4798,7 +6034,7 @@
         </p:nvSpPr>
         <p:spPr>
           <a:xfrm>
-            <a:off x="8472458" y="4663217"/>
+            <a:off x="8497999" y="4688759"/>
             <a:ext cx="548700" cy="393600"/>
           </a:xfrm>
           <a:prstGeom prst="rect">
@@ -4875,7 +6111,7 @@
 
 <file path=ppt/slideMasters/slideMaster1.xml><?xml version="1.0" encoding="utf-8"?>
 <p:sldMaster xmlns:a="http://schemas.openxmlformats.org/drawingml/2006/main" xmlns:r="http://schemas.openxmlformats.org/officeDocument/2006/relationships" xmlns:mc="http://schemas.openxmlformats.org/markup-compatibility/2006" xmlns:mv="urn:schemas-microsoft-com:mac:vml" xmlns:p="http://schemas.openxmlformats.org/presentationml/2006/main" xmlns:c="http://schemas.openxmlformats.org/drawingml/2006/chart" xmlns:dgm="http://schemas.openxmlformats.org/drawingml/2006/diagram" xmlns:o="urn:schemas-microsoft-com:office:office" xmlns:v="urn:schemas-microsoft-com:vml" xmlns:pvml="urn:schemas-microsoft-com:office:powerpoint" xmlns:com="http://schemas.openxmlformats.org/drawingml/2006/compatibility" xmlns:p14="http://schemas.microsoft.com/office/powerpoint/2010/main" xmlns:p15="http://schemas.microsoft.com/office/powerpoint/2012/main" xmlns:ahyp="http://schemas.microsoft.com/office/drawing/2018/hyperlinkcolor">
-  <p:cSld name="simple-light-2">
+  <p:cSld name="pop">
     <p:bg>
       <p:bgPr>
         <a:solidFill>
@@ -4931,14 +6167,22 @@
                 <a:spcPts val="0"/>
               </a:spcAft>
               <a:buClr>
-                <a:schemeClr val="dk1"/>
+                <a:schemeClr val="dk2"/>
               </a:buClr>
-              <a:buSzPts val="2800"/>
-              <a:buNone/>
-              <a:defRPr sz="2800">
+              <a:buSzPts val="3000"/>
+              <a:buFont typeface="Oswald"/>
+              <a:buNone/>
+              <a:defRPr sz="3000">
                 <a:solidFill>
+                  <a:schemeClr val="dk2"/>
+                </a:solidFill>
+                <a:highlight>
                   <a:schemeClr val="dk1"/>
-                </a:solidFill>
+                </a:highlight>
+                <a:latin typeface="Oswald"/>
+                <a:ea typeface="Oswald"/>
+                <a:cs typeface="Oswald"/>
+                <a:sym typeface="Oswald"/>
               </a:defRPr>
             </a:lvl1pPr>
             <a:lvl2pPr lvl="1">
@@ -4949,14 +6193,22 @@
                 <a:spcPts val="0"/>
               </a:spcAft>
               <a:buClr>
-                <a:schemeClr val="dk1"/>
+                <a:schemeClr val="dk2"/>
               </a:buClr>
-              <a:buSzPts val="2800"/>
-              <a:buNone/>
-              <a:defRPr sz="2800">
+              <a:buSzPts val="3000"/>
+              <a:buFont typeface="Oswald"/>
+              <a:buNone/>
+              <a:defRPr sz="3000">
                 <a:solidFill>
+                  <a:schemeClr val="dk2"/>
+                </a:solidFill>
+                <a:highlight>
                   <a:schemeClr val="dk1"/>
-                </a:solidFill>
+                </a:highlight>
+                <a:latin typeface="Oswald"/>
+                <a:ea typeface="Oswald"/>
+                <a:cs typeface="Oswald"/>
+                <a:sym typeface="Oswald"/>
               </a:defRPr>
             </a:lvl2pPr>
             <a:lvl3pPr lvl="2">
@@ -4967,14 +6219,22 @@
                 <a:spcPts val="0"/>
               </a:spcAft>
               <a:buClr>
-                <a:schemeClr val="dk1"/>
+                <a:schemeClr val="dk2"/>
               </a:buClr>
-              <a:buSzPts val="2800"/>
-              <a:buNone/>
-              <a:defRPr sz="2800">
+              <a:buSzPts val="3000"/>
+              <a:buFont typeface="Oswald"/>
+              <a:buNone/>
+              <a:defRPr sz="3000">
                 <a:solidFill>
+                  <a:schemeClr val="dk2"/>
+                </a:solidFill>
+                <a:highlight>
                   <a:schemeClr val="dk1"/>
-                </a:solidFill>
+                </a:highlight>
+                <a:latin typeface="Oswald"/>
+                <a:ea typeface="Oswald"/>
+                <a:cs typeface="Oswald"/>
+                <a:sym typeface="Oswald"/>
               </a:defRPr>
             </a:lvl3pPr>
             <a:lvl4pPr lvl="3">
@@ -4985,14 +6245,22 @@
                 <a:spcPts val="0"/>
               </a:spcAft>
               <a:buClr>
-                <a:schemeClr val="dk1"/>
+                <a:schemeClr val="dk2"/>
               </a:buClr>
-              <a:buSzPts val="2800"/>
-              <a:buNone/>
-              <a:defRPr sz="2800">
+              <a:buSzPts val="3000"/>
+              <a:buFont typeface="Oswald"/>
+              <a:buNone/>
+              <a:defRPr sz="3000">
                 <a:solidFill>
+                  <a:schemeClr val="dk2"/>
+                </a:solidFill>
+                <a:highlight>
                   <a:schemeClr val="dk1"/>
-                </a:solidFill>
+                </a:highlight>
+                <a:latin typeface="Oswald"/>
+                <a:ea typeface="Oswald"/>
+                <a:cs typeface="Oswald"/>
+                <a:sym typeface="Oswald"/>
               </a:defRPr>
             </a:lvl4pPr>
             <a:lvl5pPr lvl="4">
@@ -5003,14 +6271,22 @@
                 <a:spcPts val="0"/>
               </a:spcAft>
               <a:buClr>
-                <a:schemeClr val="dk1"/>
+                <a:schemeClr val="dk2"/>
               </a:buClr>
-              <a:buSzPts val="2800"/>
-              <a:buNone/>
-              <a:defRPr sz="2800">
+              <a:buSzPts val="3000"/>
+              <a:buFont typeface="Oswald"/>
+              <a:buNone/>
+              <a:defRPr sz="3000">
                 <a:solidFill>
+                  <a:schemeClr val="dk2"/>
+                </a:solidFill>
+                <a:highlight>
                   <a:schemeClr val="dk1"/>
-                </a:solidFill>
+                </a:highlight>
+                <a:latin typeface="Oswald"/>
+                <a:ea typeface="Oswald"/>
+                <a:cs typeface="Oswald"/>
+                <a:sym typeface="Oswald"/>
               </a:defRPr>
             </a:lvl5pPr>
             <a:lvl6pPr lvl="5">
@@ -5021,14 +6297,22 @@
                 <a:spcPts val="0"/>
               </a:spcAft>
               <a:buClr>
-                <a:schemeClr val="dk1"/>
+                <a:schemeClr val="dk2"/>
               </a:buClr>
-              <a:buSzPts val="2800"/>
-              <a:buNone/>
-              <a:defRPr sz="2800">
+              <a:buSzPts val="3000"/>
+              <a:buFont typeface="Oswald"/>
+              <a:buNone/>
+              <a:defRPr sz="3000">
                 <a:solidFill>
+                  <a:schemeClr val="dk2"/>
+                </a:solidFill>
+                <a:highlight>
                   <a:schemeClr val="dk1"/>
-                </a:solidFill>
+                </a:highlight>
+                <a:latin typeface="Oswald"/>
+                <a:ea typeface="Oswald"/>
+                <a:cs typeface="Oswald"/>
+                <a:sym typeface="Oswald"/>
               </a:defRPr>
             </a:lvl6pPr>
             <a:lvl7pPr lvl="6">
@@ -5039,14 +6323,22 @@
                 <a:spcPts val="0"/>
               </a:spcAft>
               <a:buClr>
-                <a:schemeClr val="dk1"/>
+                <a:schemeClr val="dk2"/>
               </a:buClr>
-              <a:buSzPts val="2800"/>
-              <a:buNone/>
-              <a:defRPr sz="2800">
+              <a:buSzPts val="3000"/>
+              <a:buFont typeface="Oswald"/>
+              <a:buNone/>
+              <a:defRPr sz="3000">
                 <a:solidFill>
+                  <a:schemeClr val="dk2"/>
+                </a:solidFill>
+                <a:highlight>
                   <a:schemeClr val="dk1"/>
-                </a:solidFill>
+                </a:highlight>
+                <a:latin typeface="Oswald"/>
+                <a:ea typeface="Oswald"/>
+                <a:cs typeface="Oswald"/>
+                <a:sym typeface="Oswald"/>
               </a:defRPr>
             </a:lvl7pPr>
             <a:lvl8pPr lvl="7">
@@ -5057,14 +6349,22 @@
                 <a:spcPts val="0"/>
               </a:spcAft>
               <a:buClr>
-                <a:schemeClr val="dk1"/>
+                <a:schemeClr val="dk2"/>
               </a:buClr>
-              <a:buSzPts val="2800"/>
-              <a:buNone/>
-              <a:defRPr sz="2800">
+              <a:buSzPts val="3000"/>
+              <a:buFont typeface="Oswald"/>
+              <a:buNone/>
+              <a:defRPr sz="3000">
                 <a:solidFill>
+                  <a:schemeClr val="dk2"/>
+                </a:solidFill>
+                <a:highlight>
                   <a:schemeClr val="dk1"/>
-                </a:solidFill>
+                </a:highlight>
+                <a:latin typeface="Oswald"/>
+                <a:ea typeface="Oswald"/>
+                <a:cs typeface="Oswald"/>
+                <a:sym typeface="Oswald"/>
               </a:defRPr>
             </a:lvl8pPr>
             <a:lvl9pPr lvl="8">
@@ -5075,14 +6375,22 @@
                 <a:spcPts val="0"/>
               </a:spcAft>
               <a:buClr>
-                <a:schemeClr val="dk1"/>
+                <a:schemeClr val="dk2"/>
               </a:buClr>
-              <a:buSzPts val="2800"/>
-              <a:buNone/>
-              <a:defRPr sz="2800">
+              <a:buSzPts val="3000"/>
+              <a:buFont typeface="Oswald"/>
+              <a:buNone/>
+              <a:defRPr sz="3000">
                 <a:solidFill>
+                  <a:schemeClr val="dk2"/>
+                </a:solidFill>
+                <a:highlight>
                   <a:schemeClr val="dk1"/>
-                </a:solidFill>
+                </a:highlight>
+                <a:latin typeface="Oswald"/>
+                <a:ea typeface="Oswald"/>
+                <a:cs typeface="Oswald"/>
+                <a:sym typeface="Oswald"/>
               </a:defRPr>
             </a:lvl9pPr>
           </a:lstStyle>
@@ -5099,8 +6407,8 @@
         </p:nvSpPr>
         <p:spPr>
           <a:xfrm>
-            <a:off x="311700" y="1152475"/>
-            <a:ext cx="8520600" cy="3416400"/>
+            <a:off x="311700" y="1234075"/>
+            <a:ext cx="8520600" cy="3334800"/>
           </a:xfrm>
           <a:prstGeom prst="rect">
             <a:avLst/>
@@ -5129,11 +6437,16 @@
                 <a:schemeClr val="dk2"/>
               </a:buClr>
               <a:buSzPts val="1800"/>
+              <a:buFont typeface="Playfair Display"/>
               <a:buChar char="●"/>
               <a:defRPr sz="1800">
                 <a:solidFill>
                   <a:schemeClr val="dk2"/>
                 </a:solidFill>
+                <a:latin typeface="Playfair Display"/>
+                <a:ea typeface="Playfair Display"/>
+                <a:cs typeface="Playfair Display"/>
+                <a:sym typeface="Playfair Display"/>
               </a:defRPr>
             </a:lvl1pPr>
             <a:lvl2pPr indent="-317500" lvl="1" marL="914400">
@@ -5150,11 +6463,16 @@
                 <a:schemeClr val="dk2"/>
               </a:buClr>
               <a:buSzPts val="1400"/>
+              <a:buFont typeface="Playfair Display"/>
               <a:buChar char="○"/>
               <a:defRPr>
                 <a:solidFill>
                   <a:schemeClr val="dk2"/>
                 </a:solidFill>
+                <a:latin typeface="Playfair Display"/>
+                <a:ea typeface="Playfair Display"/>
+                <a:cs typeface="Playfair Display"/>
+                <a:sym typeface="Playfair Display"/>
               </a:defRPr>
             </a:lvl2pPr>
             <a:lvl3pPr indent="-317500" lvl="2" marL="1371600">
@@ -5171,11 +6489,16 @@
                 <a:schemeClr val="dk2"/>
               </a:buClr>
               <a:buSzPts val="1400"/>
+              <a:buFont typeface="Playfair Display"/>
               <a:buChar char="■"/>
               <a:defRPr>
                 <a:solidFill>
                   <a:schemeClr val="dk2"/>
                 </a:solidFill>
+                <a:latin typeface="Playfair Display"/>
+                <a:ea typeface="Playfair Display"/>
+                <a:cs typeface="Playfair Display"/>
+                <a:sym typeface="Playfair Display"/>
               </a:defRPr>
             </a:lvl3pPr>
             <a:lvl4pPr indent="-317500" lvl="3" marL="1828800">
@@ -5192,11 +6515,16 @@
                 <a:schemeClr val="dk2"/>
               </a:buClr>
               <a:buSzPts val="1400"/>
+              <a:buFont typeface="Playfair Display"/>
               <a:buChar char="●"/>
               <a:defRPr>
                 <a:solidFill>
                   <a:schemeClr val="dk2"/>
                 </a:solidFill>
+                <a:latin typeface="Playfair Display"/>
+                <a:ea typeface="Playfair Display"/>
+                <a:cs typeface="Playfair Display"/>
+                <a:sym typeface="Playfair Display"/>
               </a:defRPr>
             </a:lvl4pPr>
             <a:lvl5pPr indent="-317500" lvl="4" marL="2286000">
@@ -5213,11 +6541,16 @@
                 <a:schemeClr val="dk2"/>
               </a:buClr>
               <a:buSzPts val="1400"/>
+              <a:buFont typeface="Playfair Display"/>
               <a:buChar char="○"/>
               <a:defRPr>
                 <a:solidFill>
                   <a:schemeClr val="dk2"/>
                 </a:solidFill>
+                <a:latin typeface="Playfair Display"/>
+                <a:ea typeface="Playfair Display"/>
+                <a:cs typeface="Playfair Display"/>
+                <a:sym typeface="Playfair Display"/>
               </a:defRPr>
             </a:lvl5pPr>
             <a:lvl6pPr indent="-317500" lvl="5" marL="2743200">
@@ -5234,11 +6567,16 @@
                 <a:schemeClr val="dk2"/>
               </a:buClr>
               <a:buSzPts val="1400"/>
+              <a:buFont typeface="Playfair Display"/>
               <a:buChar char="■"/>
               <a:defRPr>
                 <a:solidFill>
                   <a:schemeClr val="dk2"/>
                 </a:solidFill>
+                <a:latin typeface="Playfair Display"/>
+                <a:ea typeface="Playfair Display"/>
+                <a:cs typeface="Playfair Display"/>
+                <a:sym typeface="Playfair Display"/>
               </a:defRPr>
             </a:lvl6pPr>
             <a:lvl7pPr indent="-317500" lvl="6" marL="3200400">
@@ -5255,11 +6593,16 @@
                 <a:schemeClr val="dk2"/>
               </a:buClr>
               <a:buSzPts val="1400"/>
+              <a:buFont typeface="Playfair Display"/>
               <a:buChar char="●"/>
               <a:defRPr>
                 <a:solidFill>
                   <a:schemeClr val="dk2"/>
                 </a:solidFill>
+                <a:latin typeface="Playfair Display"/>
+                <a:ea typeface="Playfair Display"/>
+                <a:cs typeface="Playfair Display"/>
+                <a:sym typeface="Playfair Display"/>
               </a:defRPr>
             </a:lvl7pPr>
             <a:lvl8pPr indent="-317500" lvl="7" marL="3657600">
@@ -5276,11 +6619,16 @@
                 <a:schemeClr val="dk2"/>
               </a:buClr>
               <a:buSzPts val="1400"/>
+              <a:buFont typeface="Playfair Display"/>
               <a:buChar char="○"/>
               <a:defRPr>
                 <a:solidFill>
                   <a:schemeClr val="dk2"/>
                 </a:solidFill>
+                <a:latin typeface="Playfair Display"/>
+                <a:ea typeface="Playfair Display"/>
+                <a:cs typeface="Playfair Display"/>
+                <a:sym typeface="Playfair Display"/>
               </a:defRPr>
             </a:lvl8pPr>
             <a:lvl9pPr indent="-317500" lvl="8" marL="4114800">
@@ -5297,11 +6645,16 @@
                 <a:schemeClr val="dk2"/>
               </a:buClr>
               <a:buSzPts val="1400"/>
+              <a:buFont typeface="Playfair Display"/>
               <a:buChar char="■"/>
               <a:defRPr>
                 <a:solidFill>
                   <a:schemeClr val="dk2"/>
                 </a:solidFill>
+                <a:latin typeface="Playfair Display"/>
+                <a:ea typeface="Playfair Display"/>
+                <a:cs typeface="Playfair Display"/>
+                <a:sym typeface="Playfair Display"/>
               </a:defRPr>
             </a:lvl9pPr>
           </a:lstStyle>
@@ -5318,7 +6671,7 @@
         </p:nvSpPr>
         <p:spPr>
           <a:xfrm>
-            <a:off x="8472458" y="4663217"/>
+            <a:off x="8497999" y="4688759"/>
             <a:ext cx="548700" cy="393600"/>
           </a:xfrm>
           <a:prstGeom prst="rect">
@@ -5340,6 +6693,10 @@
                 <a:solidFill>
                   <a:schemeClr val="dk2"/>
                 </a:solidFill>
+                <a:latin typeface="Playfair Display"/>
+                <a:ea typeface="Playfair Display"/>
+                <a:cs typeface="Playfair Display"/>
+                <a:sym typeface="Playfair Display"/>
               </a:defRPr>
             </a:lvl1pPr>
             <a:lvl2pPr lvl="1" algn="r">
@@ -5348,6 +6705,10 @@
                 <a:solidFill>
                   <a:schemeClr val="dk2"/>
                 </a:solidFill>
+                <a:latin typeface="Playfair Display"/>
+                <a:ea typeface="Playfair Display"/>
+                <a:cs typeface="Playfair Display"/>
+                <a:sym typeface="Playfair Display"/>
               </a:defRPr>
             </a:lvl2pPr>
             <a:lvl3pPr lvl="2" algn="r">
@@ -5356,6 +6717,10 @@
                 <a:solidFill>
                   <a:schemeClr val="dk2"/>
                 </a:solidFill>
+                <a:latin typeface="Playfair Display"/>
+                <a:ea typeface="Playfair Display"/>
+                <a:cs typeface="Playfair Display"/>
+                <a:sym typeface="Playfair Display"/>
               </a:defRPr>
             </a:lvl3pPr>
             <a:lvl4pPr lvl="3" algn="r">
@@ -5364,6 +6729,10 @@
                 <a:solidFill>
                   <a:schemeClr val="dk2"/>
                 </a:solidFill>
+                <a:latin typeface="Playfair Display"/>
+                <a:ea typeface="Playfair Display"/>
+                <a:cs typeface="Playfair Display"/>
+                <a:sym typeface="Playfair Display"/>
               </a:defRPr>
             </a:lvl4pPr>
             <a:lvl5pPr lvl="4" algn="r">
@@ -5372,6 +6741,10 @@
                 <a:solidFill>
                   <a:schemeClr val="dk2"/>
                 </a:solidFill>
+                <a:latin typeface="Playfair Display"/>
+                <a:ea typeface="Playfair Display"/>
+                <a:cs typeface="Playfair Display"/>
+                <a:sym typeface="Playfair Display"/>
               </a:defRPr>
             </a:lvl5pPr>
             <a:lvl6pPr lvl="5" algn="r">
@@ -5380,6 +6753,10 @@
                 <a:solidFill>
                   <a:schemeClr val="dk2"/>
                 </a:solidFill>
+                <a:latin typeface="Playfair Display"/>
+                <a:ea typeface="Playfair Display"/>
+                <a:cs typeface="Playfair Display"/>
+                <a:sym typeface="Playfair Display"/>
               </a:defRPr>
             </a:lvl6pPr>
             <a:lvl7pPr lvl="6" algn="r">
@@ -5388,6 +6765,10 @@
                 <a:solidFill>
                   <a:schemeClr val="dk2"/>
                 </a:solidFill>
+                <a:latin typeface="Playfair Display"/>
+                <a:ea typeface="Playfair Display"/>
+                <a:cs typeface="Playfair Display"/>
+                <a:sym typeface="Playfair Display"/>
               </a:defRPr>
             </a:lvl7pPr>
             <a:lvl8pPr lvl="7" algn="r">
@@ -5396,6 +6777,10 @@
                 <a:solidFill>
                   <a:schemeClr val="dk2"/>
                 </a:solidFill>
+                <a:latin typeface="Playfair Display"/>
+                <a:ea typeface="Playfair Display"/>
+                <a:cs typeface="Playfair Display"/>
+                <a:sym typeface="Playfair Display"/>
               </a:defRPr>
             </a:lvl8pPr>
             <a:lvl9pPr lvl="8" algn="r">
@@ -5404,6 +6789,10 @@
                 <a:solidFill>
                   <a:schemeClr val="dk2"/>
                 </a:solidFill>
+                <a:latin typeface="Playfair Display"/>
+                <a:ea typeface="Playfair Display"/>
+                <a:cs typeface="Playfair Display"/>
+                <a:sym typeface="Playfair Display"/>
               </a:defRPr>
             </a:lvl9pPr>
           </a:lstStyle>
@@ -6139,7 +7528,7 @@
   <p:cSld>
     <p:spTree>
       <p:nvGrpSpPr>
-        <p:cNvPr id="53" name="Shape 53"/>
+        <p:cNvPr id="57" name="Shape 57"/>
         <p:cNvGrpSpPr/>
         <p:nvPr/>
       </p:nvGrpSpPr>
@@ -6153,7 +7542,7 @@
       </p:grpSpPr>
       <p:sp>
         <p:nvSpPr>
-          <p:cNvPr id="54" name="Google Shape;54;p13"/>
+          <p:cNvPr id="58" name="Google Shape;58;p13"/>
           <p:cNvSpPr txBox="1"/>
           <p:nvPr>
             <p:ph type="ctrTitle"/>
@@ -6161,8 +7550,113 @@
         </p:nvSpPr>
         <p:spPr>
           <a:xfrm>
-            <a:off x="311708" y="744575"/>
-            <a:ext cx="8520600" cy="2052600"/>
+            <a:off x="344250" y="1403850"/>
+            <a:ext cx="8455500" cy="2146800"/>
+          </a:xfrm>
+          <a:prstGeom prst="rect">
+            <a:avLst/>
+          </a:prstGeom>
+        </p:spPr>
+        <p:txBody>
+          <a:bodyPr anchorCtr="0" anchor="ctr" bIns="91425" lIns="91425" spcFirstLastPara="1" rIns="91425" wrap="square" tIns="91425">
+            <a:normAutofit/>
+          </a:bodyPr>
+          <a:lstStyle/>
+          <a:p>
+            <a:pPr indent="0" lvl="0" marL="0" rtl="0" algn="ctr">
+              <a:spcBef>
+                <a:spcPts val="0"/>
+              </a:spcBef>
+              <a:spcAft>
+                <a:spcPts val="0"/>
+              </a:spcAft>
+              <a:buNone/>
+            </a:pPr>
+            <a:r>
+              <a:rPr lang="en" sz="3500"/>
+              <a:t>Sistema de Cadastro de Amigos da Gabi</a:t>
+            </a:r>
+            <a:endParaRPr sz="3500"/>
+          </a:p>
+        </p:txBody>
+      </p:sp>
+      <p:sp>
+        <p:nvSpPr>
+          <p:cNvPr id="59" name="Google Shape;59;p13"/>
+          <p:cNvSpPr txBox="1"/>
+          <p:nvPr>
+            <p:ph idx="1" type="subTitle"/>
+          </p:nvPr>
+        </p:nvSpPr>
+        <p:spPr>
+          <a:xfrm>
+            <a:off x="344250" y="3550650"/>
+            <a:ext cx="4910100" cy="577800"/>
+          </a:xfrm>
+          <a:prstGeom prst="rect">
+            <a:avLst/>
+          </a:prstGeom>
+        </p:spPr>
+        <p:txBody>
+          <a:bodyPr anchorCtr="0" anchor="ctr" bIns="91425" lIns="91425" spcFirstLastPara="1" rIns="91425" wrap="square" tIns="91425">
+            <a:normAutofit fontScale="62500" lnSpcReduction="20000"/>
+          </a:bodyPr>
+          <a:lstStyle/>
+          <a:p>
+            <a:pPr indent="0" lvl="0" marL="0" rtl="0" algn="l">
+              <a:spcBef>
+                <a:spcPts val="0"/>
+              </a:spcBef>
+              <a:spcAft>
+                <a:spcPts val="0"/>
+              </a:spcAft>
+              <a:buNone/>
+            </a:pPr>
+            <a:r>
+              <a:rPr lang="en"/>
+              <a:t>Uma análise passo a passo do projeto e suas funcionalidades em PHP e MySQLI.</a:t>
+            </a:r>
+            <a:endParaRPr/>
+          </a:p>
+        </p:txBody>
+      </p:sp>
+    </p:spTree>
+  </p:cSld>
+  <p:clrMapOvr>
+    <a:masterClrMapping/>
+  </p:clrMapOvr>
+</p:sld>
+</file>
+
+<file path=ppt/slides/slide10.xml><?xml version="1.0" encoding="utf-8"?>
+<p:sld xmlns:a="http://schemas.openxmlformats.org/drawingml/2006/main" xmlns:r="http://schemas.openxmlformats.org/officeDocument/2006/relationships" xmlns:mc="http://schemas.openxmlformats.org/markup-compatibility/2006" xmlns:mv="urn:schemas-microsoft-com:mac:vml" xmlns:p="http://schemas.openxmlformats.org/presentationml/2006/main" xmlns:c="http://schemas.openxmlformats.org/drawingml/2006/chart" xmlns:dgm="http://schemas.openxmlformats.org/drawingml/2006/diagram" xmlns:o="urn:schemas-microsoft-com:office:office" xmlns:v="urn:schemas-microsoft-com:vml" xmlns:pvml="urn:schemas-microsoft-com:office:powerpoint" xmlns:com="http://schemas.openxmlformats.org/drawingml/2006/compatibility" xmlns:p14="http://schemas.microsoft.com/office/powerpoint/2010/main" xmlns:p15="http://schemas.microsoft.com/office/powerpoint/2012/main" xmlns:ahyp="http://schemas.microsoft.com/office/drawing/2018/hyperlinkcolor">
+  <p:cSld>
+    <p:spTree>
+      <p:nvGrpSpPr>
+        <p:cNvPr id="136" name="Shape 136"/>
+        <p:cNvGrpSpPr/>
+        <p:nvPr/>
+      </p:nvGrpSpPr>
+      <p:grpSpPr>
+        <a:xfrm>
+          <a:off x="0" y="0"/>
+          <a:ext cx="0" cy="0"/>
+          <a:chOff x="0" y="0"/>
+          <a:chExt cx="0" cy="0"/>
+        </a:xfrm>
+      </p:grpSpPr>
+      <p:sp>
+        <p:nvSpPr>
+          <p:cNvPr id="137" name="Google Shape;137;p22"/>
+          <p:cNvSpPr txBox="1"/>
+          <p:nvPr>
+            <p:ph type="title"/>
+          </p:nvPr>
+        </p:nvSpPr>
+        <p:spPr>
+          <a:xfrm>
+            <a:off x="265500" y="1081675"/>
+            <a:ext cx="4045200" cy="1786200"/>
           </a:xfrm>
           <a:prstGeom prst="rect">
             <a:avLst/>
@@ -6185,7 +7679,7 @@
             </a:pPr>
             <a:r>
               <a:rPr lang="en"/>
-              <a:t>Sistema de Cadastro de Amigos da Gabi</a:t>
+              <a:t>listar.php</a:t>
             </a:r>
             <a:endParaRPr/>
           </a:p>
@@ -6193,7 +7687,7 @@
       </p:sp>
       <p:sp>
         <p:nvSpPr>
-          <p:cNvPr id="55" name="Google Shape;55;p13"/>
+          <p:cNvPr id="138" name="Google Shape;138;p22"/>
           <p:cNvSpPr txBox="1"/>
           <p:nvPr>
             <p:ph idx="1" type="subTitle"/>
@@ -6201,8 +7695,8 @@
         </p:nvSpPr>
         <p:spPr>
           <a:xfrm>
-            <a:off x="311700" y="2834125"/>
-            <a:ext cx="8520600" cy="792600"/>
+            <a:off x="265500" y="2921401"/>
+            <a:ext cx="4045200" cy="1345500"/>
           </a:xfrm>
           <a:prstGeom prst="rect">
             <a:avLst/>
@@ -6210,6 +7704,122 @@
         </p:spPr>
         <p:txBody>
           <a:bodyPr anchorCtr="0" anchor="t" bIns="91425" lIns="91425" spcFirstLastPara="1" rIns="91425" wrap="square" tIns="91425">
+            <a:normAutofit fontScale="70000"/>
+          </a:bodyPr>
+          <a:lstStyle/>
+          <a:p>
+            <a:pPr indent="0" lvl="0" marL="0" rtl="0" algn="ctr">
+              <a:spcBef>
+                <a:spcPts val="0"/>
+              </a:spcBef>
+              <a:spcAft>
+                <a:spcPts val="0"/>
+              </a:spcAft>
+              <a:buNone/>
+            </a:pPr>
+            <a:r>
+              <a:rPr lang="en"/>
+              <a:t>Lê os registros em "amigos" com SELECT e gera uma linha na tabela, e apresenta botões para alterar e excluir cada um.</a:t>
+            </a:r>
+            <a:endParaRPr/>
+          </a:p>
+          <a:p>
+            <a:pPr indent="0" lvl="0" marL="0" rtl="0" algn="ctr">
+              <a:spcBef>
+                <a:spcPts val="0"/>
+              </a:spcBef>
+              <a:spcAft>
+                <a:spcPts val="0"/>
+              </a:spcAft>
+              <a:buNone/>
+            </a:pPr>
+            <a:r>
+              <a:rPr lang="en"/>
+              <a:t>Após executar suas funções, as páginas excluir.php e atualizar.php retornam aqui.</a:t>
+            </a:r>
+            <a:endParaRPr/>
+          </a:p>
+        </p:txBody>
+      </p:sp>
+      <p:pic>
+        <p:nvPicPr>
+          <p:cNvPr id="139" name="Google Shape;139;p22" title="Screenshot_20260928_132025.png"/>
+          <p:cNvPicPr preferRelativeResize="0"/>
+          <p:nvPr/>
+        </p:nvPicPr>
+        <p:blipFill>
+          <a:blip r:embed="rId3">
+            <a:alphaModFix/>
+          </a:blip>
+          <a:stretch>
+            <a:fillRect/>
+          </a:stretch>
+        </p:blipFill>
+        <p:spPr>
+          <a:xfrm>
+            <a:off x="4670507" y="1899000"/>
+            <a:ext cx="4348262" cy="1345500"/>
+          </a:xfrm>
+          <a:prstGeom prst="rect">
+            <a:avLst/>
+          </a:prstGeom>
+          <a:noFill/>
+          <a:ln>
+            <a:noFill/>
+          </a:ln>
+        </p:spPr>
+      </p:pic>
+    </p:spTree>
+  </p:cSld>
+  <p:clrMapOvr>
+    <a:masterClrMapping/>
+  </p:clrMapOvr>
+</p:sld>
+</file>
+
+<file path=ppt/slides/slide11.xml><?xml version="1.0" encoding="utf-8"?>
+<p:sld xmlns:a="http://schemas.openxmlformats.org/drawingml/2006/main" xmlns:r="http://schemas.openxmlformats.org/officeDocument/2006/relationships" xmlns:mc="http://schemas.openxmlformats.org/markup-compatibility/2006" xmlns:mv="urn:schemas-microsoft-com:mac:vml" xmlns:p="http://schemas.openxmlformats.org/presentationml/2006/main" xmlns:c="http://schemas.openxmlformats.org/drawingml/2006/chart" xmlns:dgm="http://schemas.openxmlformats.org/drawingml/2006/diagram" xmlns:o="urn:schemas-microsoft-com:office:office" xmlns:v="urn:schemas-microsoft-com:vml" xmlns:pvml="urn:schemas-microsoft-com:office:powerpoint" xmlns:com="http://schemas.openxmlformats.org/drawingml/2006/compatibility" xmlns:p14="http://schemas.microsoft.com/office/powerpoint/2010/main" xmlns:p15="http://schemas.microsoft.com/office/powerpoint/2012/main" xmlns:ahyp="http://schemas.microsoft.com/office/drawing/2018/hyperlinkcolor">
+  <p:cSld>
+    <p:bg>
+      <p:bgPr>
+        <a:solidFill>
+          <a:schemeClr val="accent4"/>
+        </a:solidFill>
+      </p:bgPr>
+    </p:bg>
+    <p:spTree>
+      <p:nvGrpSpPr>
+        <p:cNvPr id="143" name="Shape 143"/>
+        <p:cNvGrpSpPr/>
+        <p:nvPr/>
+      </p:nvGrpSpPr>
+      <p:grpSpPr>
+        <a:xfrm>
+          <a:off x="0" y="0"/>
+          <a:ext cx="0" cy="0"/>
+          <a:chOff x="0" y="0"/>
+          <a:chExt cx="0" cy="0"/>
+        </a:xfrm>
+      </p:grpSpPr>
+      <p:sp>
+        <p:nvSpPr>
+          <p:cNvPr id="144" name="Google Shape;144;p23"/>
+          <p:cNvSpPr txBox="1"/>
+          <p:nvPr>
+            <p:ph type="title"/>
+          </p:nvPr>
+        </p:nvSpPr>
+        <p:spPr>
+          <a:xfrm>
+            <a:off x="265500" y="1081675"/>
+            <a:ext cx="4045200" cy="1786200"/>
+          </a:xfrm>
+          <a:prstGeom prst="rect">
+            <a:avLst/>
+          </a:prstGeom>
+        </p:spPr>
+        <p:txBody>
+          <a:bodyPr anchorCtr="0" anchor="b" bIns="91425" lIns="91425" spcFirstLastPara="1" rIns="91425" wrap="square" tIns="91425">
             <a:normAutofit/>
           </a:bodyPr>
           <a:lstStyle/>
@@ -6225,9 +7835,654 @@
             </a:pPr>
             <a:r>
               <a:rPr lang="en"/>
-              <a:t>Projeto em PHP</a:t>
+              <a:t>excluir.php</a:t>
             </a:r>
             <a:endParaRPr/>
+          </a:p>
+        </p:txBody>
+      </p:sp>
+      <p:sp>
+        <p:nvSpPr>
+          <p:cNvPr id="145" name="Google Shape;145;p23"/>
+          <p:cNvSpPr txBox="1"/>
+          <p:nvPr>
+            <p:ph idx="1" type="subTitle"/>
+          </p:nvPr>
+        </p:nvSpPr>
+        <p:spPr>
+          <a:xfrm>
+            <a:off x="265500" y="2921401"/>
+            <a:ext cx="4045200" cy="1345500"/>
+          </a:xfrm>
+          <a:prstGeom prst="rect">
+            <a:avLst/>
+          </a:prstGeom>
+        </p:spPr>
+        <p:txBody>
+          <a:bodyPr anchorCtr="0" anchor="t" bIns="91425" lIns="91425" spcFirstLastPara="1" rIns="91425" wrap="square" tIns="91425">
+            <a:normAutofit fontScale="85000" lnSpcReduction="20000"/>
+          </a:bodyPr>
+          <a:lstStyle/>
+          <a:p>
+            <a:pPr indent="0" lvl="0" marL="0" rtl="0" algn="ctr">
+              <a:spcBef>
+                <a:spcPts val="0"/>
+              </a:spcBef>
+              <a:spcAft>
+                <a:spcPts val="0"/>
+              </a:spcAft>
+              <a:buNone/>
+            </a:pPr>
+            <a:r>
+              <a:rPr lang="en"/>
+              <a:t>Detecta as informações do amigo a ser </a:t>
+            </a:r>
+            <a:r>
+              <a:rPr lang="en"/>
+              <a:t>excluído</a:t>
+            </a:r>
+            <a:r>
+              <a:rPr lang="en"/>
+              <a:t> pelo número de ID, e remove o registro do banco de dados pelo excluirAction.php com o comando DELETE.</a:t>
+            </a:r>
+            <a:endParaRPr/>
+          </a:p>
+        </p:txBody>
+      </p:sp>
+      <p:pic>
+        <p:nvPicPr>
+          <p:cNvPr id="146" name="Google Shape;146;p23" title="Screenshot_20260928_132052.png"/>
+          <p:cNvPicPr preferRelativeResize="0"/>
+          <p:nvPr/>
+        </p:nvPicPr>
+        <p:blipFill>
+          <a:blip r:embed="rId3">
+            <a:alphaModFix/>
+          </a:blip>
+          <a:stretch>
+            <a:fillRect/>
+          </a:stretch>
+        </p:blipFill>
+        <p:spPr>
+          <a:xfrm>
+            <a:off x="6255323" y="147200"/>
+            <a:ext cx="2542375" cy="3496424"/>
+          </a:xfrm>
+          <a:prstGeom prst="rect">
+            <a:avLst/>
+          </a:prstGeom>
+          <a:noFill/>
+          <a:ln>
+            <a:noFill/>
+          </a:ln>
+        </p:spPr>
+      </p:pic>
+      <p:pic>
+        <p:nvPicPr>
+          <p:cNvPr id="147" name="Google Shape;147;p23" title="Screenshot_20260928_132117.png"/>
+          <p:cNvPicPr preferRelativeResize="0"/>
+          <p:nvPr/>
+        </p:nvPicPr>
+        <p:blipFill>
+          <a:blip r:embed="rId4">
+            <a:alphaModFix/>
+          </a:blip>
+          <a:stretch>
+            <a:fillRect/>
+          </a:stretch>
+        </p:blipFill>
+        <p:spPr>
+          <a:xfrm>
+            <a:off x="4716750" y="3854950"/>
+            <a:ext cx="4291450" cy="1118575"/>
+          </a:xfrm>
+          <a:prstGeom prst="rect">
+            <a:avLst/>
+          </a:prstGeom>
+          <a:noFill/>
+          <a:ln>
+            <a:noFill/>
+          </a:ln>
+        </p:spPr>
+      </p:pic>
+      <p:pic>
+        <p:nvPicPr>
+          <p:cNvPr id="148" name="Google Shape;148;p23" title="Screenshot_20260928_132109.png"/>
+          <p:cNvPicPr preferRelativeResize="0"/>
+          <p:nvPr/>
+        </p:nvPicPr>
+        <p:blipFill>
+          <a:blip r:embed="rId5">
+            <a:alphaModFix/>
+          </a:blip>
+          <a:stretch>
+            <a:fillRect/>
+          </a:stretch>
+        </p:blipFill>
+        <p:spPr>
+          <a:xfrm>
+            <a:off x="4762675" y="3224551"/>
+            <a:ext cx="2542375" cy="469824"/>
+          </a:xfrm>
+          <a:prstGeom prst="rect">
+            <a:avLst/>
+          </a:prstGeom>
+          <a:noFill/>
+          <a:ln>
+            <a:noFill/>
+          </a:ln>
+        </p:spPr>
+      </p:pic>
+    </p:spTree>
+  </p:cSld>
+  <p:clrMapOvr>
+    <a:masterClrMapping/>
+  </p:clrMapOvr>
+</p:sld>
+</file>
+
+<file path=ppt/slides/slide12.xml><?xml version="1.0" encoding="utf-8"?>
+<p:sld xmlns:a="http://schemas.openxmlformats.org/drawingml/2006/main" xmlns:r="http://schemas.openxmlformats.org/officeDocument/2006/relationships" xmlns:mc="http://schemas.openxmlformats.org/markup-compatibility/2006" xmlns:mv="urn:schemas-microsoft-com:mac:vml" xmlns:p="http://schemas.openxmlformats.org/presentationml/2006/main" xmlns:c="http://schemas.openxmlformats.org/drawingml/2006/chart" xmlns:dgm="http://schemas.openxmlformats.org/drawingml/2006/diagram" xmlns:o="urn:schemas-microsoft-com:office:office" xmlns:v="urn:schemas-microsoft-com:vml" xmlns:pvml="urn:schemas-microsoft-com:office:powerpoint" xmlns:com="http://schemas.openxmlformats.org/drawingml/2006/compatibility" xmlns:p14="http://schemas.microsoft.com/office/powerpoint/2010/main" xmlns:p15="http://schemas.microsoft.com/office/powerpoint/2012/main" xmlns:ahyp="http://schemas.microsoft.com/office/drawing/2018/hyperlinkcolor">
+  <p:cSld>
+    <p:bg>
+      <p:bgPr>
+        <a:solidFill>
+          <a:schemeClr val="accent4"/>
+        </a:solidFill>
+      </p:bgPr>
+    </p:bg>
+    <p:spTree>
+      <p:nvGrpSpPr>
+        <p:cNvPr id="152" name="Shape 152"/>
+        <p:cNvGrpSpPr/>
+        <p:nvPr/>
+      </p:nvGrpSpPr>
+      <p:grpSpPr>
+        <a:xfrm>
+          <a:off x="0" y="0"/>
+          <a:ext cx="0" cy="0"/>
+          <a:chOff x="0" y="0"/>
+          <a:chExt cx="0" cy="0"/>
+        </a:xfrm>
+      </p:grpSpPr>
+      <p:sp>
+        <p:nvSpPr>
+          <p:cNvPr id="153" name="Google Shape;153;p24"/>
+          <p:cNvSpPr txBox="1"/>
+          <p:nvPr>
+            <p:ph type="title"/>
+          </p:nvPr>
+        </p:nvSpPr>
+        <p:spPr>
+          <a:xfrm>
+            <a:off x="265500" y="1081675"/>
+            <a:ext cx="4045200" cy="1786200"/>
+          </a:xfrm>
+          <a:prstGeom prst="rect">
+            <a:avLst/>
+          </a:prstGeom>
+        </p:spPr>
+        <p:txBody>
+          <a:bodyPr anchorCtr="0" anchor="b" bIns="91425" lIns="91425" spcFirstLastPara="1" rIns="91425" wrap="square" tIns="91425">
+            <a:normAutofit/>
+          </a:bodyPr>
+          <a:lstStyle/>
+          <a:p>
+            <a:pPr indent="0" lvl="0" marL="0" rtl="0" algn="ctr">
+              <a:spcBef>
+                <a:spcPts val="0"/>
+              </a:spcBef>
+              <a:spcAft>
+                <a:spcPts val="0"/>
+              </a:spcAft>
+              <a:buNone/>
+            </a:pPr>
+            <a:r>
+              <a:rPr lang="en"/>
+              <a:t>atualizar.php</a:t>
+            </a:r>
+            <a:endParaRPr/>
+          </a:p>
+        </p:txBody>
+      </p:sp>
+      <p:sp>
+        <p:nvSpPr>
+          <p:cNvPr id="154" name="Google Shape;154;p24"/>
+          <p:cNvSpPr txBox="1"/>
+          <p:nvPr>
+            <p:ph idx="1" type="subTitle"/>
+          </p:nvPr>
+        </p:nvSpPr>
+        <p:spPr>
+          <a:xfrm>
+            <a:off x="265500" y="2921401"/>
+            <a:ext cx="4045200" cy="1345500"/>
+          </a:xfrm>
+          <a:prstGeom prst="rect">
+            <a:avLst/>
+          </a:prstGeom>
+        </p:spPr>
+        <p:txBody>
+          <a:bodyPr anchorCtr="0" anchor="t" bIns="91425" lIns="91425" spcFirstLastPara="1" rIns="91425" wrap="square" tIns="91425">
+            <a:normAutofit fontScale="92500" lnSpcReduction="10000"/>
+          </a:bodyPr>
+          <a:lstStyle/>
+          <a:p>
+            <a:pPr indent="0" lvl="0" marL="0" rtl="0" algn="ctr">
+              <a:spcBef>
+                <a:spcPts val="0"/>
+              </a:spcBef>
+              <a:spcAft>
+                <a:spcPts val="0"/>
+              </a:spcAft>
+              <a:buNone/>
+            </a:pPr>
+            <a:r>
+              <a:rPr lang="en"/>
+              <a:t>Permite alterar as informações do amigo selecionado, e processa o query SQL em atualizarAction.php com o comando UPDATE.</a:t>
+            </a:r>
+            <a:endParaRPr/>
+          </a:p>
+        </p:txBody>
+      </p:sp>
+      <p:pic>
+        <p:nvPicPr>
+          <p:cNvPr id="155" name="Google Shape;155;p24" title="Screenshot_20260928_132151.png"/>
+          <p:cNvPicPr preferRelativeResize="0"/>
+          <p:nvPr/>
+        </p:nvPicPr>
+        <p:blipFill>
+          <a:blip r:embed="rId3">
+            <a:alphaModFix/>
+          </a:blip>
+          <a:stretch>
+            <a:fillRect/>
+          </a:stretch>
+        </p:blipFill>
+        <p:spPr>
+          <a:xfrm>
+            <a:off x="5087438" y="383575"/>
+            <a:ext cx="3600750" cy="3182400"/>
+          </a:xfrm>
+          <a:prstGeom prst="rect">
+            <a:avLst/>
+          </a:prstGeom>
+          <a:noFill/>
+          <a:ln>
+            <a:noFill/>
+          </a:ln>
+        </p:spPr>
+      </p:pic>
+      <p:pic>
+        <p:nvPicPr>
+          <p:cNvPr id="156" name="Google Shape;156;p24" title="Screenshot_20260928_132216.png"/>
+          <p:cNvPicPr preferRelativeResize="0"/>
+          <p:nvPr/>
+        </p:nvPicPr>
+        <p:blipFill>
+          <a:blip r:embed="rId4">
+            <a:alphaModFix/>
+          </a:blip>
+          <a:stretch>
+            <a:fillRect/>
+          </a:stretch>
+        </p:blipFill>
+        <p:spPr>
+          <a:xfrm>
+            <a:off x="4749900" y="3785225"/>
+            <a:ext cx="4275826" cy="1129775"/>
+          </a:xfrm>
+          <a:prstGeom prst="rect">
+            <a:avLst/>
+          </a:prstGeom>
+          <a:noFill/>
+          <a:ln>
+            <a:noFill/>
+          </a:ln>
+        </p:spPr>
+      </p:pic>
+      <p:pic>
+        <p:nvPicPr>
+          <p:cNvPr id="157" name="Google Shape;157;p24" title="Screenshot_20260928_132203.png"/>
+          <p:cNvPicPr preferRelativeResize="0"/>
+          <p:nvPr/>
+        </p:nvPicPr>
+        <p:blipFill>
+          <a:blip r:embed="rId5">
+            <a:alphaModFix/>
+          </a:blip>
+          <a:stretch>
+            <a:fillRect/>
+          </a:stretch>
+        </p:blipFill>
+        <p:spPr>
+          <a:xfrm>
+            <a:off x="4705175" y="3305875"/>
+            <a:ext cx="2513625" cy="393300"/>
+          </a:xfrm>
+          <a:prstGeom prst="rect">
+            <a:avLst/>
+          </a:prstGeom>
+          <a:noFill/>
+          <a:ln>
+            <a:noFill/>
+          </a:ln>
+        </p:spPr>
+      </p:pic>
+    </p:spTree>
+  </p:cSld>
+  <p:clrMapOvr>
+    <a:masterClrMapping/>
+  </p:clrMapOvr>
+</p:sld>
+</file>
+
+<file path=ppt/slides/slide13.xml><?xml version="1.0" encoding="utf-8"?>
+<p:sld xmlns:a="http://schemas.openxmlformats.org/drawingml/2006/main" xmlns:r="http://schemas.openxmlformats.org/officeDocument/2006/relationships" xmlns:mc="http://schemas.openxmlformats.org/markup-compatibility/2006" xmlns:mv="urn:schemas-microsoft-com:mac:vml" xmlns:p="http://schemas.openxmlformats.org/presentationml/2006/main" xmlns:c="http://schemas.openxmlformats.org/drawingml/2006/chart" xmlns:dgm="http://schemas.openxmlformats.org/drawingml/2006/diagram" xmlns:o="urn:schemas-microsoft-com:office:office" xmlns:v="urn:schemas-microsoft-com:vml" xmlns:pvml="urn:schemas-microsoft-com:office:powerpoint" xmlns:com="http://schemas.openxmlformats.org/drawingml/2006/compatibility" xmlns:p14="http://schemas.microsoft.com/office/powerpoint/2010/main" xmlns:p15="http://schemas.microsoft.com/office/powerpoint/2012/main" xmlns:ahyp="http://schemas.microsoft.com/office/drawing/2018/hyperlinkcolor">
+  <p:cSld>
+    <p:spTree>
+      <p:nvGrpSpPr>
+        <p:cNvPr id="161" name="Shape 161"/>
+        <p:cNvGrpSpPr/>
+        <p:nvPr/>
+      </p:nvGrpSpPr>
+      <p:grpSpPr>
+        <a:xfrm>
+          <a:off x="0" y="0"/>
+          <a:ext cx="0" cy="0"/>
+          <a:chOff x="0" y="0"/>
+          <a:chExt cx="0" cy="0"/>
+        </a:xfrm>
+      </p:grpSpPr>
+      <p:sp>
+        <p:nvSpPr>
+          <p:cNvPr id="162" name="Google Shape;162;p25"/>
+          <p:cNvSpPr txBox="1"/>
+          <p:nvPr>
+            <p:ph type="title"/>
+          </p:nvPr>
+        </p:nvSpPr>
+        <p:spPr>
+          <a:xfrm>
+            <a:off x="160000" y="163075"/>
+            <a:ext cx="8228100" cy="1900800"/>
+          </a:xfrm>
+          <a:prstGeom prst="rect">
+            <a:avLst/>
+          </a:prstGeom>
+        </p:spPr>
+        <p:txBody>
+          <a:bodyPr anchorCtr="0" anchor="ctr" bIns="91425" lIns="91425" spcFirstLastPara="1" rIns="91425" wrap="square" tIns="91425">
+            <a:normAutofit/>
+          </a:bodyPr>
+          <a:lstStyle/>
+          <a:p>
+            <a:pPr indent="0" lvl="0" marL="0" rtl="0" algn="l">
+              <a:spcBef>
+                <a:spcPts val="0"/>
+              </a:spcBef>
+              <a:spcAft>
+                <a:spcPts val="0"/>
+              </a:spcAft>
+              <a:buNone/>
+            </a:pPr>
+            <a:r>
+              <a:rPr lang="en" sz="4400"/>
+              <a:t>Resumo</a:t>
+            </a:r>
+            <a:endParaRPr sz="4400"/>
+          </a:p>
+        </p:txBody>
+      </p:sp>
+      <p:sp>
+        <p:nvSpPr>
+          <p:cNvPr id="163" name="Google Shape;163;p25"/>
+          <p:cNvSpPr/>
+          <p:nvPr/>
+        </p:nvSpPr>
+        <p:spPr>
+          <a:xfrm>
+            <a:off x="0" y="1750275"/>
+            <a:ext cx="9144000" cy="3393300"/>
+          </a:xfrm>
+          <a:prstGeom prst="rect">
+            <a:avLst/>
+          </a:prstGeom>
+          <a:solidFill>
+            <a:schemeClr val="lt2"/>
+          </a:solidFill>
+          <a:ln cap="flat" cmpd="sng" w="9525">
+            <a:solidFill>
+              <a:schemeClr val="lt2"/>
+            </a:solidFill>
+            <a:prstDash val="solid"/>
+            <a:round/>
+            <a:headEnd len="sm" w="sm" type="none"/>
+            <a:tailEnd len="sm" w="sm" type="none"/>
+          </a:ln>
+        </p:spPr>
+        <p:txBody>
+          <a:bodyPr anchorCtr="0" anchor="ctr" bIns="91425" lIns="91425" spcFirstLastPara="1" rIns="91425" wrap="square" tIns="91425">
+            <a:noAutofit/>
+          </a:bodyPr>
+          <a:lstStyle/>
+          <a:p>
+            <a:pPr indent="0" lvl="0" marL="0" rtl="0" algn="ctr">
+              <a:spcBef>
+                <a:spcPts val="0"/>
+              </a:spcBef>
+              <a:spcAft>
+                <a:spcPts val="0"/>
+              </a:spcAft>
+              <a:buNone/>
+            </a:pPr>
+            <a:r>
+              <a:t/>
+            </a:r>
+            <a:endParaRPr>
+              <a:latin typeface="Playfair Display"/>
+              <a:ea typeface="Playfair Display"/>
+              <a:cs typeface="Playfair Display"/>
+              <a:sym typeface="Playfair Display"/>
+            </a:endParaRPr>
+          </a:p>
+        </p:txBody>
+      </p:sp>
+      <p:sp>
+        <p:nvSpPr>
+          <p:cNvPr id="164" name="Google Shape;164;p25"/>
+          <p:cNvSpPr txBox="1"/>
+          <p:nvPr/>
+        </p:nvSpPr>
+        <p:spPr>
+          <a:xfrm>
+            <a:off x="160000" y="2088825"/>
+            <a:ext cx="8051700" cy="2716200"/>
+          </a:xfrm>
+          <a:prstGeom prst="rect">
+            <a:avLst/>
+          </a:prstGeom>
+          <a:noFill/>
+          <a:ln>
+            <a:noFill/>
+          </a:ln>
+        </p:spPr>
+        <p:txBody>
+          <a:bodyPr anchorCtr="0" anchor="t" bIns="91425" lIns="91425" spcFirstLastPara="1" rIns="91425" wrap="square" tIns="91425">
+            <a:noAutofit/>
+          </a:bodyPr>
+          <a:lstStyle/>
+          <a:p>
+            <a:pPr indent="-342900" lvl="0" marL="457200" rtl="0" algn="l">
+              <a:spcBef>
+                <a:spcPts val="0"/>
+              </a:spcBef>
+              <a:spcAft>
+                <a:spcPts val="0"/>
+              </a:spcAft>
+              <a:buClr>
+                <a:schemeClr val="dk2"/>
+              </a:buClr>
+              <a:buSzPts val="1800"/>
+              <a:buFont typeface="Playfair Display"/>
+              <a:buChar char="●"/>
+            </a:pPr>
+            <a:r>
+              <a:rPr lang="en" sz="1800">
+                <a:solidFill>
+                  <a:schemeClr val="dk2"/>
+                </a:solidFill>
+                <a:latin typeface="Playfair Display"/>
+                <a:ea typeface="Playfair Display"/>
+                <a:cs typeface="Playfair Display"/>
+                <a:sym typeface="Playfair Display"/>
+              </a:rPr>
+              <a:t>Através do MySQLI, obtemos ferramentas de manipulação de Banco de Dados dentro do código PHP;</a:t>
+            </a:r>
+            <a:endParaRPr sz="1800">
+              <a:solidFill>
+                <a:schemeClr val="dk2"/>
+              </a:solidFill>
+              <a:latin typeface="Playfair Display"/>
+              <a:ea typeface="Playfair Display"/>
+              <a:cs typeface="Playfair Display"/>
+              <a:sym typeface="Playfair Display"/>
+            </a:endParaRPr>
+          </a:p>
+          <a:p>
+            <a:pPr indent="-342900" lvl="0" marL="457200" rtl="0" algn="l">
+              <a:spcBef>
+                <a:spcPts val="0"/>
+              </a:spcBef>
+              <a:spcAft>
+                <a:spcPts val="0"/>
+              </a:spcAft>
+              <a:buClr>
+                <a:schemeClr val="dk2"/>
+              </a:buClr>
+              <a:buSzPts val="1800"/>
+              <a:buFont typeface="Playfair Display"/>
+              <a:buChar char="●"/>
+            </a:pPr>
+            <a:r>
+              <a:rPr lang="en" sz="1800">
+                <a:solidFill>
+                  <a:schemeClr val="dk2"/>
+                </a:solidFill>
+                <a:latin typeface="Playfair Display"/>
+                <a:ea typeface="Playfair Display"/>
+                <a:cs typeface="Playfair Display"/>
+                <a:sym typeface="Playfair Display"/>
+              </a:rPr>
+              <a:t>Utilizamos a importação de arquivos para tornar o sistema eficiente e possibilitar a validação do login;</a:t>
+            </a:r>
+            <a:endParaRPr sz="1800">
+              <a:solidFill>
+                <a:schemeClr val="dk2"/>
+              </a:solidFill>
+              <a:latin typeface="Playfair Display"/>
+              <a:ea typeface="Playfair Display"/>
+              <a:cs typeface="Playfair Display"/>
+              <a:sym typeface="Playfair Display"/>
+            </a:endParaRPr>
+          </a:p>
+          <a:p>
+            <a:pPr indent="-342900" lvl="0" marL="457200" rtl="0" algn="l">
+              <a:spcBef>
+                <a:spcPts val="0"/>
+              </a:spcBef>
+              <a:spcAft>
+                <a:spcPts val="0"/>
+              </a:spcAft>
+              <a:buClr>
+                <a:schemeClr val="dk2"/>
+              </a:buClr>
+              <a:buSzPts val="1800"/>
+              <a:buFont typeface="Playfair Display"/>
+              <a:buChar char="●"/>
+            </a:pPr>
+            <a:r>
+              <a:rPr lang="en" sz="1800">
+                <a:solidFill>
+                  <a:schemeClr val="dk2"/>
+                </a:solidFill>
+                <a:latin typeface="Playfair Display"/>
+                <a:ea typeface="Playfair Display"/>
+                <a:cs typeface="Playfair Display"/>
+                <a:sym typeface="Playfair Display"/>
+              </a:rPr>
+              <a:t>A verificação de login baseada em sessões </a:t>
+            </a:r>
+            <a:r>
+              <a:rPr lang="en" sz="1800">
+                <a:solidFill>
+                  <a:schemeClr val="dk2"/>
+                </a:solidFill>
+                <a:latin typeface="Playfair Display"/>
+                <a:ea typeface="Playfair Display"/>
+                <a:cs typeface="Playfair Display"/>
+                <a:sym typeface="Playfair Display"/>
+              </a:rPr>
+              <a:t>providência</a:t>
+            </a:r>
+            <a:r>
+              <a:rPr lang="en" sz="1800">
+                <a:solidFill>
+                  <a:schemeClr val="dk2"/>
+                </a:solidFill>
+                <a:latin typeface="Playfair Display"/>
+                <a:ea typeface="Playfair Display"/>
+                <a:cs typeface="Playfair Display"/>
+                <a:sym typeface="Playfair Display"/>
+              </a:rPr>
+              <a:t> maior segurança e controle do sistema;</a:t>
+            </a:r>
+            <a:endParaRPr sz="1800">
+              <a:solidFill>
+                <a:schemeClr val="dk2"/>
+              </a:solidFill>
+              <a:latin typeface="Playfair Display"/>
+              <a:ea typeface="Playfair Display"/>
+              <a:cs typeface="Playfair Display"/>
+              <a:sym typeface="Playfair Display"/>
+            </a:endParaRPr>
+          </a:p>
+          <a:p>
+            <a:pPr indent="-342900" lvl="0" marL="457200" rtl="0" algn="l">
+              <a:spcBef>
+                <a:spcPts val="0"/>
+              </a:spcBef>
+              <a:spcAft>
+                <a:spcPts val="0"/>
+              </a:spcAft>
+              <a:buClr>
+                <a:schemeClr val="dk2"/>
+              </a:buClr>
+              <a:buSzPts val="1800"/>
+              <a:buFont typeface="Playfair Display"/>
+              <a:buChar char="●"/>
+            </a:pPr>
+            <a:r>
+              <a:rPr lang="en" sz="1800">
+                <a:solidFill>
+                  <a:schemeClr val="dk2"/>
+                </a:solidFill>
+                <a:latin typeface="Playfair Display"/>
+                <a:ea typeface="Playfair Display"/>
+                <a:cs typeface="Playfair Display"/>
+                <a:sym typeface="Playfair Display"/>
+              </a:rPr>
+              <a:t>Criamos funcionalidade para o sistema através dos comandos SQL, mantendo boas práticas para preservar a integridade do banco de dados criado no início.</a:t>
+            </a:r>
+            <a:endParaRPr sz="1800">
+              <a:solidFill>
+                <a:schemeClr val="dk2"/>
+              </a:solidFill>
+              <a:latin typeface="Playfair Display"/>
+              <a:ea typeface="Playfair Display"/>
+              <a:cs typeface="Playfair Display"/>
+              <a:sym typeface="Playfair Display"/>
+            </a:endParaRPr>
           </a:p>
         </p:txBody>
       </p:sp>
@@ -6244,7 +8499,7 @@
   <p:cSld>
     <p:spTree>
       <p:nvGrpSpPr>
-        <p:cNvPr id="59" name="Shape 59"/>
+        <p:cNvPr id="63" name="Shape 63"/>
         <p:cNvGrpSpPr/>
         <p:nvPr/>
       </p:nvGrpSpPr>
@@ -6258,23 +8513,23 @@
       </p:grpSpPr>
       <p:sp>
         <p:nvSpPr>
-          <p:cNvPr id="60" name="Google Shape;60;p14"/>
+          <p:cNvPr id="64" name="Google Shape;64;p14"/>
           <p:cNvSpPr txBox="1"/>
           <p:nvPr>
-            <p:ph type="ctrTitle"/>
+            <p:ph type="title"/>
           </p:nvPr>
         </p:nvSpPr>
         <p:spPr>
           <a:xfrm>
-            <a:off x="311708" y="744575"/>
-            <a:ext cx="8520600" cy="2052600"/>
+            <a:off x="344250" y="1403850"/>
+            <a:ext cx="8455500" cy="2146800"/>
           </a:xfrm>
           <a:prstGeom prst="rect">
             <a:avLst/>
           </a:prstGeom>
         </p:spPr>
         <p:txBody>
-          <a:bodyPr anchorCtr="0" anchor="b" bIns="91425" lIns="91425" spcFirstLastPara="1" rIns="91425" wrap="square" tIns="91425">
+          <a:bodyPr anchorCtr="0" anchor="ctr" bIns="91425" lIns="91425" spcFirstLastPara="1" rIns="91425" wrap="square" tIns="91425">
             <a:normAutofit/>
           </a:bodyPr>
           <a:lstStyle/>
@@ -6290,47 +8545,7 @@
             </a:pPr>
             <a:r>
               <a:rPr lang="en"/>
-              <a:t>banco de dados pwii</a:t>
-            </a:r>
-            <a:endParaRPr/>
-          </a:p>
-        </p:txBody>
-      </p:sp>
-      <p:sp>
-        <p:nvSpPr>
-          <p:cNvPr id="61" name="Google Shape;61;p14"/>
-          <p:cNvSpPr txBox="1"/>
-          <p:nvPr>
-            <p:ph idx="1" type="subTitle"/>
-          </p:nvPr>
-        </p:nvSpPr>
-        <p:spPr>
-          <a:xfrm>
-            <a:off x="311700" y="2834125"/>
-            <a:ext cx="8520600" cy="792600"/>
-          </a:xfrm>
-          <a:prstGeom prst="rect">
-            <a:avLst/>
-          </a:prstGeom>
-        </p:spPr>
-        <p:txBody>
-          <a:bodyPr anchorCtr="0" anchor="t" bIns="91425" lIns="91425" spcFirstLastPara="1" rIns="91425" wrap="square" tIns="91425">
-            <a:normAutofit fontScale="85000" lnSpcReduction="20000"/>
-          </a:bodyPr>
-          <a:lstStyle/>
-          <a:p>
-            <a:pPr indent="0" lvl="0" marL="0" rtl="0" algn="ctr">
-              <a:spcBef>
-                <a:spcPts val="0"/>
-              </a:spcBef>
-              <a:spcAft>
-                <a:spcPts val="0"/>
-              </a:spcAft>
-              <a:buNone/>
-            </a:pPr>
-            <a:r>
-              <a:rPr lang="en"/>
-              <a:t>onde ficam os amigos registrados para serem manipulados pelo mysqli</a:t>
+              <a:t>Estrutura e Conceitos Base do Sistema</a:t>
             </a:r>
             <a:endParaRPr/>
           </a:p>
@@ -6349,7 +8564,7 @@
   <p:cSld>
     <p:spTree>
       <p:nvGrpSpPr>
-        <p:cNvPr id="65" name="Shape 65"/>
+        <p:cNvPr id="68" name="Shape 68"/>
         <p:cNvGrpSpPr/>
         <p:nvPr/>
       </p:nvGrpSpPr>
@@ -6363,16 +8578,16 @@
       </p:grpSpPr>
       <p:sp>
         <p:nvSpPr>
-          <p:cNvPr id="66" name="Google Shape;66;p15"/>
+          <p:cNvPr id="69" name="Google Shape;69;p15"/>
           <p:cNvSpPr txBox="1"/>
           <p:nvPr>
-            <p:ph type="ctrTitle"/>
+            <p:ph type="title"/>
           </p:nvPr>
         </p:nvSpPr>
         <p:spPr>
           <a:xfrm>
-            <a:off x="311708" y="744575"/>
-            <a:ext cx="8520600" cy="2052600"/>
+            <a:off x="311700" y="555600"/>
+            <a:ext cx="2808000" cy="755700"/>
           </a:xfrm>
           <a:prstGeom prst="rect">
             <a:avLst/>
@@ -6380,22 +8595,30 @@
         </p:spPr>
         <p:txBody>
           <a:bodyPr anchorCtr="0" anchor="b" bIns="91425" lIns="91425" spcFirstLastPara="1" rIns="91425" wrap="square" tIns="91425">
-            <a:normAutofit/>
+            <a:normAutofit fontScale="90000"/>
           </a:bodyPr>
           <a:lstStyle/>
           <a:p>
-            <a:pPr indent="0" lvl="0" marL="0" rtl="0" algn="ctr">
-              <a:spcBef>
-                <a:spcPts val="0"/>
-              </a:spcBef>
-              <a:spcAft>
-                <a:spcPts val="0"/>
-              </a:spcAft>
-              <a:buNone/>
+            <a:pPr indent="-365760" lvl="0" marL="457200" rtl="0" algn="l">
+              <a:spcBef>
+                <a:spcPts val="0"/>
+              </a:spcBef>
+              <a:spcAft>
+                <a:spcPts val="0"/>
+              </a:spcAft>
+              <a:buSzPct val="100000"/>
+              <a:buAutoNum type="arabicPeriod"/>
             </a:pPr>
             <a:r>
               <a:rPr lang="en"/>
-              <a:t>Arquivos importados</a:t>
+              <a:t>Definição do </a:t>
+            </a:r>
+            <a:br>
+              <a:rPr lang="en"/>
+            </a:br>
+            <a:r>
+              <a:rPr lang="en"/>
+              <a:t>Banco de Dados</a:t>
             </a:r>
             <a:endParaRPr/>
           </a:p>
@@ -6403,16 +8626,16 @@
       </p:sp>
       <p:sp>
         <p:nvSpPr>
-          <p:cNvPr id="67" name="Google Shape;67;p15"/>
+          <p:cNvPr id="70" name="Google Shape;70;p15"/>
           <p:cNvSpPr txBox="1"/>
           <p:nvPr>
-            <p:ph idx="1" type="subTitle"/>
+            <p:ph idx="1" type="body"/>
           </p:nvPr>
         </p:nvSpPr>
         <p:spPr>
           <a:xfrm>
-            <a:off x="311700" y="2834125"/>
-            <a:ext cx="8520600" cy="792600"/>
+            <a:off x="311700" y="1389600"/>
+            <a:ext cx="2808000" cy="3179400"/>
           </a:xfrm>
           <a:prstGeom prst="rect">
             <a:avLst/>
@@ -6424,7 +8647,7 @@
           </a:bodyPr>
           <a:lstStyle/>
           <a:p>
-            <a:pPr indent="0" lvl="0" marL="0" rtl="0" algn="ctr">
+            <a:pPr indent="457200" lvl="0" marL="0" rtl="0" algn="l">
               <a:spcBef>
                 <a:spcPts val="0"/>
               </a:spcBef>
@@ -6435,9 +8658,209 @@
             </a:pPr>
             <a:r>
               <a:rPr lang="en"/>
-              <a:t>(conexaobd, cabecalho e rodape)</a:t>
+              <a:t>Antes de mais nada, criamos o Banco de Dados "pwii", onde as credenciais de login e os registros dos amigos da Gabi serão guardados.</a:t>
             </a:r>
             <a:endParaRPr/>
+          </a:p>
+          <a:p>
+            <a:pPr indent="457200" lvl="0" marL="0" rtl="0" algn="l">
+              <a:spcBef>
+                <a:spcPts val="1200"/>
+              </a:spcBef>
+              <a:spcAft>
+                <a:spcPts val="1200"/>
+              </a:spcAft>
+              <a:buNone/>
+            </a:pPr>
+            <a:r>
+              <a:rPr lang="en"/>
+              <a:t>Para manipular e exibir os dados dos amigos (e dar função aos botões da nossa "interface"), estabelecemos uma conexão com o BD "pwii" utilizando a ferramenta MySQLI, o que nos permite gerar comandos SQL dentro do código PHP.</a:t>
+            </a:r>
+            <a:endParaRPr/>
+          </a:p>
+        </p:txBody>
+      </p:sp>
+      <p:pic>
+        <p:nvPicPr>
+          <p:cNvPr id="71" name="Google Shape;71;p15" title="Screenshot_20260928_125210.png"/>
+          <p:cNvPicPr preferRelativeResize="0"/>
+          <p:nvPr/>
+        </p:nvPicPr>
+        <p:blipFill rotWithShape="1">
+          <a:blip r:embed="rId3">
+            <a:alphaModFix/>
+          </a:blip>
+          <a:srcRect b="0" l="825" r="19066" t="0"/>
+          <a:stretch/>
+        </p:blipFill>
+        <p:spPr>
+          <a:xfrm>
+            <a:off x="3366325" y="1504144"/>
+            <a:ext cx="5524272" cy="894031"/>
+          </a:xfrm>
+          <a:prstGeom prst="rect">
+            <a:avLst/>
+          </a:prstGeom>
+          <a:noFill/>
+          <a:ln cap="flat" cmpd="sng" w="19050">
+            <a:solidFill>
+              <a:schemeClr val="accent4"/>
+            </a:solidFill>
+            <a:prstDash val="solid"/>
+            <a:round/>
+            <a:headEnd len="sm" w="sm" type="none"/>
+            <a:tailEnd len="sm" w="sm" type="none"/>
+          </a:ln>
+        </p:spPr>
+      </p:pic>
+      <p:pic>
+        <p:nvPicPr>
+          <p:cNvPr id="72" name="Google Shape;72;p15" title="Screenshot_20260928_125234.png"/>
+          <p:cNvPicPr preferRelativeResize="0"/>
+          <p:nvPr/>
+        </p:nvPicPr>
+        <p:blipFill rotWithShape="1">
+          <a:blip r:embed="rId4">
+            <a:alphaModFix/>
+          </a:blip>
+          <a:srcRect b="0" l="0" r="19891" t="0"/>
+          <a:stretch/>
+        </p:blipFill>
+        <p:spPr>
+          <a:xfrm>
+            <a:off x="3366325" y="317275"/>
+            <a:ext cx="5524274" cy="1035565"/>
+          </a:xfrm>
+          <a:prstGeom prst="rect">
+            <a:avLst/>
+          </a:prstGeom>
+          <a:noFill/>
+          <a:ln cap="flat" cmpd="sng" w="19050">
+            <a:solidFill>
+              <a:schemeClr val="accent4"/>
+            </a:solidFill>
+            <a:prstDash val="solid"/>
+            <a:round/>
+            <a:headEnd len="sm" w="sm" type="none"/>
+            <a:tailEnd len="sm" w="sm" type="none"/>
+          </a:ln>
+        </p:spPr>
+      </p:pic>
+      <p:pic>
+        <p:nvPicPr>
+          <p:cNvPr id="73" name="Google Shape;73;p15" title="Screenshot_20260928_125644.png"/>
+          <p:cNvPicPr preferRelativeResize="0"/>
+          <p:nvPr/>
+        </p:nvPicPr>
+        <p:blipFill rotWithShape="1">
+          <a:blip r:embed="rId5">
+            <a:alphaModFix/>
+          </a:blip>
+          <a:srcRect b="0" l="7394" r="4157" t="14259"/>
+          <a:stretch/>
+        </p:blipFill>
+        <p:spPr>
+          <a:xfrm>
+            <a:off x="3599025" y="2658975"/>
+            <a:ext cx="5058874" cy="1571525"/>
+          </a:xfrm>
+          <a:prstGeom prst="rect">
+            <a:avLst/>
+          </a:prstGeom>
+          <a:noFill/>
+          <a:ln cap="flat" cmpd="sng" w="19050">
+            <a:solidFill>
+              <a:schemeClr val="accent4"/>
+            </a:solidFill>
+            <a:prstDash val="solid"/>
+            <a:round/>
+            <a:headEnd len="sm" w="sm" type="none"/>
+            <a:tailEnd len="sm" w="sm" type="none"/>
+          </a:ln>
+        </p:spPr>
+      </p:pic>
+      <p:pic>
+        <p:nvPicPr>
+          <p:cNvPr descr="a blue and orange mysql logo with a dolphin on it (Provided by Tenor)" id="74" name="Google Shape;74;p15"/>
+          <p:cNvPicPr preferRelativeResize="0"/>
+          <p:nvPr/>
+        </p:nvPicPr>
+        <p:blipFill>
+          <a:blip r:embed="rId6">
+            <a:alphaModFix/>
+          </a:blip>
+          <a:stretch>
+            <a:fillRect/>
+          </a:stretch>
+        </p:blipFill>
+        <p:spPr>
+          <a:xfrm>
+            <a:off x="7069550" y="3659250"/>
+            <a:ext cx="1736413" cy="1035575"/>
+          </a:xfrm>
+          <a:prstGeom prst="rect">
+            <a:avLst/>
+          </a:prstGeom>
+          <a:noFill/>
+          <a:ln>
+            <a:noFill/>
+          </a:ln>
+        </p:spPr>
+      </p:pic>
+      <p:sp>
+        <p:nvSpPr>
+          <p:cNvPr id="75" name="Google Shape;75;p15"/>
+          <p:cNvSpPr/>
+          <p:nvPr/>
+        </p:nvSpPr>
+        <p:spPr>
+          <a:xfrm>
+            <a:off x="408675" y="3929600"/>
+            <a:ext cx="2520000" cy="300900"/>
+          </a:xfrm>
+          <a:prstGeom prst="rightArrow">
+            <a:avLst>
+              <a:gd fmla="val 50000" name="adj1"/>
+              <a:gd fmla="val 50000" name="adj2"/>
+            </a:avLst>
+          </a:prstGeom>
+          <a:solidFill>
+            <a:schemeClr val="accent3"/>
+          </a:solidFill>
+          <a:ln cap="flat" cmpd="sng" w="9525">
+            <a:solidFill>
+              <a:schemeClr val="lt1"/>
+            </a:solidFill>
+            <a:prstDash val="solid"/>
+            <a:round/>
+            <a:headEnd len="sm" w="sm" type="none"/>
+            <a:tailEnd len="sm" w="sm" type="none"/>
+          </a:ln>
+        </p:spPr>
+        <p:txBody>
+          <a:bodyPr anchorCtr="0" anchor="ctr" bIns="91425" lIns="91425" spcFirstLastPara="1" rIns="91425" wrap="square" tIns="91425">
+            <a:noAutofit/>
+          </a:bodyPr>
+          <a:lstStyle/>
+          <a:p>
+            <a:pPr indent="0" lvl="0" marL="0" rtl="0" algn="ctr">
+              <a:spcBef>
+                <a:spcPts val="0"/>
+              </a:spcBef>
+              <a:spcAft>
+                <a:spcPts val="0"/>
+              </a:spcAft>
+              <a:buNone/>
+            </a:pPr>
+            <a:r>
+              <a:t/>
+            </a:r>
+            <a:endParaRPr>
+              <a:latin typeface="Average"/>
+              <a:ea typeface="Average"/>
+              <a:cs typeface="Average"/>
+              <a:sym typeface="Average"/>
+            </a:endParaRPr>
           </a:p>
         </p:txBody>
       </p:sp>
@@ -6454,7 +8877,7 @@
   <p:cSld>
     <p:spTree>
       <p:nvGrpSpPr>
-        <p:cNvPr id="71" name="Shape 71"/>
+        <p:cNvPr id="79" name="Shape 79"/>
         <p:cNvGrpSpPr/>
         <p:nvPr/>
       </p:nvGrpSpPr>
@@ -6468,7 +8891,7 @@
       </p:grpSpPr>
       <p:sp>
         <p:nvSpPr>
-          <p:cNvPr id="72" name="Google Shape;72;p16"/>
+          <p:cNvPr id="80" name="Google Shape;80;p16"/>
           <p:cNvSpPr txBox="1"/>
           <p:nvPr>
             <p:ph type="title"/>
@@ -6476,15 +8899,15 @@
         </p:nvSpPr>
         <p:spPr>
           <a:xfrm>
-            <a:off x="311700" y="445025"/>
-            <a:ext cx="8520600" cy="572700"/>
+            <a:off x="311700" y="555600"/>
+            <a:ext cx="2808000" cy="755700"/>
           </a:xfrm>
           <a:prstGeom prst="rect">
             <a:avLst/>
           </a:prstGeom>
         </p:spPr>
         <p:txBody>
-          <a:bodyPr anchorCtr="0" anchor="t" bIns="91425" lIns="91425" spcFirstLastPara="1" rIns="91425" wrap="square" tIns="91425">
+          <a:bodyPr anchorCtr="0" anchor="b" bIns="91425" lIns="91425" spcFirstLastPara="1" rIns="91425" wrap="square" tIns="91425">
             <a:normAutofit fontScale="90000"/>
           </a:bodyPr>
           <a:lstStyle/>
@@ -6500,7 +8923,7 @@
             </a:pPr>
             <a:r>
               <a:rPr lang="en"/>
-              <a:t>Sistema de Login</a:t>
+              <a:t>2.   Importação de Arquivos (require)</a:t>
             </a:r>
             <a:endParaRPr/>
           </a:p>
@@ -6508,7 +8931,7 @@
       </p:sp>
       <p:sp>
         <p:nvSpPr>
-          <p:cNvPr id="73" name="Google Shape;73;p16"/>
+          <p:cNvPr id="81" name="Google Shape;81;p16"/>
           <p:cNvSpPr txBox="1"/>
           <p:nvPr>
             <p:ph idx="1" type="body"/>
@@ -6516,8 +8939,8 @@
         </p:nvSpPr>
         <p:spPr>
           <a:xfrm>
-            <a:off x="311700" y="1152475"/>
-            <a:ext cx="8520600" cy="3416400"/>
+            <a:off x="311700" y="1389600"/>
+            <a:ext cx="3065100" cy="3409800"/>
           </a:xfrm>
           <a:prstGeom prst="rect">
             <a:avLst/>
@@ -6525,7 +8948,7 @@
         </p:spPr>
         <p:txBody>
           <a:bodyPr anchorCtr="0" anchor="t" bIns="91425" lIns="91425" spcFirstLastPara="1" rIns="91425" wrap="square" tIns="91425">
-            <a:normAutofit/>
+            <a:normAutofit lnSpcReduction="10000"/>
           </a:bodyPr>
           <a:lstStyle/>
           <a:p>
@@ -6534,15 +8957,225 @@
                 <a:spcPts val="0"/>
               </a:spcBef>
               <a:spcAft>
-                <a:spcPts val="1200"/>
+                <a:spcPts val="0"/>
               </a:spcAft>
               <a:buNone/>
             </a:pPr>
             <a:r>
               <a:rPr lang="en"/>
-              <a:t>indexphp, loginaction, estabelecimento de sessão</a:t>
+              <a:t>O Sistema de Cadastro de Amigos é dividido em vários arquivos PHP, que representam funções ou páginas diferentes. É preciso estabelecer a conexão com o BD em diversos destes, sempre com as mesmas informações do servidor local.</a:t>
             </a:r>
             <a:endParaRPr/>
+          </a:p>
+          <a:p>
+            <a:pPr indent="0" lvl="0" marL="0" rtl="0" algn="l">
+              <a:spcBef>
+                <a:spcPts val="1200"/>
+              </a:spcBef>
+              <a:spcAft>
+                <a:spcPts val="0"/>
+              </a:spcAft>
+              <a:buNone/>
+            </a:pPr>
+            <a:r>
+              <a:t/>
+            </a:r>
+            <a:endParaRPr/>
+          </a:p>
+          <a:p>
+            <a:pPr indent="0" lvl="0" marL="0" rtl="0" algn="l">
+              <a:spcBef>
+                <a:spcPts val="1200"/>
+              </a:spcBef>
+              <a:spcAft>
+                <a:spcPts val="1200"/>
+              </a:spcAft>
+              <a:buNone/>
+            </a:pPr>
+            <a:r>
+              <a:rPr lang="en"/>
+              <a:t>Para facilitar a repetição de trechos de código, usamos as funções require e include. Nesse projeto, temos arquivos separados para a conexão MySQLI, o cabeçalho e o rodapé HTML, e utilizamos o require_once para chama-los um por vez quando necessário.</a:t>
+            </a:r>
+            <a:endParaRPr/>
+          </a:p>
+        </p:txBody>
+      </p:sp>
+      <p:pic>
+        <p:nvPicPr>
+          <p:cNvPr id="82" name="Google Shape;82;p16" title="Screenshot_20260928_125622.png"/>
+          <p:cNvPicPr preferRelativeResize="0"/>
+          <p:nvPr/>
+        </p:nvPicPr>
+        <p:blipFill rotWithShape="1">
+          <a:blip r:embed="rId3">
+            <a:alphaModFix/>
+          </a:blip>
+          <a:srcRect b="0" l="856" r="34280" t="0"/>
+          <a:stretch/>
+        </p:blipFill>
+        <p:spPr>
+          <a:xfrm>
+            <a:off x="3658052" y="2757495"/>
+            <a:ext cx="4856371" cy="1701903"/>
+          </a:xfrm>
+          <a:prstGeom prst="rect">
+            <a:avLst/>
+          </a:prstGeom>
+          <a:noFill/>
+          <a:ln cap="flat" cmpd="sng" w="7800">
+            <a:solidFill>
+              <a:schemeClr val="accent4"/>
+            </a:solidFill>
+            <a:prstDash val="solid"/>
+            <a:round/>
+            <a:headEnd len="sm" w="sm" type="none"/>
+            <a:tailEnd len="sm" w="sm" type="none"/>
+          </a:ln>
+        </p:spPr>
+      </p:pic>
+      <p:pic>
+        <p:nvPicPr>
+          <p:cNvPr id="83" name="Google Shape;83;p16" title="Screenshot_20260928_125644.png"/>
+          <p:cNvPicPr preferRelativeResize="0"/>
+          <p:nvPr/>
+        </p:nvPicPr>
+        <p:blipFill rotWithShape="1">
+          <a:blip r:embed="rId4">
+            <a:alphaModFix/>
+          </a:blip>
+          <a:srcRect b="0" l="8077" r="6365" t="14141"/>
+          <a:stretch/>
+        </p:blipFill>
+        <p:spPr>
+          <a:xfrm>
+            <a:off x="4284487" y="928950"/>
+            <a:ext cx="2954650" cy="950100"/>
+          </a:xfrm>
+          <a:prstGeom prst="rect">
+            <a:avLst/>
+          </a:prstGeom>
+          <a:noFill/>
+          <a:ln>
+            <a:noFill/>
+          </a:ln>
+        </p:spPr>
+      </p:pic>
+      <p:pic>
+        <p:nvPicPr>
+          <p:cNvPr id="84" name="Google Shape;84;p16" title="Screenshot_20260928_125705.png"/>
+          <p:cNvPicPr preferRelativeResize="0"/>
+          <p:nvPr/>
+        </p:nvPicPr>
+        <p:blipFill>
+          <a:blip r:embed="rId5">
+            <a:alphaModFix/>
+          </a:blip>
+          <a:stretch>
+            <a:fillRect/>
+          </a:stretch>
+        </p:blipFill>
+        <p:spPr>
+          <a:xfrm>
+            <a:off x="5226008" y="2658574"/>
+            <a:ext cx="1193263" cy="584933"/>
+          </a:xfrm>
+          <a:prstGeom prst="rect">
+            <a:avLst/>
+          </a:prstGeom>
+          <a:noFill/>
+          <a:ln cap="flat" cmpd="sng" w="15600">
+            <a:solidFill>
+              <a:schemeClr val="accent4"/>
+            </a:solidFill>
+            <a:prstDash val="solid"/>
+            <a:round/>
+            <a:headEnd len="sm" w="sm" type="none"/>
+            <a:tailEnd len="sm" w="sm" type="none"/>
+          </a:ln>
+        </p:spPr>
+      </p:pic>
+      <p:pic>
+        <p:nvPicPr>
+          <p:cNvPr id="85" name="Google Shape;85;p16" title="Screenshot_20260928_130414.png"/>
+          <p:cNvPicPr preferRelativeResize="0"/>
+          <p:nvPr/>
+        </p:nvPicPr>
+        <p:blipFill rotWithShape="1">
+          <a:blip r:embed="rId6">
+            <a:alphaModFix/>
+          </a:blip>
+          <a:srcRect b="71933" l="18620" r="46373" t="23866"/>
+          <a:stretch/>
+        </p:blipFill>
+        <p:spPr>
+          <a:xfrm>
+            <a:off x="3376800" y="555596"/>
+            <a:ext cx="2954676" cy="262855"/>
+          </a:xfrm>
+          <a:prstGeom prst="rect">
+            <a:avLst/>
+          </a:prstGeom>
+          <a:noFill/>
+          <a:ln>
+            <a:noFill/>
+          </a:ln>
+        </p:spPr>
+      </p:pic>
+      <p:sp>
+        <p:nvSpPr>
+          <p:cNvPr id="86" name="Google Shape;86;p16"/>
+          <p:cNvSpPr/>
+          <p:nvPr/>
+        </p:nvSpPr>
+        <p:spPr>
+          <a:xfrm rot="5400000">
+            <a:off x="3677400" y="909600"/>
+            <a:ext cx="544500" cy="583200"/>
+          </a:xfrm>
+          <a:prstGeom prst="bentUpArrow">
+            <a:avLst>
+              <a:gd fmla="val 25000" name="adj1"/>
+              <a:gd fmla="val 25000" name="adj2"/>
+              <a:gd fmla="val 25000" name="adj3"/>
+            </a:avLst>
+          </a:prstGeom>
+          <a:solidFill>
+            <a:schemeClr val="accent3"/>
+          </a:solidFill>
+          <a:ln cap="flat" cmpd="sng" w="9525">
+            <a:solidFill>
+              <a:schemeClr val="accent3"/>
+            </a:solidFill>
+            <a:prstDash val="solid"/>
+            <a:round/>
+            <a:headEnd len="sm" w="sm" type="none"/>
+            <a:tailEnd len="sm" w="sm" type="none"/>
+          </a:ln>
+        </p:spPr>
+        <p:txBody>
+          <a:bodyPr anchorCtr="0" anchor="ctr" bIns="91425" lIns="91425" spcFirstLastPara="1" rIns="91425" wrap="square" tIns="91425">
+            <a:noAutofit/>
+          </a:bodyPr>
+          <a:lstStyle/>
+          <a:p>
+            <a:pPr indent="0" lvl="0" marL="0" rtl="0" algn="ctr">
+              <a:spcBef>
+                <a:spcPts val="0"/>
+              </a:spcBef>
+              <a:spcAft>
+                <a:spcPts val="0"/>
+              </a:spcAft>
+              <a:buNone/>
+            </a:pPr>
+            <a:r>
+              <a:t/>
+            </a:r>
+            <a:endParaRPr>
+              <a:latin typeface="Playfair Display"/>
+              <a:ea typeface="Playfair Display"/>
+              <a:cs typeface="Playfair Display"/>
+              <a:sym typeface="Playfair Display"/>
+            </a:endParaRPr>
           </a:p>
         </p:txBody>
       </p:sp>
@@ -6559,7 +9192,7 @@
   <p:cSld>
     <p:spTree>
       <p:nvGrpSpPr>
-        <p:cNvPr id="77" name="Shape 77"/>
+        <p:cNvPr id="90" name="Shape 90"/>
         <p:cNvGrpSpPr/>
         <p:nvPr/>
       </p:nvGrpSpPr>
@@ -6573,7 +9206,7 @@
       </p:grpSpPr>
       <p:sp>
         <p:nvSpPr>
-          <p:cNvPr id="78" name="Google Shape;78;p17"/>
+          <p:cNvPr id="91" name="Google Shape;91;p17"/>
           <p:cNvSpPr txBox="1"/>
           <p:nvPr>
             <p:ph type="title"/>
@@ -6581,16 +9214,16 @@
         </p:nvSpPr>
         <p:spPr>
           <a:xfrm>
-            <a:off x="311700" y="445025"/>
-            <a:ext cx="8520600" cy="572700"/>
+            <a:off x="311700" y="555600"/>
+            <a:ext cx="2808000" cy="755700"/>
           </a:xfrm>
           <a:prstGeom prst="rect">
             <a:avLst/>
           </a:prstGeom>
         </p:spPr>
         <p:txBody>
-          <a:bodyPr anchorCtr="0" anchor="t" bIns="91425" lIns="91425" spcFirstLastPara="1" rIns="91425" wrap="square" tIns="91425">
-            <a:normAutofit fontScale="90000"/>
+          <a:bodyPr anchorCtr="0" anchor="b" bIns="91425" lIns="91425" spcFirstLastPara="1" rIns="91425" wrap="square" tIns="91425">
+            <a:normAutofit/>
           </a:bodyPr>
           <a:lstStyle/>
           <a:p>
@@ -6605,7 +9238,7 @@
             </a:pPr>
             <a:r>
               <a:rPr lang="en"/>
-              <a:t>sistema de login 2 se precisar</a:t>
+              <a:t>3.   Sistema de Login</a:t>
             </a:r>
             <a:endParaRPr/>
           </a:p>
@@ -6613,7 +9246,7 @@
       </p:sp>
       <p:sp>
         <p:nvSpPr>
-          <p:cNvPr id="79" name="Google Shape;79;p17"/>
+          <p:cNvPr id="92" name="Google Shape;92;p17"/>
           <p:cNvSpPr txBox="1"/>
           <p:nvPr>
             <p:ph idx="1" type="body"/>
@@ -6621,8 +9254,8 @@
         </p:nvSpPr>
         <p:spPr>
           <a:xfrm>
-            <a:off x="311700" y="1152475"/>
-            <a:ext cx="8520600" cy="3416400"/>
+            <a:off x="311700" y="1389600"/>
+            <a:ext cx="4150500" cy="3179400"/>
           </a:xfrm>
           <a:prstGeom prst="rect">
             <a:avLst/>
@@ -6634,20 +9267,247 @@
           </a:bodyPr>
           <a:lstStyle/>
           <a:p>
-            <a:pPr indent="0" lvl="0" marL="0" rtl="0" algn="l">
-              <a:spcBef>
-                <a:spcPts val="0"/>
-              </a:spcBef>
-              <a:spcAft>
-                <a:spcPts val="1200"/>
+            <a:pPr indent="457200" lvl="0" marL="0" rtl="0" algn="l">
+              <a:spcBef>
+                <a:spcPts val="0"/>
+              </a:spcBef>
+              <a:spcAft>
+                <a:spcPts val="0"/>
               </a:spcAft>
               <a:buNone/>
             </a:pPr>
             <a:r>
               <a:rPr lang="en"/>
-              <a:t>verificaracesso acessonegado logoutaction</a:t>
+              <a:t>A página index.php apresenta um formulário de login, e o loginAction.php executa as ações que validam os dados inseridos. Para autorizar a entrada, uma condição 'if' verifica se essas informações são equivalentes ao nome e senha registrados na tabela "usuario", e exibe um botão com uma mensagem e destino diferentes de acordo com o resultado.</a:t>
             </a:r>
             <a:endParaRPr/>
+          </a:p>
+          <a:p>
+            <a:pPr indent="0" lvl="0" marL="0" rtl="0" algn="l">
+              <a:spcBef>
+                <a:spcPts val="1200"/>
+              </a:spcBef>
+              <a:spcAft>
+                <a:spcPts val="0"/>
+              </a:spcAft>
+              <a:buNone/>
+            </a:pPr>
+            <a:r>
+              <a:t/>
+            </a:r>
+            <a:endParaRPr/>
+          </a:p>
+          <a:p>
+            <a:pPr indent="0" lvl="0" marL="0" rtl="0" algn="l">
+              <a:spcBef>
+                <a:spcPts val="1200"/>
+              </a:spcBef>
+              <a:spcAft>
+                <a:spcPts val="0"/>
+              </a:spcAft>
+              <a:buNone/>
+            </a:pPr>
+            <a:r>
+              <a:t/>
+            </a:r>
+            <a:endParaRPr/>
+          </a:p>
+          <a:p>
+            <a:pPr indent="457200" lvl="0" marL="0" rtl="0" algn="l">
+              <a:spcBef>
+                <a:spcPts val="1200"/>
+              </a:spcBef>
+              <a:spcAft>
+                <a:spcPts val="1200"/>
+              </a:spcAft>
+              <a:buNone/>
+            </a:pPr>
+            <a:r>
+              <a:rPr lang="en"/>
+              <a:t>Para que essa validação ocorra no restante das páginas (a fim de impedir que o login seja "burlado"), precisamos iniciar uma </a:t>
+            </a:r>
+            <a:r>
+              <a:rPr lang="en" u="sng"/>
+              <a:t>sessão</a:t>
+            </a:r>
+            <a:r>
+              <a:rPr lang="en"/>
+              <a:t>.</a:t>
+            </a:r>
+            <a:endParaRPr/>
+          </a:p>
+        </p:txBody>
+      </p:sp>
+      <p:pic>
+        <p:nvPicPr>
+          <p:cNvPr id="93" name="Google Shape;93;p17" title="Screenshot_20260928_125752.png"/>
+          <p:cNvPicPr preferRelativeResize="0"/>
+          <p:nvPr/>
+        </p:nvPicPr>
+        <p:blipFill>
+          <a:blip r:embed="rId3">
+            <a:alphaModFix/>
+          </a:blip>
+          <a:stretch>
+            <a:fillRect/>
+          </a:stretch>
+        </p:blipFill>
+        <p:spPr>
+          <a:xfrm>
+            <a:off x="5442550" y="180725"/>
+            <a:ext cx="2927324" cy="2770499"/>
+          </a:xfrm>
+          <a:prstGeom prst="rect">
+            <a:avLst/>
+          </a:prstGeom>
+          <a:noFill/>
+          <a:ln>
+            <a:noFill/>
+          </a:ln>
+        </p:spPr>
+      </p:pic>
+      <p:pic>
+        <p:nvPicPr>
+          <p:cNvPr id="94" name="Google Shape;94;p17" title="Screenshot_20260928_125834.png"/>
+          <p:cNvPicPr preferRelativeResize="0"/>
+          <p:nvPr/>
+        </p:nvPicPr>
+        <p:blipFill rotWithShape="1">
+          <a:blip r:embed="rId4">
+            <a:alphaModFix/>
+          </a:blip>
+          <a:srcRect b="22761" l="6987" r="6538" t="19948"/>
+          <a:stretch/>
+        </p:blipFill>
+        <p:spPr>
+          <a:xfrm>
+            <a:off x="383275" y="3083286"/>
+            <a:ext cx="2310246" cy="408127"/>
+          </a:xfrm>
+          <a:prstGeom prst="rect">
+            <a:avLst/>
+          </a:prstGeom>
+          <a:noFill/>
+          <a:ln>
+            <a:noFill/>
+          </a:ln>
+        </p:spPr>
+      </p:pic>
+      <p:pic>
+        <p:nvPicPr>
+          <p:cNvPr id="95" name="Google Shape;95;p17" title="Screenshot_20260928_130414.png"/>
+          <p:cNvPicPr preferRelativeResize="0"/>
+          <p:nvPr/>
+        </p:nvPicPr>
+        <p:blipFill rotWithShape="1">
+          <a:blip r:embed="rId5">
+            <a:alphaModFix/>
+          </a:blip>
+          <a:srcRect b="36676" l="5096" r="0" t="13412"/>
+          <a:stretch/>
+        </p:blipFill>
+        <p:spPr>
+          <a:xfrm>
+            <a:off x="4678850" y="3083275"/>
+            <a:ext cx="4150575" cy="1829050"/>
+          </a:xfrm>
+          <a:prstGeom prst="rect">
+            <a:avLst/>
+          </a:prstGeom>
+          <a:noFill/>
+          <a:ln cap="flat" cmpd="sng" w="19050">
+            <a:solidFill>
+              <a:schemeClr val="accent4"/>
+            </a:solidFill>
+            <a:prstDash val="solid"/>
+            <a:round/>
+            <a:headEnd len="sm" w="sm" type="none"/>
+            <a:tailEnd len="sm" w="sm" type="none"/>
+          </a:ln>
+        </p:spPr>
+      </p:pic>
+      <p:pic>
+        <p:nvPicPr>
+          <p:cNvPr id="96" name="Google Shape;96;p17" title="Screenshot_20260928_125932.png"/>
+          <p:cNvPicPr preferRelativeResize="0"/>
+          <p:nvPr/>
+        </p:nvPicPr>
+        <p:blipFill rotWithShape="1">
+          <a:blip r:embed="rId6">
+            <a:alphaModFix/>
+          </a:blip>
+          <a:srcRect b="2810" l="47101" r="2957" t="82422"/>
+          <a:stretch/>
+        </p:blipFill>
+        <p:spPr>
+          <a:xfrm>
+            <a:off x="2815551" y="3083275"/>
+            <a:ext cx="1559199" cy="408150"/>
+          </a:xfrm>
+          <a:prstGeom prst="rect">
+            <a:avLst/>
+          </a:prstGeom>
+          <a:noFill/>
+          <a:ln>
+            <a:noFill/>
+          </a:ln>
+        </p:spPr>
+      </p:pic>
+      <p:sp>
+        <p:nvSpPr>
+          <p:cNvPr id="97" name="Google Shape;97;p17"/>
+          <p:cNvSpPr/>
+          <p:nvPr/>
+        </p:nvSpPr>
+        <p:spPr>
+          <a:xfrm flipH="1" rot="10800000">
+            <a:off x="4462200" y="2128950"/>
+            <a:ext cx="778200" cy="778200"/>
+          </a:xfrm>
+          <a:prstGeom prst="bentUpArrow">
+            <a:avLst>
+              <a:gd fmla="val 25000" name="adj1"/>
+              <a:gd fmla="val 25000" name="adj2"/>
+              <a:gd fmla="val 25000" name="adj3"/>
+            </a:avLst>
+          </a:prstGeom>
+          <a:solidFill>
+            <a:schemeClr val="accent3"/>
+          </a:solidFill>
+          <a:ln cap="flat" cmpd="sng" w="9525">
+            <a:solidFill>
+              <a:schemeClr val="accent3"/>
+            </a:solidFill>
+            <a:prstDash val="solid"/>
+            <a:round/>
+            <a:headEnd len="sm" w="sm" type="none"/>
+            <a:tailEnd len="sm" w="sm" type="none"/>
+          </a:ln>
+        </p:spPr>
+        <p:txBody>
+          <a:bodyPr anchorCtr="0" anchor="ctr" bIns="91425" lIns="91425" spcFirstLastPara="1" rIns="91425" wrap="square" tIns="91425">
+            <a:noAutofit/>
+          </a:bodyPr>
+          <a:lstStyle/>
+          <a:p>
+            <a:pPr indent="0" lvl="0" marL="0" rtl="0" algn="ctr">
+              <a:spcBef>
+                <a:spcPts val="0"/>
+              </a:spcBef>
+              <a:spcAft>
+                <a:spcPts val="0"/>
+              </a:spcAft>
+              <a:buNone/>
+            </a:pPr>
+            <a:r>
+              <a:t/>
+            </a:r>
+            <a:endParaRPr>
+              <a:latin typeface="Playfair Display"/>
+              <a:ea typeface="Playfair Display"/>
+              <a:cs typeface="Playfair Display"/>
+              <a:sym typeface="Playfair Display"/>
+            </a:endParaRPr>
           </a:p>
         </p:txBody>
       </p:sp>
@@ -6664,7 +9524,7 @@
   <p:cSld>
     <p:spTree>
       <p:nvGrpSpPr>
-        <p:cNvPr id="83" name="Shape 83"/>
+        <p:cNvPr id="101" name="Shape 101"/>
         <p:cNvGrpSpPr/>
         <p:nvPr/>
       </p:nvGrpSpPr>
@@ -6678,47 +9538,7 @@
       </p:grpSpPr>
       <p:sp>
         <p:nvSpPr>
-          <p:cNvPr id="84" name="Google Shape;84;p18"/>
-          <p:cNvSpPr txBox="1"/>
-          <p:nvPr>
-            <p:ph type="title"/>
-          </p:nvPr>
-        </p:nvSpPr>
-        <p:spPr>
-          <a:xfrm>
-            <a:off x="311700" y="445025"/>
-            <a:ext cx="8520600" cy="572700"/>
-          </a:xfrm>
-          <a:prstGeom prst="rect">
-            <a:avLst/>
-          </a:prstGeom>
-        </p:spPr>
-        <p:txBody>
-          <a:bodyPr anchorCtr="0" anchor="t" bIns="91425" lIns="91425" spcFirstLastPara="1" rIns="91425" wrap="square" tIns="91425">
-            <a:normAutofit fontScale="90000"/>
-          </a:bodyPr>
-          <a:lstStyle/>
-          <a:p>
-            <a:pPr indent="0" lvl="0" marL="0" rtl="0" algn="l">
-              <a:spcBef>
-                <a:spcPts val="0"/>
-              </a:spcBef>
-              <a:spcAft>
-                <a:spcPts val="0"/>
-              </a:spcAft>
-              <a:buNone/>
-            </a:pPr>
-            <a:r>
-              <a:rPr lang="en"/>
-              <a:t>principal, listar</a:t>
-            </a:r>
-            <a:endParaRPr/>
-          </a:p>
-        </p:txBody>
-      </p:sp>
-      <p:sp>
-        <p:nvSpPr>
-          <p:cNvPr id="85" name="Google Shape;85;p18"/>
+          <p:cNvPr id="102" name="Google Shape;102;p18"/>
           <p:cNvSpPr txBox="1"/>
           <p:nvPr>
             <p:ph idx="1" type="body"/>
@@ -6726,8 +9546,8 @@
         </p:nvSpPr>
         <p:spPr>
           <a:xfrm>
-            <a:off x="311700" y="1152475"/>
-            <a:ext cx="8520600" cy="3416400"/>
+            <a:off x="109275" y="259000"/>
+            <a:ext cx="3999900" cy="3334800"/>
           </a:xfrm>
           <a:prstGeom prst="rect">
             <a:avLst/>
@@ -6739,22 +9559,366 @@
           </a:bodyPr>
           <a:lstStyle/>
           <a:p>
-            <a:pPr indent="0" lvl="0" marL="0" rtl="0" algn="l">
+            <a:pPr indent="457200" lvl="0" marL="0" rtl="0" algn="l">
               <a:spcBef>
                 <a:spcPts val="0"/>
               </a:spcBef>
               <a:spcAft>
                 <a:spcPts val="1200"/>
+              </a:spcAft>
+              <a:buNone/>
+            </a:pPr>
+            <a:r>
+              <a:rPr lang="en" sz="1300"/>
+              <a:t>Uma sessão guarda e disponibiliza dados em um arquivo de texto temporário por sua duração, e pode</a:t>
+            </a:r>
+            <a:r>
+              <a:rPr lang="en" sz="1300"/>
+              <a:t> ser configurada para acabar após um determinado período de tempo ou ao ser encerrada manualmente (logout). </a:t>
+            </a:r>
+            <a:br>
+              <a:rPr lang="en" sz="1300"/>
+            </a:br>
+            <a:r>
+              <a:rPr lang="en" sz="1300"/>
+              <a:t>	Atribuímos o nome do usuário a variável "logado" ao obter sucesso no login.</a:t>
+            </a:r>
+            <a:endParaRPr sz="1300"/>
+          </a:p>
+        </p:txBody>
+      </p:sp>
+      <p:pic>
+        <p:nvPicPr>
+          <p:cNvPr id="103" name="Google Shape;103;p18" title="Screenshot_20260928_131153.png"/>
+          <p:cNvPicPr preferRelativeResize="0"/>
+          <p:nvPr/>
+        </p:nvPicPr>
+        <p:blipFill>
+          <a:blip r:embed="rId3">
+            <a:alphaModFix/>
+          </a:blip>
+          <a:stretch>
+            <a:fillRect/>
+          </a:stretch>
+        </p:blipFill>
+        <p:spPr>
+          <a:xfrm>
+            <a:off x="6181125" y="116125"/>
+            <a:ext cx="2794275" cy="1653875"/>
+          </a:xfrm>
+          <a:prstGeom prst="rect">
+            <a:avLst/>
+          </a:prstGeom>
+          <a:noFill/>
+          <a:ln cap="flat" cmpd="sng" w="19050">
+            <a:solidFill>
+              <a:schemeClr val="accent4"/>
+            </a:solidFill>
+            <a:prstDash val="solid"/>
+            <a:round/>
+            <a:headEnd len="sm" w="sm" type="none"/>
+            <a:tailEnd len="sm" w="sm" type="none"/>
+          </a:ln>
+        </p:spPr>
+      </p:pic>
+      <p:pic>
+        <p:nvPicPr>
+          <p:cNvPr id="104" name="Google Shape;104;p18" title="Screenshot_20260928_125954.png"/>
+          <p:cNvPicPr preferRelativeResize="0"/>
+          <p:nvPr/>
+        </p:nvPicPr>
+        <p:blipFill>
+          <a:blip r:embed="rId4">
+            <a:alphaModFix/>
+          </a:blip>
+          <a:stretch>
+            <a:fillRect/>
+          </a:stretch>
+        </p:blipFill>
+        <p:spPr>
+          <a:xfrm>
+            <a:off x="4508400" y="3980138"/>
+            <a:ext cx="3717800" cy="995226"/>
+          </a:xfrm>
+          <a:prstGeom prst="rect">
+            <a:avLst/>
+          </a:prstGeom>
+          <a:noFill/>
+          <a:ln>
+            <a:noFill/>
+          </a:ln>
+        </p:spPr>
+      </p:pic>
+      <p:pic>
+        <p:nvPicPr>
+          <p:cNvPr id="105" name="Google Shape;105;p18" title="Screenshot_20260928_131252.png"/>
+          <p:cNvPicPr preferRelativeResize="0"/>
+          <p:nvPr/>
+        </p:nvPicPr>
+        <p:blipFill>
+          <a:blip r:embed="rId5">
+            <a:alphaModFix/>
+          </a:blip>
+          <a:stretch>
+            <a:fillRect/>
+          </a:stretch>
+        </p:blipFill>
+        <p:spPr>
+          <a:xfrm>
+            <a:off x="3849750" y="955575"/>
+            <a:ext cx="2134550" cy="814425"/>
+          </a:xfrm>
+          <a:prstGeom prst="rect">
+            <a:avLst/>
+          </a:prstGeom>
+          <a:noFill/>
+          <a:ln cap="flat" cmpd="sng" w="19050">
+            <a:solidFill>
+              <a:schemeClr val="accent3"/>
+            </a:solidFill>
+            <a:prstDash val="solid"/>
+            <a:round/>
+            <a:headEnd len="sm" w="sm" type="none"/>
+            <a:tailEnd len="sm" w="sm" type="none"/>
+          </a:ln>
+        </p:spPr>
+      </p:pic>
+      <p:sp>
+        <p:nvSpPr>
+          <p:cNvPr id="106" name="Google Shape;106;p18"/>
+          <p:cNvSpPr txBox="1"/>
+          <p:nvPr>
+            <p:ph idx="2" type="body"/>
+          </p:nvPr>
+        </p:nvSpPr>
+        <p:spPr>
+          <a:xfrm>
+            <a:off x="4508400" y="1888688"/>
+            <a:ext cx="3999900" cy="2138700"/>
+          </a:xfrm>
+          <a:prstGeom prst="rect">
+            <a:avLst/>
+          </a:prstGeom>
+        </p:spPr>
+        <p:txBody>
+          <a:bodyPr anchorCtr="0" anchor="t" bIns="91425" lIns="91425" spcFirstLastPara="1" rIns="91425" wrap="square" tIns="91425">
+            <a:normAutofit lnSpcReduction="10000"/>
+          </a:bodyPr>
+          <a:lstStyle/>
+          <a:p>
+            <a:pPr indent="457200" lvl="0" marL="0" rtl="0" algn="l">
+              <a:lnSpc>
+                <a:spcPct val="105000"/>
+              </a:lnSpc>
+              <a:spcBef>
+                <a:spcPts val="0"/>
+              </a:spcBef>
+              <a:spcAft>
+                <a:spcPts val="0"/>
+              </a:spcAft>
+              <a:buClr>
+                <a:schemeClr val="dk2"/>
+              </a:buClr>
+              <a:buSzPts val="1100"/>
+              <a:buFont typeface="Arial"/>
+              <a:buNone/>
+            </a:pPr>
+            <a:r>
+              <a:rPr lang="en" sz="1300"/>
+              <a:t>O arquivo verificarAcesso.php é requerido no início de todos os arquivos restritos por login. Ele se certifica se há uma sessão aberta e se a variável $_SESSION['logado'] foi preenchida antes de todo o código da página. </a:t>
+            </a:r>
+            <a:endParaRPr sz="1300"/>
+          </a:p>
+          <a:p>
+            <a:pPr indent="457200" lvl="0" marL="0" rtl="0" algn="l">
+              <a:lnSpc>
+                <a:spcPct val="105000"/>
+              </a:lnSpc>
+              <a:spcBef>
+                <a:spcPts val="1200"/>
+              </a:spcBef>
+              <a:spcAft>
+                <a:spcPts val="1200"/>
+              </a:spcAft>
+              <a:buClr>
+                <a:schemeClr val="dk2"/>
+              </a:buClr>
+              <a:buSzPts val="1100"/>
+              <a:buFont typeface="Arial"/>
+              <a:buNone/>
+            </a:pPr>
+            <a:r>
+              <a:rPr lang="en" sz="1300"/>
+              <a:t>Se não for detectado um valor em 'logado', indicando um login incorreto, o usuário é redirecionado a uma mensagem de acesso negado e retornado ao formulário inicial.</a:t>
+            </a:r>
+            <a:endParaRPr sz="1200"/>
+          </a:p>
+        </p:txBody>
+      </p:sp>
+      <p:pic>
+        <p:nvPicPr>
+          <p:cNvPr id="107" name="Google Shape;107;p18" title="Screenshot_20260928_130414.png"/>
+          <p:cNvPicPr preferRelativeResize="0"/>
+          <p:nvPr/>
+        </p:nvPicPr>
+        <p:blipFill rotWithShape="1">
+          <a:blip r:embed="rId6">
+            <a:alphaModFix/>
+          </a:blip>
+          <a:srcRect b="25971" l="19210" r="14639" t="10029"/>
+          <a:stretch/>
+        </p:blipFill>
+        <p:spPr>
+          <a:xfrm>
+            <a:off x="311700" y="2227375"/>
+            <a:ext cx="3359249" cy="2409294"/>
+          </a:xfrm>
+          <a:prstGeom prst="rect">
+            <a:avLst/>
+          </a:prstGeom>
+          <a:noFill/>
+          <a:ln cap="flat" cmpd="sng" w="19050">
+            <a:solidFill>
+              <a:schemeClr val="accent4"/>
+            </a:solidFill>
+            <a:prstDash val="solid"/>
+            <a:round/>
+            <a:headEnd len="sm" w="sm" type="none"/>
+            <a:tailEnd len="sm" w="sm" type="none"/>
+          </a:ln>
+        </p:spPr>
+      </p:pic>
+      <p:sp>
+        <p:nvSpPr>
+          <p:cNvPr id="108" name="Google Shape;108;p18"/>
+          <p:cNvSpPr/>
+          <p:nvPr/>
+        </p:nvSpPr>
+        <p:spPr>
+          <a:xfrm>
+            <a:off x="266975" y="2164725"/>
+            <a:ext cx="1021200" cy="232500"/>
+          </a:xfrm>
+          <a:prstGeom prst="rect">
+            <a:avLst/>
+          </a:prstGeom>
+          <a:noFill/>
+          <a:ln cap="flat" cmpd="sng" w="19050">
+            <a:solidFill>
+              <a:schemeClr val="accent3"/>
+            </a:solidFill>
+            <a:prstDash val="solid"/>
+            <a:round/>
+            <a:headEnd len="sm" w="sm" type="none"/>
+            <a:tailEnd len="sm" w="sm" type="none"/>
+          </a:ln>
+        </p:spPr>
+        <p:txBody>
+          <a:bodyPr anchorCtr="0" anchor="ctr" bIns="91425" lIns="91425" spcFirstLastPara="1" rIns="91425" wrap="square" tIns="91425">
+            <a:noAutofit/>
+          </a:bodyPr>
+          <a:lstStyle/>
+          <a:p>
+            <a:pPr indent="0" lvl="0" marL="0" rtl="0" algn="ctr">
+              <a:spcBef>
+                <a:spcPts val="0"/>
+              </a:spcBef>
+              <a:spcAft>
+                <a:spcPts val="0"/>
               </a:spcAft>
               <a:buNone/>
             </a:pPr>
             <a:r>
               <a:t/>
             </a:r>
-            <a:endParaRPr/>
+            <a:endParaRPr>
+              <a:latin typeface="Playfair Display"/>
+              <a:ea typeface="Playfair Display"/>
+              <a:cs typeface="Playfair Display"/>
+              <a:sym typeface="Playfair Display"/>
+            </a:endParaRPr>
           </a:p>
         </p:txBody>
       </p:sp>
+      <p:sp>
+        <p:nvSpPr>
+          <p:cNvPr id="109" name="Google Shape;109;p18"/>
+          <p:cNvSpPr/>
+          <p:nvPr/>
+        </p:nvSpPr>
+        <p:spPr>
+          <a:xfrm>
+            <a:off x="760350" y="4436825"/>
+            <a:ext cx="1708500" cy="161100"/>
+          </a:xfrm>
+          <a:prstGeom prst="rect">
+            <a:avLst/>
+          </a:prstGeom>
+          <a:noFill/>
+          <a:ln cap="flat" cmpd="sng" w="19050">
+            <a:solidFill>
+              <a:schemeClr val="accent3"/>
+            </a:solidFill>
+            <a:prstDash val="solid"/>
+            <a:round/>
+            <a:headEnd len="sm" w="sm" type="none"/>
+            <a:tailEnd len="sm" w="sm" type="none"/>
+          </a:ln>
+        </p:spPr>
+        <p:txBody>
+          <a:bodyPr anchorCtr="0" anchor="ctr" bIns="91425" lIns="91425" spcFirstLastPara="1" rIns="91425" wrap="square" tIns="91425">
+            <a:noAutofit/>
+          </a:bodyPr>
+          <a:lstStyle/>
+          <a:p>
+            <a:pPr indent="0" lvl="0" marL="0" rtl="0" algn="ctr">
+              <a:spcBef>
+                <a:spcPts val="0"/>
+              </a:spcBef>
+              <a:spcAft>
+                <a:spcPts val="0"/>
+              </a:spcAft>
+              <a:buNone/>
+            </a:pPr>
+            <a:r>
+              <a:t/>
+            </a:r>
+            <a:endParaRPr>
+              <a:latin typeface="Playfair Display"/>
+              <a:ea typeface="Playfair Display"/>
+              <a:cs typeface="Playfair Display"/>
+              <a:sym typeface="Playfair Display"/>
+            </a:endParaRPr>
+          </a:p>
+        </p:txBody>
+      </p:sp>
+      <p:pic>
+        <p:nvPicPr>
+          <p:cNvPr id="110" name="Google Shape;110;p18" title="Screenshot_20260928_130055.png"/>
+          <p:cNvPicPr preferRelativeResize="0"/>
+          <p:nvPr/>
+        </p:nvPicPr>
+        <p:blipFill rotWithShape="1">
+          <a:blip r:embed="rId7">
+            <a:alphaModFix/>
+          </a:blip>
+          <a:srcRect b="10660" l="6527" r="6796" t="13092"/>
+          <a:stretch/>
+        </p:blipFill>
+        <p:spPr>
+          <a:xfrm>
+            <a:off x="3721200" y="857600"/>
+            <a:ext cx="787200" cy="323175"/>
+          </a:xfrm>
+          <a:prstGeom prst="rect">
+            <a:avLst/>
+          </a:prstGeom>
+          <a:noFill/>
+          <a:ln>
+            <a:noFill/>
+          </a:ln>
+        </p:spPr>
+      </p:pic>
     </p:spTree>
   </p:cSld>
   <p:clrMapOvr>
@@ -6768,7 +9932,7 @@
   <p:cSld>
     <p:spTree>
       <p:nvGrpSpPr>
-        <p:cNvPr id="89" name="Shape 89"/>
+        <p:cNvPr id="114" name="Shape 114"/>
         <p:cNvGrpSpPr/>
         <p:nvPr/>
       </p:nvGrpSpPr>
@@ -6782,7 +9946,7 @@
       </p:grpSpPr>
       <p:sp>
         <p:nvSpPr>
-          <p:cNvPr id="90" name="Google Shape;90;p19"/>
+          <p:cNvPr id="115" name="Google Shape;115;p19"/>
           <p:cNvSpPr txBox="1"/>
           <p:nvPr>
             <p:ph type="title"/>
@@ -6790,71 +9954,31 @@
         </p:nvSpPr>
         <p:spPr>
           <a:xfrm>
-            <a:off x="311700" y="445025"/>
-            <a:ext cx="8520600" cy="572700"/>
+            <a:off x="344250" y="1403850"/>
+            <a:ext cx="8455500" cy="2146800"/>
           </a:xfrm>
           <a:prstGeom prst="rect">
             <a:avLst/>
           </a:prstGeom>
         </p:spPr>
         <p:txBody>
-          <a:bodyPr anchorCtr="0" anchor="t" bIns="91425" lIns="91425" spcFirstLastPara="1" rIns="91425" wrap="square" tIns="91425">
-            <a:normAutofit fontScale="90000"/>
-          </a:bodyPr>
-          <a:lstStyle/>
-          <a:p>
-            <a:pPr indent="0" lvl="0" marL="0" rtl="0" algn="l">
-              <a:spcBef>
-                <a:spcPts val="0"/>
-              </a:spcBef>
-              <a:spcAft>
-                <a:spcPts val="0"/>
-              </a:spcAft>
-              <a:buNone/>
-            </a:pPr>
-            <a:r>
-              <a:rPr lang="en"/>
-              <a:t>cadastro, atualizar, excluir</a:t>
-            </a:r>
-            <a:endParaRPr/>
-          </a:p>
-        </p:txBody>
-      </p:sp>
-      <p:sp>
-        <p:nvSpPr>
-          <p:cNvPr id="91" name="Google Shape;91;p19"/>
-          <p:cNvSpPr txBox="1"/>
-          <p:nvPr>
-            <p:ph idx="1" type="body"/>
-          </p:nvPr>
-        </p:nvSpPr>
-        <p:spPr>
-          <a:xfrm>
-            <a:off x="311700" y="1152475"/>
-            <a:ext cx="8520600" cy="3416400"/>
-          </a:xfrm>
-          <a:prstGeom prst="rect">
-            <a:avLst/>
-          </a:prstGeom>
-        </p:spPr>
-        <p:txBody>
-          <a:bodyPr anchorCtr="0" anchor="t" bIns="91425" lIns="91425" spcFirstLastPara="1" rIns="91425" wrap="square" tIns="91425">
+          <a:bodyPr anchorCtr="0" anchor="ctr" bIns="91425" lIns="91425" spcFirstLastPara="1" rIns="91425" wrap="square" tIns="91425">
             <a:normAutofit/>
           </a:bodyPr>
           <a:lstStyle/>
           <a:p>
-            <a:pPr indent="0" lvl="0" marL="0" rtl="0" algn="l">
-              <a:spcBef>
-                <a:spcPts val="0"/>
-              </a:spcBef>
-              <a:spcAft>
-                <a:spcPts val="1200"/>
+            <a:pPr indent="0" lvl="0" marL="0" rtl="0" algn="ctr">
+              <a:spcBef>
+                <a:spcPts val="0"/>
+              </a:spcBef>
+              <a:spcAft>
+                <a:spcPts val="0"/>
               </a:spcAft>
               <a:buNone/>
             </a:pPr>
             <a:r>
               <a:rPr lang="en"/>
-              <a:t>um por slide?</a:t>
+              <a:t>Funções do Sistema</a:t>
             </a:r>
             <a:endParaRPr/>
           </a:p>
@@ -6873,7 +9997,7 @@
   <p:cSld>
     <p:spTree>
       <p:nvGrpSpPr>
-        <p:cNvPr id="95" name="Shape 95"/>
+        <p:cNvPr id="119" name="Shape 119"/>
         <p:cNvGrpSpPr/>
         <p:nvPr/>
       </p:nvGrpSpPr>
@@ -6887,7 +10011,7 @@
       </p:grpSpPr>
       <p:sp>
         <p:nvSpPr>
-          <p:cNvPr id="96" name="Google Shape;96;p20"/>
+          <p:cNvPr id="120" name="Google Shape;120;p20"/>
           <p:cNvSpPr txBox="1"/>
           <p:nvPr>
             <p:ph type="title"/>
@@ -6895,20 +10019,20 @@
         </p:nvSpPr>
         <p:spPr>
           <a:xfrm>
-            <a:off x="311700" y="445025"/>
-            <a:ext cx="8520600" cy="572700"/>
+            <a:off x="265500" y="1081675"/>
+            <a:ext cx="4045200" cy="1786200"/>
           </a:xfrm>
           <a:prstGeom prst="rect">
             <a:avLst/>
           </a:prstGeom>
         </p:spPr>
         <p:txBody>
-          <a:bodyPr anchorCtr="0" anchor="t" bIns="91425" lIns="91425" spcFirstLastPara="1" rIns="91425" wrap="square" tIns="91425">
-            <a:normAutofit fontScale="90000"/>
+          <a:bodyPr anchorCtr="0" anchor="b" bIns="91425" lIns="91425" spcFirstLastPara="1" rIns="91425" wrap="square" tIns="91425">
+            <a:normAutofit/>
           </a:bodyPr>
           <a:lstStyle/>
           <a:p>
-            <a:pPr indent="0" lvl="0" marL="0" rtl="0" algn="l">
+            <a:pPr indent="0" lvl="0" marL="0" rtl="0" algn="ctr">
               <a:spcBef>
                 <a:spcPts val="0"/>
               </a:spcBef>
@@ -6919,7 +10043,172 @@
             </a:pPr>
             <a:r>
               <a:rPr lang="en"/>
-              <a:t>resumo/consideraçoes finais/agradecimentos idk</a:t>
+              <a:t>principal.php</a:t>
+            </a:r>
+            <a:endParaRPr/>
+          </a:p>
+        </p:txBody>
+      </p:sp>
+      <p:pic>
+        <p:nvPicPr>
+          <p:cNvPr id="121" name="Google Shape;121;p20" title="Screenshot_20260928_130114.png"/>
+          <p:cNvPicPr preferRelativeResize="0"/>
+          <p:nvPr/>
+        </p:nvPicPr>
+        <p:blipFill>
+          <a:blip r:embed="rId3">
+            <a:alphaModFix/>
+          </a:blip>
+          <a:stretch>
+            <a:fillRect/>
+          </a:stretch>
+        </p:blipFill>
+        <p:spPr>
+          <a:xfrm>
+            <a:off x="4738650" y="1449400"/>
+            <a:ext cx="4287074" cy="2142525"/>
+          </a:xfrm>
+          <a:prstGeom prst="rect">
+            <a:avLst/>
+          </a:prstGeom>
+          <a:noFill/>
+          <a:ln>
+            <a:noFill/>
+          </a:ln>
+        </p:spPr>
+      </p:pic>
+      <p:sp>
+        <p:nvSpPr>
+          <p:cNvPr id="122" name="Google Shape;122;p20"/>
+          <p:cNvSpPr txBox="1"/>
+          <p:nvPr>
+            <p:ph idx="1" type="subTitle"/>
+          </p:nvPr>
+        </p:nvSpPr>
+        <p:spPr>
+          <a:xfrm>
+            <a:off x="265500" y="2921401"/>
+            <a:ext cx="4045200" cy="1345500"/>
+          </a:xfrm>
+          <a:prstGeom prst="rect">
+            <a:avLst/>
+          </a:prstGeom>
+        </p:spPr>
+        <p:txBody>
+          <a:bodyPr anchorCtr="0" anchor="t" bIns="91425" lIns="91425" spcFirstLastPara="1" rIns="91425" wrap="square" tIns="91425">
+            <a:normAutofit fontScale="77500" lnSpcReduction="10000"/>
+          </a:bodyPr>
+          <a:lstStyle/>
+          <a:p>
+            <a:pPr indent="0" lvl="0" marL="0" rtl="0" algn="ctr">
+              <a:spcBef>
+                <a:spcPts val="0"/>
+              </a:spcBef>
+              <a:spcAft>
+                <a:spcPts val="0"/>
+              </a:spcAft>
+              <a:buNone/>
+            </a:pPr>
+            <a:r>
+              <a:rPr lang="en"/>
+              <a:t>Possui um m</a:t>
+            </a:r>
+            <a:r>
+              <a:rPr lang="en"/>
+              <a:t>enu de navegação para o formulário de cadastro (Adicionar), a lista de amigos existentes (Listar) e o botão de Logout. Ao concluir suas operações, essas páginas retornam aqui.</a:t>
+            </a:r>
+            <a:endParaRPr/>
+          </a:p>
+        </p:txBody>
+      </p:sp>
+      <p:pic>
+        <p:nvPicPr>
+          <p:cNvPr id="123" name="Google Shape;123;p20" title="Screenshot_20260928_130055.png"/>
+          <p:cNvPicPr preferRelativeResize="0"/>
+          <p:nvPr/>
+        </p:nvPicPr>
+        <p:blipFill>
+          <a:blip r:embed="rId4">
+            <a:alphaModFix/>
+          </a:blip>
+          <a:stretch>
+            <a:fillRect/>
+          </a:stretch>
+        </p:blipFill>
+        <p:spPr>
+          <a:xfrm>
+            <a:off x="4738650" y="3666825"/>
+            <a:ext cx="1285875" cy="600075"/>
+          </a:xfrm>
+          <a:prstGeom prst="rect">
+            <a:avLst/>
+          </a:prstGeom>
+          <a:noFill/>
+          <a:ln>
+            <a:noFill/>
+          </a:ln>
+        </p:spPr>
+      </p:pic>
+    </p:spTree>
+  </p:cSld>
+  <p:clrMapOvr>
+    <a:masterClrMapping/>
+  </p:clrMapOvr>
+</p:sld>
+</file>
+
+<file path=ppt/slides/slide9.xml><?xml version="1.0" encoding="utf-8"?>
+<p:sld xmlns:a="http://schemas.openxmlformats.org/drawingml/2006/main" xmlns:r="http://schemas.openxmlformats.org/officeDocument/2006/relationships" xmlns:mc="http://schemas.openxmlformats.org/markup-compatibility/2006" xmlns:mv="urn:schemas-microsoft-com:mac:vml" xmlns:p="http://schemas.openxmlformats.org/presentationml/2006/main" xmlns:c="http://schemas.openxmlformats.org/drawingml/2006/chart" xmlns:dgm="http://schemas.openxmlformats.org/drawingml/2006/diagram" xmlns:o="urn:schemas-microsoft-com:office:office" xmlns:v="urn:schemas-microsoft-com:vml" xmlns:pvml="urn:schemas-microsoft-com:office:powerpoint" xmlns:com="http://schemas.openxmlformats.org/drawingml/2006/compatibility" xmlns:p14="http://schemas.microsoft.com/office/powerpoint/2010/main" xmlns:p15="http://schemas.microsoft.com/office/powerpoint/2012/main" xmlns:ahyp="http://schemas.microsoft.com/office/drawing/2018/hyperlinkcolor">
+  <p:cSld>
+    <p:spTree>
+      <p:nvGrpSpPr>
+        <p:cNvPr id="127" name="Shape 127"/>
+        <p:cNvGrpSpPr/>
+        <p:nvPr/>
+      </p:nvGrpSpPr>
+      <p:grpSpPr>
+        <a:xfrm>
+          <a:off x="0" y="0"/>
+          <a:ext cx="0" cy="0"/>
+          <a:chOff x="0" y="0"/>
+          <a:chExt cx="0" cy="0"/>
+        </a:xfrm>
+      </p:grpSpPr>
+      <p:sp>
+        <p:nvSpPr>
+          <p:cNvPr id="128" name="Google Shape;128;p21"/>
+          <p:cNvSpPr txBox="1"/>
+          <p:nvPr>
+            <p:ph type="title"/>
+          </p:nvPr>
+        </p:nvSpPr>
+        <p:spPr>
+          <a:xfrm>
+            <a:off x="265500" y="143450"/>
+            <a:ext cx="4045200" cy="1786200"/>
+          </a:xfrm>
+          <a:prstGeom prst="rect">
+            <a:avLst/>
+          </a:prstGeom>
+        </p:spPr>
+        <p:txBody>
+          <a:bodyPr anchorCtr="0" anchor="b" bIns="91425" lIns="91425" spcFirstLastPara="1" rIns="91425" wrap="square" tIns="91425">
+            <a:normAutofit/>
+          </a:bodyPr>
+          <a:lstStyle/>
+          <a:p>
+            <a:pPr indent="0" lvl="0" marL="0" rtl="0" algn="ctr">
+              <a:spcBef>
+                <a:spcPts val="0"/>
+              </a:spcBef>
+              <a:spcAft>
+                <a:spcPts val="0"/>
+              </a:spcAft>
+              <a:buNone/>
+            </a:pPr>
+            <a:r>
+              <a:rPr lang="en"/>
+              <a:t>cadastro.php</a:t>
             </a:r>
             <a:endParaRPr/>
           </a:p>
@@ -6927,16 +10216,16 @@
       </p:sp>
       <p:sp>
         <p:nvSpPr>
-          <p:cNvPr id="97" name="Google Shape;97;p20"/>
+          <p:cNvPr id="129" name="Google Shape;129;p21"/>
           <p:cNvSpPr txBox="1"/>
           <p:nvPr>
-            <p:ph idx="1" type="body"/>
+            <p:ph idx="1" type="subTitle"/>
           </p:nvPr>
         </p:nvSpPr>
         <p:spPr>
           <a:xfrm>
-            <a:off x="311700" y="1152475"/>
-            <a:ext cx="8520600" cy="3416400"/>
+            <a:off x="265500" y="1983176"/>
+            <a:ext cx="4045200" cy="1345500"/>
           </a:xfrm>
           <a:prstGeom prst="rect">
             <a:avLst/>
@@ -6944,26 +10233,111 @@
         </p:spPr>
         <p:txBody>
           <a:bodyPr anchorCtr="0" anchor="t" bIns="91425" lIns="91425" spcFirstLastPara="1" rIns="91425" wrap="square" tIns="91425">
-            <a:normAutofit/>
+            <a:normAutofit fontScale="85000" lnSpcReduction="20000"/>
           </a:bodyPr>
           <a:lstStyle/>
           <a:p>
-            <a:pPr indent="0" lvl="0" marL="0" rtl="0" algn="l">
-              <a:spcBef>
-                <a:spcPts val="0"/>
-              </a:spcBef>
-              <a:spcAft>
-                <a:spcPts val="1200"/>
+            <a:pPr indent="0" lvl="0" marL="0" rtl="0" algn="ctr">
+              <a:spcBef>
+                <a:spcPts val="0"/>
+              </a:spcBef>
+              <a:spcAft>
+                <a:spcPts val="0"/>
               </a:spcAft>
               <a:buNone/>
             </a:pPr>
             <a:r>
-              <a:t/>
+              <a:rPr lang="en"/>
+              <a:t>Apresenta o formulário por onde cadastramos os amigos da Gabi. O comando SQL é processado pelo cadastroAction.php, que também exibe uma mensagem de sucesso. </a:t>
             </a:r>
             <a:endParaRPr/>
           </a:p>
         </p:txBody>
       </p:sp>
+      <p:pic>
+        <p:nvPicPr>
+          <p:cNvPr id="130" name="Google Shape;130;p21" title="Screenshot_20260928_131428.png"/>
+          <p:cNvPicPr preferRelativeResize="0"/>
+          <p:nvPr/>
+        </p:nvPicPr>
+        <p:blipFill>
+          <a:blip r:embed="rId3">
+            <a:alphaModFix/>
+          </a:blip>
+          <a:stretch>
+            <a:fillRect/>
+          </a:stretch>
+        </p:blipFill>
+        <p:spPr>
+          <a:xfrm>
+            <a:off x="5801825" y="143446"/>
+            <a:ext cx="3095300" cy="3160175"/>
+          </a:xfrm>
+          <a:prstGeom prst="rect">
+            <a:avLst/>
+          </a:prstGeom>
+          <a:noFill/>
+          <a:ln>
+            <a:noFill/>
+          </a:ln>
+        </p:spPr>
+      </p:pic>
+      <p:pic>
+        <p:nvPicPr>
+          <p:cNvPr id="131" name="Google Shape;131;p21" title="Screenshot_20260928_131452.png"/>
+          <p:cNvPicPr preferRelativeResize="0"/>
+          <p:nvPr/>
+        </p:nvPicPr>
+        <p:blipFill>
+          <a:blip r:embed="rId4">
+            <a:alphaModFix/>
+          </a:blip>
+          <a:stretch>
+            <a:fillRect/>
+          </a:stretch>
+        </p:blipFill>
+        <p:spPr>
+          <a:xfrm>
+            <a:off x="4697248" y="2984150"/>
+            <a:ext cx="2835751" cy="528000"/>
+          </a:xfrm>
+          <a:prstGeom prst="rect">
+            <a:avLst/>
+          </a:prstGeom>
+          <a:noFill/>
+          <a:ln>
+            <a:noFill/>
+          </a:ln>
+        </p:spPr>
+      </p:pic>
+      <p:pic>
+        <p:nvPicPr>
+          <p:cNvPr id="132" name="Google Shape;132;p21" title="Screenshot_20260928_153539.png"/>
+          <p:cNvPicPr preferRelativeResize="0"/>
+          <p:nvPr/>
+        </p:nvPicPr>
+        <p:blipFill>
+          <a:blip r:embed="rId5">
+            <a:alphaModFix/>
+          </a:blip>
+          <a:stretch>
+            <a:fillRect/>
+          </a:stretch>
+        </p:blipFill>
+        <p:spPr>
+          <a:xfrm>
+            <a:off x="265500" y="3718425"/>
+            <a:ext cx="5706599" cy="1246175"/>
+          </a:xfrm>
+          <a:prstGeom prst="rect">
+            <a:avLst/>
+          </a:prstGeom>
+          <a:noFill/>
+          <a:ln>
+            <a:noFill/>
+          </a:ln>
+        </p:spPr>
+      </p:pic>
     </p:spTree>
   </p:cSld>
   <p:clrMapOvr>
@@ -6973,44 +10347,44 @@
 </file>
 
 <file path=ppt/theme/theme1.xml><?xml version="1.0" encoding="utf-8"?>
-<a:theme xmlns:a="http://schemas.openxmlformats.org/drawingml/2006/main" xmlns:r="http://schemas.openxmlformats.org/officeDocument/2006/relationships" name="Simple Light">
+<a:theme xmlns:a="http://schemas.openxmlformats.org/drawingml/2006/main" xmlns:r="http://schemas.openxmlformats.org/officeDocument/2006/relationships" name="Pop">
   <a:themeElements>
-    <a:clrScheme name="Simple Light">
+    <a:clrScheme name="Pop">
       <a:dk1>
-        <a:srgbClr val="000000"/>
+        <a:srgbClr val="F8E71C"/>
       </a:dk1>
       <a:lt1>
         <a:srgbClr val="FFFFFF"/>
       </a:lt1>
       <a:dk2>
-        <a:srgbClr val="595959"/>
+        <a:srgbClr val="000000"/>
       </a:dk2>
       <a:lt2>
-        <a:srgbClr val="EEEEEE"/>
+        <a:srgbClr val="D9D9D9"/>
       </a:lt2>
       <a:accent1>
-        <a:srgbClr val="4285F4"/>
+        <a:srgbClr val="666666"/>
       </a:accent1>
       <a:accent2>
-        <a:srgbClr val="212121"/>
+        <a:srgbClr val="483165"/>
       </a:accent2>
       <a:accent3>
-        <a:srgbClr val="78909C"/>
+        <a:srgbClr val="EB1E95"/>
       </a:accent3>
       <a:accent4>
-        <a:srgbClr val="FFAB40"/>
+        <a:srgbClr val="01AFD1"/>
       </a:accent4>
       <a:accent5>
-        <a:srgbClr val="0097A7"/>
+        <a:srgbClr val="0F9D58"/>
       </a:accent5>
       <a:accent6>
-        <a:srgbClr val="EEFF41"/>
+        <a:srgbClr val="9C27B0"/>
       </a:accent6>
       <a:hlink>
-        <a:srgbClr val="0097A7"/>
+        <a:srgbClr val="0F9D58"/>
       </a:hlink>
       <a:folHlink>
-        <a:srgbClr val="0097A7"/>
+        <a:srgbClr val="0F9D58"/>
       </a:folHlink>
     </a:clrScheme>
     <a:fontScheme name="Office">
